--- a/Activity-U2/Ecommify_Database_Design/docs/Ecommify - Presentacion Ejecutiva (Etapa 2).pptx
+++ b/Activity-U2/Ecommify_Database_Design/docs/Ecommify - Presentacion Ejecutiva (Etapa 2).pptx
@@ -10,15 +10,14 @@
     <p:sldId id="258" r:id="rId4"/>
     <p:sldId id="259" r:id="rId5"/>
     <p:sldId id="260" r:id="rId6"/>
-    <p:sldId id="269" r:id="rId7"/>
-    <p:sldId id="261" r:id="rId8"/>
-    <p:sldId id="262" r:id="rId9"/>
-    <p:sldId id="263" r:id="rId10"/>
-    <p:sldId id="264" r:id="rId11"/>
-    <p:sldId id="265" r:id="rId12"/>
-    <p:sldId id="266" r:id="rId13"/>
-    <p:sldId id="267" r:id="rId14"/>
-    <p:sldId id="268" r:id="rId15"/>
+    <p:sldId id="261" r:id="rId7"/>
+    <p:sldId id="262" r:id="rId8"/>
+    <p:sldId id="263" r:id="rId9"/>
+    <p:sldId id="264" r:id="rId10"/>
+    <p:sldId id="265" r:id="rId11"/>
+    <p:sldId id="266" r:id="rId12"/>
+    <p:sldId id="267" r:id="rId13"/>
+    <p:sldId id="268" r:id="rId14"/>
   </p:sldIdLst>
   <p:sldSz cx="12192000" cy="6858000"/>
   <p:notesSz cx="6858000" cy="9144000"/>
@@ -3842,7 +3841,7 @@
                 </a:solidFill>
                 <a:latin typeface="Calibri"/>
               </a:rPr>
-              <a:t>Diseño lógico PostgreSQL — Normalización 3FN</a:t>
+              <a:t>PostgreSQL — Tipos avanzados, extensiones y particiones</a:t>
             </a:r>
           </a:p>
         </p:txBody>
@@ -3971,21 +3970,108 @@
                 </a:solidFill>
                 <a:latin typeface="Calibri"/>
               </a:rPr>
-              <a:t>8</a:t>
-            </a:r>
-          </a:p>
-        </p:txBody>
-      </p:sp>
-      <p:sp>
-        <p:nvSpPr>
-          <p:cNvPr id="10" name="TextBox 9"/>
+              <a:t>9</a:t>
+            </a:r>
+          </a:p>
+        </p:txBody>
+      </p:sp>
+      <p:sp>
+        <p:nvSpPr>
+          <p:cNvPr id="10" name="Rectangle 9"/>
+          <p:cNvSpPr/>
+          <p:nvPr/>
+        </p:nvSpPr>
+        <p:spPr>
+          <a:xfrm>
+            <a:off x="640080" y="1371600"/>
+            <a:ext cx="3520440" cy="457200"/>
+          </a:xfrm>
+          <a:prstGeom prst="rect">
+            <a:avLst/>
+          </a:prstGeom>
+          <a:solidFill>
+            <a:srgbClr val="336791"/>
+          </a:solidFill>
+          <a:ln>
+            <a:noFill/>
+          </a:ln>
+          <a:effectLst/>
+        </p:spPr>
+        <p:style>
+          <a:lnRef idx="1">
+            <a:schemeClr val="accent1"/>
+          </a:lnRef>
+          <a:fillRef idx="3">
+            <a:schemeClr val="accent1"/>
+          </a:fillRef>
+          <a:effectRef idx="2">
+            <a:schemeClr val="accent1"/>
+          </a:effectRef>
+          <a:fontRef idx="minor">
+            <a:schemeClr val="lt1"/>
+          </a:fontRef>
+        </p:style>
+        <p:txBody>
+          <a:bodyPr rtlCol="0" anchor="ctr"/>
+          <a:lstStyle/>
+          <a:p>
+            <a:pPr algn="ctr"/>
+            <a:endParaRPr/>
+          </a:p>
+        </p:txBody>
+      </p:sp>
+      <p:sp>
+        <p:nvSpPr>
+          <p:cNvPr id="11" name="TextBox 10"/>
           <p:cNvSpPr txBox="1"/>
           <p:nvPr/>
         </p:nvSpPr>
         <p:spPr>
           <a:xfrm>
-            <a:off x="640080" y="1417320"/>
-            <a:ext cx="10972800" cy="1737360"/>
+            <a:off x="777240" y="1389888"/>
+            <a:ext cx="3291840" cy="411480"/>
+          </a:xfrm>
+          <a:prstGeom prst="rect">
+            <a:avLst/>
+          </a:prstGeom>
+          <a:noFill/>
+        </p:spPr>
+        <p:txBody>
+          <a:bodyPr wrap="square" anchor="ctr">
+            <a:spAutoFit/>
+          </a:bodyPr>
+          <a:lstStyle/>
+          <a:p>
+            <a:pPr algn="l">
+              <a:spcBef>
+                <a:spcPts val="0"/>
+              </a:spcBef>
+              <a:spcAft>
+                <a:spcPts val="600"/>
+              </a:spcAft>
+            </a:pPr>
+            <a:r>
+              <a:rPr sz="1400" b="1">
+                <a:solidFill>
+                  <a:srgbClr val="FFFFFF"/>
+                </a:solidFill>
+                <a:latin typeface="Calibri"/>
+              </a:rPr>
+              <a:t>Tipos avanzados</a:t>
+            </a:r>
+          </a:p>
+        </p:txBody>
+      </p:sp>
+      <p:sp>
+        <p:nvSpPr>
+          <p:cNvPr id="12" name="TextBox 11"/>
+          <p:cNvSpPr txBox="1"/>
+          <p:nvPr/>
+        </p:nvSpPr>
+        <p:spPr>
+          <a:xfrm>
+            <a:off x="731520" y="1920240"/>
+            <a:ext cx="3474720" cy="4114800"/>
           </a:xfrm>
           <a:prstGeom prst="rect">
             <a:avLst/>
@@ -4004,7 +4090,7 @@
               </a:spcAft>
             </a:pPr>
             <a:r>
-              <a:rPr sz="1700" b="1">
+              <a:rPr sz="1250" b="1">
                 <a:solidFill>
                   <a:srgbClr val="336791"/>
                 </a:solidFill>
@@ -4013,429 +4099,579 @@
               <a:t>▪  </a:t>
             </a:r>
             <a:r>
-              <a:rPr sz="1700">
-                <a:solidFill>
-                  <a:srgbClr val="222A38"/>
-                </a:solidFill>
-                <a:latin typeface="Calibri"/>
-              </a:rPr>
-              <a:t>Se parte de la tabla desnormalizada orders_full y se eliminan anomalías forma por forma:</a:t>
-            </a:r>
-          </a:p>
-          <a:p>
-            <a:pPr lvl="1">
+              <a:rPr sz="1250">
+                <a:solidFill>
+                  <a:srgbClr val="222A38"/>
+                </a:solidFill>
+                <a:latin typeface="Calibri"/>
+              </a:rPr>
+              <a:t>composite dimension_cm (dimensiones)</a:t>
+            </a:r>
+          </a:p>
+          <a:p>
+            <a:pPr>
               <a:spcAft>
                 <a:spcPts val="800"/>
               </a:spcAft>
             </a:pPr>
             <a:r>
-              <a:rPr sz="1700" b="1">
-                <a:solidFill>
-                  <a:srgbClr val="13AA52"/>
-                </a:solidFill>
-                <a:latin typeface="Calibri"/>
-              </a:rPr>
-              <a:t>–  </a:t>
-            </a:r>
-            <a:r>
-              <a:rPr sz="1600">
-                <a:solidFill>
-                  <a:srgbClr val="222A38"/>
-                </a:solidFill>
-                <a:latin typeface="Calibri"/>
-              </a:rPr>
-              <a:t>1FN: ítems y pagos múltiples → entidades Order_Items y Order_Payments (filas atómicas).</a:t>
-            </a:r>
-          </a:p>
-          <a:p>
-            <a:pPr lvl="1">
+              <a:rPr sz="1250" b="1">
+                <a:solidFill>
+                  <a:srgbClr val="336791"/>
+                </a:solidFill>
+                <a:latin typeface="Calibri"/>
+              </a:rPr>
+              <a:t>▪  </a:t>
+            </a:r>
+            <a:r>
+              <a:rPr sz="1250">
+                <a:solidFill>
+                  <a:srgbClr val="222A38"/>
+                </a:solidFill>
+                <a:latin typeface="Calibri"/>
+              </a:rPr>
+              <a:t>JSONB extra_attributes (catálogo) + GIN</a:t>
+            </a:r>
+          </a:p>
+          <a:p>
+            <a:pPr>
               <a:spcAft>
                 <a:spcPts val="800"/>
               </a:spcAft>
             </a:pPr>
             <a:r>
-              <a:rPr sz="1700" b="1">
-                <a:solidFill>
-                  <a:srgbClr val="13AA52"/>
-                </a:solidFill>
-                <a:latin typeface="Calibri"/>
-              </a:rPr>
-              <a:t>–  </a:t>
-            </a:r>
-            <a:r>
-              <a:rPr sz="1600">
-                <a:solidFill>
-                  <a:srgbClr val="222A38"/>
-                </a:solidFill>
-                <a:latin typeface="Calibri"/>
-              </a:rPr>
-              <a:t>2FN: atributos del producto dependientes solo de product_id → entidad Products.</a:t>
-            </a:r>
-          </a:p>
-          <a:p>
-            <a:pPr lvl="1">
+              <a:rPr sz="1250" b="1">
+                <a:solidFill>
+                  <a:srgbClr val="336791"/>
+                </a:solidFill>
+                <a:latin typeface="Calibri"/>
+              </a:rPr>
+              <a:t>▪  </a:t>
+            </a:r>
+            <a:r>
+              <a:rPr sz="1250">
+                <a:solidFill>
+                  <a:srgbClr val="222A38"/>
+                </a:solidFill>
+                <a:latin typeface="Calibri"/>
+              </a:rPr>
+              <a:t>array photo_urls (multivaluado) + GIN</a:t>
+            </a:r>
+          </a:p>
+          <a:p>
+            <a:pPr>
               <a:spcAft>
                 <a:spcPts val="800"/>
               </a:spcAft>
             </a:pPr>
             <a:r>
-              <a:rPr sz="1700" b="1">
-                <a:solidFill>
-                  <a:srgbClr val="13AA52"/>
-                </a:solidFill>
-                <a:latin typeface="Calibri"/>
-              </a:rPr>
-              <a:t>–  </a:t>
-            </a:r>
-            <a:r>
-              <a:rPr sz="1600">
-                <a:solidFill>
-                  <a:srgbClr val="222A38"/>
-                </a:solidFill>
-                <a:latin typeface="Calibri"/>
-              </a:rPr>
-              <a:t>3FN: ciudad/estado (transitivos del zip) → Geolocation; traducción → Category_Translation.</a:t>
-            </a:r>
-          </a:p>
-        </p:txBody>
-      </p:sp>
-      <p:graphicFrame>
-        <p:nvGraphicFramePr>
-          <p:cNvPr id="11" name="Table 10"/>
-          <p:cNvGraphicFramePr>
-            <a:graphicFrameLocks noGrp="1"/>
-          </p:cNvGraphicFramePr>
-          <p:nvPr/>
-        </p:nvGraphicFramePr>
-        <p:xfrm>
-          <a:off x="640080" y="3429000"/>
-          <a:ext cx="10881360" cy="2377440"/>
-        </p:xfrm>
-        <a:graphic>
-          <a:graphicData uri="http://schemas.openxmlformats.org/drawingml/2006/table">
-            <a:tbl>
-              <a:tblPr firstRow="1" bandRow="1">
-                <a:tableStyleId>{5C22544A-7EE6-4342-B048-85BDC9FD1C3A}</a:tableStyleId>
-              </a:tblPr>
-              <a:tblGrid>
-                <a:gridCol w="1188720">
-                  <a:extLst>
-                    <a:ext uri="{9D8B030D-6E8A-4147-A177-3AD203B41FA5}">
-                      <a16:colId xmlns:a16="http://schemas.microsoft.com/office/drawing/2014/main" val="20000"/>
-                    </a:ext>
-                  </a:extLst>
-                </a:gridCol>
-                <a:gridCol w="4572000">
-                  <a:extLst>
-                    <a:ext uri="{9D8B030D-6E8A-4147-A177-3AD203B41FA5}">
-                      <a16:colId xmlns:a16="http://schemas.microsoft.com/office/drawing/2014/main" val="20001"/>
-                    </a:ext>
-                  </a:extLst>
-                </a:gridCol>
-                <a:gridCol w="5120640">
-                  <a:extLst>
-                    <a:ext uri="{9D8B030D-6E8A-4147-A177-3AD203B41FA5}">
-                      <a16:colId xmlns:a16="http://schemas.microsoft.com/office/drawing/2014/main" val="20002"/>
-                    </a:ext>
-                  </a:extLst>
-                </a:gridCol>
-              </a:tblGrid>
-              <a:tr h="594360">
-                <a:tc>
-                  <a:txBody>
-                    <a:bodyPr/>
-                    <a:lstStyle/>
-                    <a:p>
-                      <a:r>
-                        <a:rPr sz="1250" b="1">
-                          <a:solidFill>
-                            <a:srgbClr val="FFFFFF"/>
-                          </a:solidFill>
-                          <a:latin typeface="Calibri"/>
-                        </a:rPr>
-                        <a:t>Forma</a:t>
-                      </a:r>
-                    </a:p>
-                  </a:txBody>
-                  <a:tcPr marL="73152" marR="73152" marT="27432" marB="27432" anchor="ctr">
-                    <a:solidFill>
-                      <a:srgbClr val="16284A"/>
-                    </a:solidFill>
-                  </a:tcPr>
-                </a:tc>
-                <a:tc>
-                  <a:txBody>
-                    <a:bodyPr/>
-                    <a:lstStyle/>
-                    <a:p>
-                      <a:r>
-                        <a:rPr sz="1250" b="1">
-                          <a:solidFill>
-                            <a:srgbClr val="FFFFFF"/>
-                          </a:solidFill>
-                          <a:latin typeface="Calibri"/>
-                        </a:rPr>
-                        <a:t>Anomalía corregida</a:t>
-                      </a:r>
-                    </a:p>
-                  </a:txBody>
-                  <a:tcPr marL="73152" marR="73152" marT="27432" marB="27432" anchor="ctr">
-                    <a:solidFill>
-                      <a:srgbClr val="16284A"/>
-                    </a:solidFill>
-                  </a:tcPr>
-                </a:tc>
-                <a:tc>
-                  <a:txBody>
-                    <a:bodyPr/>
-                    <a:lstStyle/>
-                    <a:p>
-                      <a:r>
-                        <a:rPr sz="1250" b="1">
-                          <a:solidFill>
-                            <a:srgbClr val="FFFFFF"/>
-                          </a:solidFill>
-                          <a:latin typeface="Calibri"/>
-                        </a:rPr>
-                        <a:t>Decisión de diseño</a:t>
-                      </a:r>
-                    </a:p>
-                  </a:txBody>
-                  <a:tcPr marL="73152" marR="73152" marT="27432" marB="27432" anchor="ctr">
-                    <a:solidFill>
-                      <a:srgbClr val="16284A"/>
-                    </a:solidFill>
-                  </a:tcPr>
-                </a:tc>
-                <a:extLst>
-                  <a:ext uri="{0D108BD9-81ED-4DB2-BD59-A6C34878D82A}">
-                    <a16:rowId xmlns:a16="http://schemas.microsoft.com/office/drawing/2014/main" val="10000"/>
-                  </a:ext>
-                </a:extLst>
-              </a:tr>
-              <a:tr h="594360">
-                <a:tc>
-                  <a:txBody>
-                    <a:bodyPr/>
-                    <a:lstStyle/>
-                    <a:p>
-                      <a:r>
-                        <a:rPr sz="1200" b="0">
-                          <a:solidFill>
-                            <a:srgbClr val="222A38"/>
-                          </a:solidFill>
-                          <a:latin typeface="Calibri"/>
-                        </a:rPr>
-                        <a:t>1FN</a:t>
-                      </a:r>
-                    </a:p>
-                  </a:txBody>
-                  <a:tcPr marL="73152" marR="73152" marT="27432" marB="27432" anchor="ctr">
-                    <a:solidFill>
-                      <a:srgbClr val="FFFFFF"/>
-                    </a:solidFill>
-                  </a:tcPr>
-                </a:tc>
-                <a:tc>
-                  <a:txBody>
-                    <a:bodyPr/>
-                    <a:lstStyle/>
-                    <a:p>
-                      <a:r>
-                        <a:rPr sz="1200" b="0">
-                          <a:solidFill>
-                            <a:srgbClr val="222A38"/>
-                          </a:solidFill>
-                          <a:latin typeface="Calibri"/>
-                        </a:rPr>
-                        <a:t>Grupos repetitivos en el pedido</a:t>
-                      </a:r>
-                    </a:p>
-                  </a:txBody>
-                  <a:tcPr marL="73152" marR="73152" marT="27432" marB="27432" anchor="ctr">
-                    <a:solidFill>
-                      <a:srgbClr val="FFFFFF"/>
-                    </a:solidFill>
-                  </a:tcPr>
-                </a:tc>
-                <a:tc>
-                  <a:txBody>
-                    <a:bodyPr/>
-                    <a:lstStyle/>
-                    <a:p>
-                      <a:r>
-                        <a:rPr sz="1200" b="0">
-                          <a:solidFill>
-                            <a:srgbClr val="222A38"/>
-                          </a:solidFill>
-                          <a:latin typeface="Calibri"/>
-                        </a:rPr>
-                        <a:t>Order_Items y Order_Payments</a:t>
-                      </a:r>
-                    </a:p>
-                  </a:txBody>
-                  <a:tcPr marL="73152" marR="73152" marT="27432" marB="27432" anchor="ctr">
-                    <a:solidFill>
-                      <a:srgbClr val="FFFFFF"/>
-                    </a:solidFill>
-                  </a:tcPr>
-                </a:tc>
-                <a:extLst>
-                  <a:ext uri="{0D108BD9-81ED-4DB2-BD59-A6C34878D82A}">
-                    <a16:rowId xmlns:a16="http://schemas.microsoft.com/office/drawing/2014/main" val="10001"/>
-                  </a:ext>
-                </a:extLst>
-              </a:tr>
-              <a:tr h="594360">
-                <a:tc>
-                  <a:txBody>
-                    <a:bodyPr/>
-                    <a:lstStyle/>
-                    <a:p>
-                      <a:r>
-                        <a:rPr sz="1200" b="0">
-                          <a:solidFill>
-                            <a:srgbClr val="222A38"/>
-                          </a:solidFill>
-                          <a:latin typeface="Calibri"/>
-                        </a:rPr>
-                        <a:t>2FN</a:t>
-                      </a:r>
-                    </a:p>
-                  </a:txBody>
-                  <a:tcPr marL="73152" marR="73152" marT="27432" marB="27432" anchor="ctr">
-                    <a:solidFill>
-                      <a:srgbClr val="F4F6F9"/>
-                    </a:solidFill>
-                  </a:tcPr>
-                </a:tc>
-                <a:tc>
-                  <a:txBody>
-                    <a:bodyPr/>
-                    <a:lstStyle/>
-                    <a:p>
-                      <a:r>
-                        <a:rPr sz="1200" b="0">
-                          <a:solidFill>
-                            <a:srgbClr val="222A38"/>
-                          </a:solidFill>
-                          <a:latin typeface="Calibri"/>
-                        </a:rPr>
-                        <a:t>Atributos de producto en la línea de pedido</a:t>
-                      </a:r>
-                    </a:p>
-                  </a:txBody>
-                  <a:tcPr marL="73152" marR="73152" marT="27432" marB="27432" anchor="ctr">
-                    <a:solidFill>
-                      <a:srgbClr val="F4F6F9"/>
-                    </a:solidFill>
-                  </a:tcPr>
-                </a:tc>
-                <a:tc>
-                  <a:txBody>
-                    <a:bodyPr/>
-                    <a:lstStyle/>
-                    <a:p>
-                      <a:r>
-                        <a:rPr sz="1200" b="0">
-                          <a:solidFill>
-                            <a:srgbClr val="222A38"/>
-                          </a:solidFill>
-                          <a:latin typeface="Calibri"/>
-                        </a:rPr>
-                        <a:t>Movidos a Products (PK retiene lo dependiente de la clave completa)</a:t>
-                      </a:r>
-                    </a:p>
-                  </a:txBody>
-                  <a:tcPr marL="73152" marR="73152" marT="27432" marB="27432" anchor="ctr">
-                    <a:solidFill>
-                      <a:srgbClr val="F4F6F9"/>
-                    </a:solidFill>
-                  </a:tcPr>
-                </a:tc>
-                <a:extLst>
-                  <a:ext uri="{0D108BD9-81ED-4DB2-BD59-A6C34878D82A}">
-                    <a16:rowId xmlns:a16="http://schemas.microsoft.com/office/drawing/2014/main" val="10002"/>
-                  </a:ext>
-                </a:extLst>
-              </a:tr>
-              <a:tr h="594360">
-                <a:tc>
-                  <a:txBody>
-                    <a:bodyPr/>
-                    <a:lstStyle/>
-                    <a:p>
-                      <a:r>
-                        <a:rPr sz="1200" b="0">
-                          <a:solidFill>
-                            <a:srgbClr val="222A38"/>
-                          </a:solidFill>
-                          <a:latin typeface="Calibri"/>
-                        </a:rPr>
-                        <a:t>3FN</a:t>
-                      </a:r>
-                    </a:p>
-                  </a:txBody>
-                  <a:tcPr marL="73152" marR="73152" marT="27432" marB="27432" anchor="ctr">
-                    <a:solidFill>
-                      <a:srgbClr val="FFFFFF"/>
-                    </a:solidFill>
-                  </a:tcPr>
-                </a:tc>
-                <a:tc>
-                  <a:txBody>
-                    <a:bodyPr/>
-                    <a:lstStyle/>
-                    <a:p>
-                      <a:r>
-                        <a:rPr sz="1200" b="0">
-                          <a:solidFill>
-                            <a:srgbClr val="222A38"/>
-                          </a:solidFill>
-                          <a:latin typeface="Calibri"/>
-                        </a:rPr>
-                        <a:t>ciudad/estado según zip; traducción según categoría</a:t>
-                      </a:r>
-                    </a:p>
-                  </a:txBody>
-                  <a:tcPr marL="73152" marR="73152" marT="27432" marB="27432" anchor="ctr">
-                    <a:solidFill>
-                      <a:srgbClr val="FFFFFF"/>
-                    </a:solidFill>
-                  </a:tcPr>
-                </a:tc>
-                <a:tc>
-                  <a:txBody>
-                    <a:bodyPr/>
-                    <a:lstStyle/>
-                    <a:p>
-                      <a:r>
-                        <a:rPr sz="1200" b="0">
-                          <a:solidFill>
-                            <a:srgbClr val="222A38"/>
-                          </a:solidFill>
-                          <a:latin typeface="Calibri"/>
-                        </a:rPr>
-                        <a:t>Entidades Geolocation y Category_Translation</a:t>
-                      </a:r>
-                    </a:p>
-                  </a:txBody>
-                  <a:tcPr marL="73152" marR="73152" marT="27432" marB="27432" anchor="ctr">
-                    <a:solidFill>
-                      <a:srgbClr val="FFFFFF"/>
-                    </a:solidFill>
-                  </a:tcPr>
-                </a:tc>
-                <a:extLst>
-                  <a:ext uri="{0D108BD9-81ED-4DB2-BD59-A6C34878D82A}">
-                    <a16:rowId xmlns:a16="http://schemas.microsoft.com/office/drawing/2014/main" val="10003"/>
-                  </a:ext>
-                </a:extLst>
-              </a:tr>
-            </a:tbl>
-          </a:graphicData>
-        </a:graphic>
-      </p:graphicFrame>
+              <a:rPr sz="1250" b="1">
+                <a:solidFill>
+                  <a:srgbClr val="336791"/>
+                </a:solidFill>
+                <a:latin typeface="Calibri"/>
+              </a:rPr>
+              <a:t>▪  </a:t>
+            </a:r>
+            <a:r>
+              <a:rPr sz="1250">
+                <a:solidFill>
+                  <a:srgbClr val="222A38"/>
+                </a:solidFill>
+                <a:latin typeface="Calibri"/>
+              </a:rPr>
+              <a:t>tstzrange delivery_window + GiST</a:t>
+            </a:r>
+          </a:p>
+        </p:txBody>
+      </p:sp>
+      <p:sp>
+        <p:nvSpPr>
+          <p:cNvPr id="13" name="Rectangle 12"/>
+          <p:cNvSpPr/>
+          <p:nvPr/>
+        </p:nvSpPr>
+        <p:spPr>
+          <a:xfrm>
+            <a:off x="4343400" y="1371600"/>
+            <a:ext cx="3520440" cy="457200"/>
+          </a:xfrm>
+          <a:prstGeom prst="rect">
+            <a:avLst/>
+          </a:prstGeom>
+          <a:solidFill>
+            <a:srgbClr val="13AA52"/>
+          </a:solidFill>
+          <a:ln>
+            <a:noFill/>
+          </a:ln>
+          <a:effectLst/>
+        </p:spPr>
+        <p:style>
+          <a:lnRef idx="1">
+            <a:schemeClr val="accent1"/>
+          </a:lnRef>
+          <a:fillRef idx="3">
+            <a:schemeClr val="accent1"/>
+          </a:fillRef>
+          <a:effectRef idx="2">
+            <a:schemeClr val="accent1"/>
+          </a:effectRef>
+          <a:fontRef idx="minor">
+            <a:schemeClr val="lt1"/>
+          </a:fontRef>
+        </p:style>
+        <p:txBody>
+          <a:bodyPr rtlCol="0" anchor="ctr"/>
+          <a:lstStyle/>
+          <a:p>
+            <a:pPr algn="ctr"/>
+            <a:endParaRPr/>
+          </a:p>
+        </p:txBody>
+      </p:sp>
+      <p:sp>
+        <p:nvSpPr>
+          <p:cNvPr id="14" name="TextBox 13"/>
+          <p:cNvSpPr txBox="1"/>
+          <p:nvPr/>
+        </p:nvSpPr>
+        <p:spPr>
+          <a:xfrm>
+            <a:off x="4480560" y="1389888"/>
+            <a:ext cx="3291840" cy="411480"/>
+          </a:xfrm>
+          <a:prstGeom prst="rect">
+            <a:avLst/>
+          </a:prstGeom>
+          <a:noFill/>
+        </p:spPr>
+        <p:txBody>
+          <a:bodyPr wrap="square" anchor="ctr">
+            <a:spAutoFit/>
+          </a:bodyPr>
+          <a:lstStyle/>
+          <a:p>
+            <a:pPr algn="l">
+              <a:spcBef>
+                <a:spcPts val="0"/>
+              </a:spcBef>
+              <a:spcAft>
+                <a:spcPts val="600"/>
+              </a:spcAft>
+            </a:pPr>
+            <a:r>
+              <a:rPr sz="1400" b="1">
+                <a:solidFill>
+                  <a:srgbClr val="FFFFFF"/>
+                </a:solidFill>
+                <a:latin typeface="Calibri"/>
+              </a:rPr>
+              <a:t>Extensiones</a:t>
+            </a:r>
+          </a:p>
+        </p:txBody>
+      </p:sp>
+      <p:sp>
+        <p:nvSpPr>
+          <p:cNvPr id="15" name="TextBox 14"/>
+          <p:cNvSpPr txBox="1"/>
+          <p:nvPr/>
+        </p:nvSpPr>
+        <p:spPr>
+          <a:xfrm>
+            <a:off x="4434840" y="1920240"/>
+            <a:ext cx="3474720" cy="4114800"/>
+          </a:xfrm>
+          <a:prstGeom prst="rect">
+            <a:avLst/>
+          </a:prstGeom>
+          <a:noFill/>
+        </p:spPr>
+        <p:txBody>
+          <a:bodyPr wrap="square">
+            <a:spAutoFit/>
+          </a:bodyPr>
+          <a:lstStyle/>
+          <a:p>
+            <a:pPr>
+              <a:spcAft>
+                <a:spcPts val="800"/>
+              </a:spcAft>
+            </a:pPr>
+            <a:r>
+              <a:rPr sz="1250" b="1">
+                <a:solidFill>
+                  <a:srgbClr val="336791"/>
+                </a:solidFill>
+                <a:latin typeface="Calibri"/>
+              </a:rPr>
+              <a:t>▪  </a:t>
+            </a:r>
+            <a:r>
+              <a:rPr sz="1250">
+                <a:solidFill>
+                  <a:srgbClr val="222A38"/>
+                </a:solidFill>
+                <a:latin typeface="Calibri"/>
+              </a:rPr>
+              <a:t>pgcrypto (UUID)</a:t>
+            </a:r>
+          </a:p>
+          <a:p>
+            <a:pPr>
+              <a:spcAft>
+                <a:spcPts val="800"/>
+              </a:spcAft>
+            </a:pPr>
+            <a:r>
+              <a:rPr sz="1250" b="1">
+                <a:solidFill>
+                  <a:srgbClr val="336791"/>
+                </a:solidFill>
+                <a:latin typeface="Calibri"/>
+              </a:rPr>
+              <a:t>▪  </a:t>
+            </a:r>
+            <a:r>
+              <a:rPr sz="1250">
+                <a:solidFill>
+                  <a:srgbClr val="222A38"/>
+                </a:solidFill>
+                <a:latin typeface="Calibri"/>
+              </a:rPr>
+              <a:t>unaccent + pg_trgm (búsqueda difusa)</a:t>
+            </a:r>
+          </a:p>
+          <a:p>
+            <a:pPr>
+              <a:spcAft>
+                <a:spcPts val="800"/>
+              </a:spcAft>
+            </a:pPr>
+            <a:r>
+              <a:rPr sz="1250" b="1">
+                <a:solidFill>
+                  <a:srgbClr val="336791"/>
+                </a:solidFill>
+                <a:latin typeface="Calibri"/>
+              </a:rPr>
+              <a:t>▪  </a:t>
+            </a:r>
+            <a:r>
+              <a:rPr sz="1250">
+                <a:solidFill>
+                  <a:srgbClr val="222A38"/>
+                </a:solidFill>
+                <a:latin typeface="Calibri"/>
+              </a:rPr>
+              <a:t>btree_gin / btree_gist</a:t>
+            </a:r>
+          </a:p>
+          <a:p>
+            <a:pPr>
+              <a:spcAft>
+                <a:spcPts val="800"/>
+              </a:spcAft>
+            </a:pPr>
+            <a:r>
+              <a:rPr sz="1250" b="1">
+                <a:solidFill>
+                  <a:srgbClr val="336791"/>
+                </a:solidFill>
+                <a:latin typeface="Calibri"/>
+              </a:rPr>
+              <a:t>▪  </a:t>
+            </a:r>
+            <a:r>
+              <a:rPr sz="1250">
+                <a:solidFill>
+                  <a:srgbClr val="222A38"/>
+                </a:solidFill>
+                <a:latin typeface="Calibri"/>
+              </a:rPr>
+              <a:t>postgis (geoespacial)</a:t>
+            </a:r>
+          </a:p>
+          <a:p>
+            <a:pPr>
+              <a:spcAft>
+                <a:spcPts val="800"/>
+              </a:spcAft>
+            </a:pPr>
+            <a:r>
+              <a:rPr sz="1250" b="1">
+                <a:solidFill>
+                  <a:srgbClr val="336791"/>
+                </a:solidFill>
+                <a:latin typeface="Calibri"/>
+              </a:rPr>
+              <a:t>▪  </a:t>
+            </a:r>
+            <a:r>
+              <a:rPr sz="1250">
+                <a:solidFill>
+                  <a:srgbClr val="222A38"/>
+                </a:solidFill>
+                <a:latin typeface="Calibri"/>
+              </a:rPr>
+              <a:t>pg_stat_statements (optimización)</a:t>
+            </a:r>
+          </a:p>
+        </p:txBody>
+      </p:sp>
+      <p:sp>
+        <p:nvSpPr>
+          <p:cNvPr id="16" name="Rectangle 15"/>
+          <p:cNvSpPr/>
+          <p:nvPr/>
+        </p:nvSpPr>
+        <p:spPr>
+          <a:xfrm>
+            <a:off x="8046720" y="1371600"/>
+            <a:ext cx="3520440" cy="457200"/>
+          </a:xfrm>
+          <a:prstGeom prst="rect">
+            <a:avLst/>
+          </a:prstGeom>
+          <a:solidFill>
+            <a:srgbClr val="16284A"/>
+          </a:solidFill>
+          <a:ln>
+            <a:noFill/>
+          </a:ln>
+          <a:effectLst/>
+        </p:spPr>
+        <p:style>
+          <a:lnRef idx="1">
+            <a:schemeClr val="accent1"/>
+          </a:lnRef>
+          <a:fillRef idx="3">
+            <a:schemeClr val="accent1"/>
+          </a:fillRef>
+          <a:effectRef idx="2">
+            <a:schemeClr val="accent1"/>
+          </a:effectRef>
+          <a:fontRef idx="minor">
+            <a:schemeClr val="lt1"/>
+          </a:fontRef>
+        </p:style>
+        <p:txBody>
+          <a:bodyPr rtlCol="0" anchor="ctr"/>
+          <a:lstStyle/>
+          <a:p>
+            <a:pPr algn="ctr"/>
+            <a:endParaRPr/>
+          </a:p>
+        </p:txBody>
+      </p:sp>
+      <p:sp>
+        <p:nvSpPr>
+          <p:cNvPr id="17" name="TextBox 16"/>
+          <p:cNvSpPr txBox="1"/>
+          <p:nvPr/>
+        </p:nvSpPr>
+        <p:spPr>
+          <a:xfrm>
+            <a:off x="8183879" y="1389888"/>
+            <a:ext cx="3291840" cy="411480"/>
+          </a:xfrm>
+          <a:prstGeom prst="rect">
+            <a:avLst/>
+          </a:prstGeom>
+          <a:noFill/>
+        </p:spPr>
+        <p:txBody>
+          <a:bodyPr wrap="square" anchor="ctr">
+            <a:spAutoFit/>
+          </a:bodyPr>
+          <a:lstStyle/>
+          <a:p>
+            <a:pPr algn="l">
+              <a:spcBef>
+                <a:spcPts val="0"/>
+              </a:spcBef>
+              <a:spcAft>
+                <a:spcPts val="600"/>
+              </a:spcAft>
+            </a:pPr>
+            <a:r>
+              <a:rPr sz="1400" b="1">
+                <a:solidFill>
+                  <a:srgbClr val="FFFFFF"/>
+                </a:solidFill>
+                <a:latin typeface="Calibri"/>
+              </a:rPr>
+              <a:t>Particionamiento</a:t>
+            </a:r>
+          </a:p>
+        </p:txBody>
+      </p:sp>
+      <p:sp>
+        <p:nvSpPr>
+          <p:cNvPr id="18" name="TextBox 17"/>
+          <p:cNvSpPr txBox="1"/>
+          <p:nvPr/>
+        </p:nvSpPr>
+        <p:spPr>
+          <a:xfrm>
+            <a:off x="8138160" y="1920240"/>
+            <a:ext cx="3474720" cy="4114800"/>
+          </a:xfrm>
+          <a:prstGeom prst="rect">
+            <a:avLst/>
+          </a:prstGeom>
+          <a:noFill/>
+        </p:spPr>
+        <p:txBody>
+          <a:bodyPr wrap="square">
+            <a:spAutoFit/>
+          </a:bodyPr>
+          <a:lstStyle/>
+          <a:p>
+            <a:pPr>
+              <a:spcAft>
+                <a:spcPts val="800"/>
+              </a:spcAft>
+            </a:pPr>
+            <a:r>
+              <a:rPr sz="1250" b="1">
+                <a:solidFill>
+                  <a:srgbClr val="336791"/>
+                </a:solidFill>
+                <a:latin typeface="Calibri"/>
+              </a:rPr>
+              <a:t>▪  </a:t>
+            </a:r>
+            <a:r>
+              <a:rPr sz="1250">
+                <a:solidFill>
+                  <a:srgbClr val="222A38"/>
+                </a:solidFill>
+                <a:latin typeface="Calibri"/>
+              </a:rPr>
+              <a:t>Orders: RANGE por fecha de compra</a:t>
+            </a:r>
+          </a:p>
+          <a:p>
+            <a:pPr>
+              <a:spcAft>
+                <a:spcPts val="800"/>
+              </a:spcAft>
+            </a:pPr>
+            <a:r>
+              <a:rPr sz="1250" b="1">
+                <a:solidFill>
+                  <a:srgbClr val="336791"/>
+                </a:solidFill>
+                <a:latin typeface="Calibri"/>
+              </a:rPr>
+              <a:t>▪  </a:t>
+            </a:r>
+            <a:r>
+              <a:rPr sz="1250">
+                <a:solidFill>
+                  <a:srgbClr val="222A38"/>
+                </a:solidFill>
+                <a:latin typeface="Calibri"/>
+              </a:rPr>
+              <a:t>Geolocation: LIST por estado</a:t>
+            </a:r>
+          </a:p>
+          <a:p>
+            <a:pPr>
+              <a:spcAft>
+                <a:spcPts val="800"/>
+              </a:spcAft>
+            </a:pPr>
+            <a:r>
+              <a:rPr sz="1250" b="1">
+                <a:solidFill>
+                  <a:srgbClr val="336791"/>
+                </a:solidFill>
+                <a:latin typeface="Calibri"/>
+              </a:rPr>
+              <a:t>▪  </a:t>
+            </a:r>
+            <a:r>
+              <a:rPr sz="1250">
+                <a:solidFill>
+                  <a:srgbClr val="222A38"/>
+                </a:solidFill>
+                <a:latin typeface="Calibri"/>
+              </a:rPr>
+              <a:t>Partition pruning en reportes</a:t>
+            </a:r>
+          </a:p>
+          <a:p>
+            <a:pPr>
+              <a:spcAft>
+                <a:spcPts val="800"/>
+              </a:spcAft>
+            </a:pPr>
+            <a:r>
+              <a:rPr sz="1250" b="1">
+                <a:solidFill>
+                  <a:srgbClr val="336791"/>
+                </a:solidFill>
+                <a:latin typeface="Calibri"/>
+              </a:rPr>
+              <a:t>▪  </a:t>
+            </a:r>
+            <a:r>
+              <a:rPr sz="1250">
+                <a:solidFill>
+                  <a:srgbClr val="222A38"/>
+                </a:solidFill>
+                <a:latin typeface="Calibri"/>
+              </a:rPr>
+              <a:t>Diferido en tablas de hechos menores</a:t>
+            </a:r>
+          </a:p>
+        </p:txBody>
+      </p:sp>
+      <p:sp>
+        <p:nvSpPr>
+          <p:cNvPr id="19" name="TextBox 18"/>
+          <p:cNvSpPr txBox="1"/>
+          <p:nvPr/>
+        </p:nvSpPr>
+        <p:spPr>
+          <a:xfrm>
+            <a:off x="640080" y="5897880"/>
+            <a:ext cx="10972800" cy="548640"/>
+          </a:xfrm>
+          <a:prstGeom prst="rect">
+            <a:avLst/>
+          </a:prstGeom>
+          <a:noFill/>
+        </p:spPr>
+        <p:txBody>
+          <a:bodyPr wrap="square" anchor="t">
+            <a:spAutoFit/>
+          </a:bodyPr>
+          <a:lstStyle/>
+          <a:p>
+            <a:pPr algn="l">
+              <a:spcBef>
+                <a:spcPts val="0"/>
+              </a:spcBef>
+              <a:spcAft>
+                <a:spcPts val="600"/>
+              </a:spcAft>
+            </a:pPr>
+            <a:r>
+              <a:rPr sz="1250" b="1">
+                <a:solidFill>
+                  <a:srgbClr val="336791"/>
+                </a:solidFill>
+                <a:latin typeface="Calibri"/>
+              </a:rPr>
+              <a:t>Todo el DDL de esta sección fue validado contra PostgreSQL 16 (ejecución sin errores).</a:t>
+            </a:r>
+          </a:p>
+        </p:txBody>
+      </p:sp>
     </p:spTree>
   </p:cSld>
   <p:clrMapOvr>
@@ -4633,7 +4869,7 @@
                 </a:solidFill>
                 <a:latin typeface="Calibri"/>
               </a:rPr>
-              <a:t>6 · POSTGRESQL</a:t>
+              <a:t>7 · MONGODB</a:t>
             </a:r>
           </a:p>
         </p:txBody>
@@ -4675,7 +4911,7 @@
                 </a:solidFill>
                 <a:latin typeface="Calibri"/>
               </a:rPr>
-              <a:t>PostgreSQL — Tipos avanzados, extensiones y particiones</a:t>
+              <a:t>Diseño lógico preliminar — MongoDB</a:t>
             </a:r>
           </a:p>
         </p:txBody>
@@ -4804,7 +5040,7 @@
                 </a:solidFill>
                 <a:latin typeface="Calibri"/>
               </a:rPr>
-              <a:t>9</a:t>
+              <a:t>10</a:t>
             </a:r>
           </a:p>
         </p:txBody>
@@ -4817,8 +5053,243 @@
         </p:nvSpPr>
         <p:spPr>
           <a:xfrm>
-            <a:off x="640080" y="1371600"/>
-            <a:ext cx="3520440" cy="457200"/>
+            <a:off x="640080" y="1417320"/>
+            <a:ext cx="5349240" cy="457200"/>
+          </a:xfrm>
+          <a:prstGeom prst="rect">
+            <a:avLst/>
+          </a:prstGeom>
+          <a:solidFill>
+            <a:srgbClr val="13AA52"/>
+          </a:solidFill>
+          <a:ln>
+            <a:noFill/>
+          </a:ln>
+          <a:effectLst/>
+        </p:spPr>
+        <p:style>
+          <a:lnRef idx="1">
+            <a:schemeClr val="accent1"/>
+          </a:lnRef>
+          <a:fillRef idx="3">
+            <a:schemeClr val="accent1"/>
+          </a:fillRef>
+          <a:effectRef idx="2">
+            <a:schemeClr val="accent1"/>
+          </a:effectRef>
+          <a:fontRef idx="minor">
+            <a:schemeClr val="lt1"/>
+          </a:fontRef>
+        </p:style>
+        <p:txBody>
+          <a:bodyPr rtlCol="0" anchor="ctr"/>
+          <a:lstStyle/>
+          <a:p>
+            <a:pPr algn="ctr"/>
+            <a:endParaRPr/>
+          </a:p>
+        </p:txBody>
+      </p:sp>
+      <p:sp>
+        <p:nvSpPr>
+          <p:cNvPr id="11" name="TextBox 10"/>
+          <p:cNvSpPr txBox="1"/>
+          <p:nvPr/>
+        </p:nvSpPr>
+        <p:spPr>
+          <a:xfrm>
+            <a:off x="822960" y="1435608"/>
+            <a:ext cx="5029200" cy="411480"/>
+          </a:xfrm>
+          <a:prstGeom prst="rect">
+            <a:avLst/>
+          </a:prstGeom>
+          <a:noFill/>
+        </p:spPr>
+        <p:txBody>
+          <a:bodyPr wrap="square" anchor="ctr">
+            <a:spAutoFit/>
+          </a:bodyPr>
+          <a:lstStyle/>
+          <a:p>
+            <a:pPr algn="l">
+              <a:spcBef>
+                <a:spcPts val="0"/>
+              </a:spcBef>
+              <a:spcAft>
+                <a:spcPts val="600"/>
+              </a:spcAft>
+            </a:pPr>
+            <a:r>
+              <a:rPr sz="1500" b="1">
+                <a:solidFill>
+                  <a:srgbClr val="FFFFFF"/>
+                </a:solidFill>
+                <a:latin typeface="Calibri"/>
+              </a:rPr>
+              <a:t>Colecciones</a:t>
+            </a:r>
+          </a:p>
+        </p:txBody>
+      </p:sp>
+      <p:sp>
+        <p:nvSpPr>
+          <p:cNvPr id="12" name="TextBox 11"/>
+          <p:cNvSpPr txBox="1"/>
+          <p:nvPr/>
+        </p:nvSpPr>
+        <p:spPr>
+          <a:xfrm>
+            <a:off x="777240" y="2011680"/>
+            <a:ext cx="5212080" cy="4206240"/>
+          </a:xfrm>
+          <a:prstGeom prst="rect">
+            <a:avLst/>
+          </a:prstGeom>
+          <a:noFill/>
+        </p:spPr>
+        <p:txBody>
+          <a:bodyPr wrap="square">
+            <a:spAutoFit/>
+          </a:bodyPr>
+          <a:lstStyle/>
+          <a:p>
+            <a:pPr>
+              <a:spcAft>
+                <a:spcPts val="800"/>
+              </a:spcAft>
+            </a:pPr>
+            <a:r>
+              <a:rPr sz="1400" b="1">
+                <a:solidFill>
+                  <a:srgbClr val="336791"/>
+                </a:solidFill>
+                <a:latin typeface="Calibri"/>
+              </a:rPr>
+              <a:t>▪  </a:t>
+            </a:r>
+            <a:r>
+              <a:rPr sz="1400">
+                <a:solidFill>
+                  <a:srgbClr val="222A38"/>
+                </a:solidFill>
+                <a:latin typeface="Calibri"/>
+              </a:rPr>
+              <a:t>products — catálogo enriquecido y flexible</a:t>
+            </a:r>
+          </a:p>
+          <a:p>
+            <a:pPr>
+              <a:spcAft>
+                <a:spcPts val="800"/>
+              </a:spcAft>
+            </a:pPr>
+            <a:r>
+              <a:rPr sz="1400" b="1">
+                <a:solidFill>
+                  <a:srgbClr val="336791"/>
+                </a:solidFill>
+                <a:latin typeface="Calibri"/>
+              </a:rPr>
+              <a:t>▪  </a:t>
+            </a:r>
+            <a:r>
+              <a:rPr sz="1400">
+                <a:solidFill>
+                  <a:srgbClr val="222A38"/>
+                </a:solidFill>
+                <a:latin typeface="Calibri"/>
+              </a:rPr>
+              <a:t>reviews — reseñas con texto libre y análisis</a:t>
+            </a:r>
+          </a:p>
+          <a:p>
+            <a:pPr>
+              <a:spcAft>
+                <a:spcPts val="800"/>
+              </a:spcAft>
+            </a:pPr>
+            <a:r>
+              <a:rPr sz="1400" b="1">
+                <a:solidFill>
+                  <a:srgbClr val="336791"/>
+                </a:solidFill>
+                <a:latin typeface="Calibri"/>
+              </a:rPr>
+              <a:t>▪  </a:t>
+            </a:r>
+            <a:r>
+              <a:rPr sz="1400">
+                <a:solidFill>
+                  <a:srgbClr val="222A38"/>
+                </a:solidFill>
+                <a:latin typeface="Calibri"/>
+              </a:rPr>
+              <a:t>product_catalog_view — vista desnormalizada para frontend</a:t>
+            </a:r>
+          </a:p>
+          <a:p>
+            <a:pPr>
+              <a:spcAft>
+                <a:spcPts val="800"/>
+              </a:spcAft>
+            </a:pPr>
+            <a:r>
+              <a:rPr sz="1400" b="1">
+                <a:solidFill>
+                  <a:srgbClr val="336791"/>
+                </a:solidFill>
+                <a:latin typeface="Calibri"/>
+              </a:rPr>
+              <a:t>▪  </a:t>
+            </a:r>
+            <a:r>
+              <a:rPr sz="1400">
+                <a:solidFill>
+                  <a:srgbClr val="222A38"/>
+                </a:solidFill>
+                <a:latin typeface="Calibri"/>
+              </a:rPr>
+              <a:t>user_behavior — eventos de navegación (sintéticos)</a:t>
+            </a:r>
+          </a:p>
+          <a:p>
+            <a:pPr>
+              <a:spcAft>
+                <a:spcPts val="800"/>
+              </a:spcAft>
+            </a:pPr>
+            <a:r>
+              <a:rPr sz="1400" b="1">
+                <a:solidFill>
+                  <a:srgbClr val="336791"/>
+                </a:solidFill>
+                <a:latin typeface="Calibri"/>
+              </a:rPr>
+              <a:t>▪  </a:t>
+            </a:r>
+            <a:r>
+              <a:rPr sz="1400">
+                <a:solidFill>
+                  <a:srgbClr val="222A38"/>
+                </a:solidFill>
+                <a:latin typeface="Calibri"/>
+              </a:rPr>
+              <a:t>recommendations — sugerencias precalculadas</a:t>
+            </a:r>
+          </a:p>
+        </p:txBody>
+      </p:sp>
+      <p:sp>
+        <p:nvSpPr>
+          <p:cNvPr id="13" name="Rectangle 12"/>
+          <p:cNvSpPr/>
+          <p:nvPr/>
+        </p:nvSpPr>
+        <p:spPr>
+          <a:xfrm>
+            <a:off x="6199632" y="1417320"/>
+            <a:ext cx="5349240" cy="457200"/>
           </a:xfrm>
           <a:prstGeom prst="rect">
             <a:avLst/>
@@ -4856,14 +5327,14 @@
       </p:sp>
       <p:sp>
         <p:nvSpPr>
-          <p:cNvPr id="11" name="TextBox 10"/>
+          <p:cNvPr id="14" name="TextBox 13"/>
           <p:cNvSpPr txBox="1"/>
           <p:nvPr/>
         </p:nvSpPr>
         <p:spPr>
           <a:xfrm>
-            <a:off x="777240" y="1389888"/>
-            <a:ext cx="3291840" cy="411480"/>
+            <a:off x="6382512" y="1435608"/>
+            <a:ext cx="5029200" cy="411480"/>
           </a:xfrm>
           <a:prstGeom prst="rect">
             <a:avLst/>
@@ -4885,27 +5356,27 @@
               </a:spcAft>
             </a:pPr>
             <a:r>
-              <a:rPr sz="1400" b="1">
+              <a:rPr sz="1500" b="1">
                 <a:solidFill>
                   <a:srgbClr val="FFFFFF"/>
                 </a:solidFill>
                 <a:latin typeface="Calibri"/>
               </a:rPr>
-              <a:t>Tipos avanzados</a:t>
-            </a:r>
-          </a:p>
-        </p:txBody>
-      </p:sp>
-      <p:sp>
-        <p:nvSpPr>
-          <p:cNvPr id="12" name="TextBox 11"/>
+              <a:t>Patrones de modelado</a:t>
+            </a:r>
+          </a:p>
+        </p:txBody>
+      </p:sp>
+      <p:sp>
+        <p:nvSpPr>
+          <p:cNvPr id="15" name="TextBox 14"/>
           <p:cNvSpPr txBox="1"/>
           <p:nvPr/>
         </p:nvSpPr>
         <p:spPr>
           <a:xfrm>
-            <a:off x="731520" y="1920240"/>
-            <a:ext cx="3474720" cy="4114800"/>
+            <a:off x="6336792" y="2011680"/>
+            <a:ext cx="5212080" cy="4206240"/>
           </a:xfrm>
           <a:prstGeom prst="rect">
             <a:avLst/>
@@ -4924,7 +5395,7 @@
               </a:spcAft>
             </a:pPr>
             <a:r>
-              <a:rPr sz="1250" b="1">
+              <a:rPr sz="1400" b="1">
                 <a:solidFill>
                   <a:srgbClr val="336791"/>
                 </a:solidFill>
@@ -4933,13 +5404,13 @@
               <a:t>▪  </a:t>
             </a:r>
             <a:r>
-              <a:rPr sz="1250">
-                <a:solidFill>
-                  <a:srgbClr val="222A38"/>
-                </a:solidFill>
-                <a:latin typeface="Calibri"/>
-              </a:rPr>
-              <a:t>composite dimension_cm (dimensiones)</a:t>
+              <a:rPr sz="1400">
+                <a:solidFill>
+                  <a:srgbClr val="222A38"/>
+                </a:solidFill>
+                <a:latin typeface="Calibri"/>
+              </a:rPr>
+              <a:t>Embedding — datos consultados juntos (categoría, dimensiones, comentarios).</a:t>
             </a:r>
           </a:p>
           <a:p>
@@ -4949,7 +5420,7 @@
               </a:spcAft>
             </a:pPr>
             <a:r>
-              <a:rPr sz="1250" b="1">
+              <a:rPr sz="1400" b="1">
                 <a:solidFill>
                   <a:srgbClr val="336791"/>
                 </a:solidFill>
@@ -4958,13 +5429,13 @@
               <a:t>▪  </a:t>
             </a:r>
             <a:r>
-              <a:rPr sz="1250">
-                <a:solidFill>
-                  <a:srgbClr val="222A38"/>
-                </a:solidFill>
-                <a:latin typeface="Calibri"/>
-              </a:rPr>
-              <a:t>JSONB extra_attributes (catálogo) + GIN</a:t>
+              <a:rPr sz="1400">
+                <a:solidFill>
+                  <a:srgbClr val="222A38"/>
+                </a:solidFill>
+                <a:latin typeface="Calibri"/>
+              </a:rPr>
+              <a:t>Referencing — claves compartidas (product_id, order_id, customer_id).</a:t>
             </a:r>
           </a:p>
           <a:p>
@@ -4974,7 +5445,7 @@
               </a:spcAft>
             </a:pPr>
             <a:r>
-              <a:rPr sz="1250" b="1">
+              <a:rPr sz="1400" b="1">
                 <a:solidFill>
                   <a:srgbClr val="336791"/>
                 </a:solidFill>
@@ -4983,13 +5454,13 @@
               <a:t>▪  </a:t>
             </a:r>
             <a:r>
-              <a:rPr sz="1250">
-                <a:solidFill>
-                  <a:srgbClr val="222A38"/>
-                </a:solidFill>
-                <a:latin typeface="Calibri"/>
-              </a:rPr>
-              <a:t>array photo_urls (multivaluado) + GIN</a:t>
+              <a:rPr sz="1400">
+                <a:solidFill>
+                  <a:srgbClr val="222A38"/>
+                </a:solidFill>
+                <a:latin typeface="Calibri"/>
+              </a:rPr>
+              <a:t>Computed Pattern — métricas precalculadas (promedio, ventas).</a:t>
             </a:r>
           </a:p>
           <a:p>
@@ -4999,7 +5470,7 @@
               </a:spcAft>
             </a:pPr>
             <a:r>
-              <a:rPr sz="1250" b="1">
+              <a:rPr sz="1400" b="1">
                 <a:solidFill>
                   <a:srgbClr val="336791"/>
                 </a:solidFill>
@@ -5008,500 +5479,13 @@
               <a:t>▪  </a:t>
             </a:r>
             <a:r>
-              <a:rPr sz="1250">
-                <a:solidFill>
-                  <a:srgbClr val="222A38"/>
-                </a:solidFill>
-                <a:latin typeface="Calibri"/>
-              </a:rPr>
-              <a:t>tstzrange delivery_window + GiST</a:t>
-            </a:r>
-          </a:p>
-        </p:txBody>
-      </p:sp>
-      <p:sp>
-        <p:nvSpPr>
-          <p:cNvPr id="13" name="Rectangle 12"/>
-          <p:cNvSpPr/>
-          <p:nvPr/>
-        </p:nvSpPr>
-        <p:spPr>
-          <a:xfrm>
-            <a:off x="4343400" y="1371600"/>
-            <a:ext cx="3520440" cy="457200"/>
-          </a:xfrm>
-          <a:prstGeom prst="rect">
-            <a:avLst/>
-          </a:prstGeom>
-          <a:solidFill>
-            <a:srgbClr val="13AA52"/>
-          </a:solidFill>
-          <a:ln>
-            <a:noFill/>
-          </a:ln>
-          <a:effectLst/>
-        </p:spPr>
-        <p:style>
-          <a:lnRef idx="1">
-            <a:schemeClr val="accent1"/>
-          </a:lnRef>
-          <a:fillRef idx="3">
-            <a:schemeClr val="accent1"/>
-          </a:fillRef>
-          <a:effectRef idx="2">
-            <a:schemeClr val="accent1"/>
-          </a:effectRef>
-          <a:fontRef idx="minor">
-            <a:schemeClr val="lt1"/>
-          </a:fontRef>
-        </p:style>
-        <p:txBody>
-          <a:bodyPr rtlCol="0" anchor="ctr"/>
-          <a:lstStyle/>
-          <a:p>
-            <a:pPr algn="ctr"/>
-            <a:endParaRPr/>
-          </a:p>
-        </p:txBody>
-      </p:sp>
-      <p:sp>
-        <p:nvSpPr>
-          <p:cNvPr id="14" name="TextBox 13"/>
-          <p:cNvSpPr txBox="1"/>
-          <p:nvPr/>
-        </p:nvSpPr>
-        <p:spPr>
-          <a:xfrm>
-            <a:off x="4480560" y="1389888"/>
-            <a:ext cx="3291840" cy="411480"/>
-          </a:xfrm>
-          <a:prstGeom prst="rect">
-            <a:avLst/>
-          </a:prstGeom>
-          <a:noFill/>
-        </p:spPr>
-        <p:txBody>
-          <a:bodyPr wrap="square" anchor="ctr">
-            <a:spAutoFit/>
-          </a:bodyPr>
-          <a:lstStyle/>
-          <a:p>
-            <a:pPr algn="l">
-              <a:spcBef>
-                <a:spcPts val="0"/>
-              </a:spcBef>
-              <a:spcAft>
-                <a:spcPts val="600"/>
-              </a:spcAft>
-            </a:pPr>
-            <a:r>
-              <a:rPr sz="1400" b="1">
-                <a:solidFill>
-                  <a:srgbClr val="FFFFFF"/>
-                </a:solidFill>
-                <a:latin typeface="Calibri"/>
-              </a:rPr>
-              <a:t>Extensiones</a:t>
-            </a:r>
-          </a:p>
-        </p:txBody>
-      </p:sp>
-      <p:sp>
-        <p:nvSpPr>
-          <p:cNvPr id="15" name="TextBox 14"/>
-          <p:cNvSpPr txBox="1"/>
-          <p:nvPr/>
-        </p:nvSpPr>
-        <p:spPr>
-          <a:xfrm>
-            <a:off x="4434840" y="1920240"/>
-            <a:ext cx="3474720" cy="4114800"/>
-          </a:xfrm>
-          <a:prstGeom prst="rect">
-            <a:avLst/>
-          </a:prstGeom>
-          <a:noFill/>
-        </p:spPr>
-        <p:txBody>
-          <a:bodyPr wrap="square">
-            <a:spAutoFit/>
-          </a:bodyPr>
-          <a:lstStyle/>
-          <a:p>
-            <a:pPr>
-              <a:spcAft>
-                <a:spcPts val="800"/>
-              </a:spcAft>
-            </a:pPr>
-            <a:r>
-              <a:rPr sz="1250" b="1">
-                <a:solidFill>
-                  <a:srgbClr val="336791"/>
-                </a:solidFill>
-                <a:latin typeface="Calibri"/>
-              </a:rPr>
-              <a:t>▪  </a:t>
-            </a:r>
-            <a:r>
-              <a:rPr sz="1250">
-                <a:solidFill>
-                  <a:srgbClr val="222A38"/>
-                </a:solidFill>
-                <a:latin typeface="Calibri"/>
-              </a:rPr>
-              <a:t>pgcrypto (UUID)</a:t>
-            </a:r>
-          </a:p>
-          <a:p>
-            <a:pPr>
-              <a:spcAft>
-                <a:spcPts val="800"/>
-              </a:spcAft>
-            </a:pPr>
-            <a:r>
-              <a:rPr sz="1250" b="1">
-                <a:solidFill>
-                  <a:srgbClr val="336791"/>
-                </a:solidFill>
-                <a:latin typeface="Calibri"/>
-              </a:rPr>
-              <a:t>▪  </a:t>
-            </a:r>
-            <a:r>
-              <a:rPr sz="1250">
-                <a:solidFill>
-                  <a:srgbClr val="222A38"/>
-                </a:solidFill>
-                <a:latin typeface="Calibri"/>
-              </a:rPr>
-              <a:t>unaccent + pg_trgm (búsqueda difusa)</a:t>
-            </a:r>
-          </a:p>
-          <a:p>
-            <a:pPr>
-              <a:spcAft>
-                <a:spcPts val="800"/>
-              </a:spcAft>
-            </a:pPr>
-            <a:r>
-              <a:rPr sz="1250" b="1">
-                <a:solidFill>
-                  <a:srgbClr val="336791"/>
-                </a:solidFill>
-                <a:latin typeface="Calibri"/>
-              </a:rPr>
-              <a:t>▪  </a:t>
-            </a:r>
-            <a:r>
-              <a:rPr sz="1250">
-                <a:solidFill>
-                  <a:srgbClr val="222A38"/>
-                </a:solidFill>
-                <a:latin typeface="Calibri"/>
-              </a:rPr>
-              <a:t>btree_gin / btree_gist</a:t>
-            </a:r>
-          </a:p>
-          <a:p>
-            <a:pPr>
-              <a:spcAft>
-                <a:spcPts val="800"/>
-              </a:spcAft>
-            </a:pPr>
-            <a:r>
-              <a:rPr sz="1250" b="1">
-                <a:solidFill>
-                  <a:srgbClr val="336791"/>
-                </a:solidFill>
-                <a:latin typeface="Calibri"/>
-              </a:rPr>
-              <a:t>▪  </a:t>
-            </a:r>
-            <a:r>
-              <a:rPr sz="1250">
-                <a:solidFill>
-                  <a:srgbClr val="222A38"/>
-                </a:solidFill>
-                <a:latin typeface="Calibri"/>
-              </a:rPr>
-              <a:t>postgis (geoespacial)</a:t>
-            </a:r>
-          </a:p>
-          <a:p>
-            <a:pPr>
-              <a:spcAft>
-                <a:spcPts val="800"/>
-              </a:spcAft>
-            </a:pPr>
-            <a:r>
-              <a:rPr sz="1250" b="1">
-                <a:solidFill>
-                  <a:srgbClr val="336791"/>
-                </a:solidFill>
-                <a:latin typeface="Calibri"/>
-              </a:rPr>
-              <a:t>▪  </a:t>
-            </a:r>
-            <a:r>
-              <a:rPr sz="1250">
-                <a:solidFill>
-                  <a:srgbClr val="222A38"/>
-                </a:solidFill>
-                <a:latin typeface="Calibri"/>
-              </a:rPr>
-              <a:t>pg_stat_statements (optimización)</a:t>
-            </a:r>
-          </a:p>
-        </p:txBody>
-      </p:sp>
-      <p:sp>
-        <p:nvSpPr>
-          <p:cNvPr id="16" name="Rectangle 15"/>
-          <p:cNvSpPr/>
-          <p:nvPr/>
-        </p:nvSpPr>
-        <p:spPr>
-          <a:xfrm>
-            <a:off x="8046720" y="1371600"/>
-            <a:ext cx="3520440" cy="457200"/>
-          </a:xfrm>
-          <a:prstGeom prst="rect">
-            <a:avLst/>
-          </a:prstGeom>
-          <a:solidFill>
-            <a:srgbClr val="16284A"/>
-          </a:solidFill>
-          <a:ln>
-            <a:noFill/>
-          </a:ln>
-          <a:effectLst/>
-        </p:spPr>
-        <p:style>
-          <a:lnRef idx="1">
-            <a:schemeClr val="accent1"/>
-          </a:lnRef>
-          <a:fillRef idx="3">
-            <a:schemeClr val="accent1"/>
-          </a:fillRef>
-          <a:effectRef idx="2">
-            <a:schemeClr val="accent1"/>
-          </a:effectRef>
-          <a:fontRef idx="minor">
-            <a:schemeClr val="lt1"/>
-          </a:fontRef>
-        </p:style>
-        <p:txBody>
-          <a:bodyPr rtlCol="0" anchor="ctr"/>
-          <a:lstStyle/>
-          <a:p>
-            <a:pPr algn="ctr"/>
-            <a:endParaRPr/>
-          </a:p>
-        </p:txBody>
-      </p:sp>
-      <p:sp>
-        <p:nvSpPr>
-          <p:cNvPr id="17" name="TextBox 16"/>
-          <p:cNvSpPr txBox="1"/>
-          <p:nvPr/>
-        </p:nvSpPr>
-        <p:spPr>
-          <a:xfrm>
-            <a:off x="8183879" y="1389888"/>
-            <a:ext cx="3291840" cy="411480"/>
-          </a:xfrm>
-          <a:prstGeom prst="rect">
-            <a:avLst/>
-          </a:prstGeom>
-          <a:noFill/>
-        </p:spPr>
-        <p:txBody>
-          <a:bodyPr wrap="square" anchor="ctr">
-            <a:spAutoFit/>
-          </a:bodyPr>
-          <a:lstStyle/>
-          <a:p>
-            <a:pPr algn="l">
-              <a:spcBef>
-                <a:spcPts val="0"/>
-              </a:spcBef>
-              <a:spcAft>
-                <a:spcPts val="600"/>
-              </a:spcAft>
-            </a:pPr>
-            <a:r>
-              <a:rPr sz="1400" b="1">
-                <a:solidFill>
-                  <a:srgbClr val="FFFFFF"/>
-                </a:solidFill>
-                <a:latin typeface="Calibri"/>
-              </a:rPr>
-              <a:t>Particionamiento</a:t>
-            </a:r>
-          </a:p>
-        </p:txBody>
-      </p:sp>
-      <p:sp>
-        <p:nvSpPr>
-          <p:cNvPr id="18" name="TextBox 17"/>
-          <p:cNvSpPr txBox="1"/>
-          <p:nvPr/>
-        </p:nvSpPr>
-        <p:spPr>
-          <a:xfrm>
-            <a:off x="8138160" y="1920240"/>
-            <a:ext cx="3474720" cy="4114800"/>
-          </a:xfrm>
-          <a:prstGeom prst="rect">
-            <a:avLst/>
-          </a:prstGeom>
-          <a:noFill/>
-        </p:spPr>
-        <p:txBody>
-          <a:bodyPr wrap="square">
-            <a:spAutoFit/>
-          </a:bodyPr>
-          <a:lstStyle/>
-          <a:p>
-            <a:pPr>
-              <a:spcAft>
-                <a:spcPts val="800"/>
-              </a:spcAft>
-            </a:pPr>
-            <a:r>
-              <a:rPr sz="1250" b="1">
-                <a:solidFill>
-                  <a:srgbClr val="336791"/>
-                </a:solidFill>
-                <a:latin typeface="Calibri"/>
-              </a:rPr>
-              <a:t>▪  </a:t>
-            </a:r>
-            <a:r>
-              <a:rPr sz="1250">
-                <a:solidFill>
-                  <a:srgbClr val="222A38"/>
-                </a:solidFill>
-                <a:latin typeface="Calibri"/>
-              </a:rPr>
-              <a:t>Orders: RANGE por fecha de compra</a:t>
-            </a:r>
-          </a:p>
-          <a:p>
-            <a:pPr>
-              <a:spcAft>
-                <a:spcPts val="800"/>
-              </a:spcAft>
-            </a:pPr>
-            <a:r>
-              <a:rPr sz="1250" b="1">
-                <a:solidFill>
-                  <a:srgbClr val="336791"/>
-                </a:solidFill>
-                <a:latin typeface="Calibri"/>
-              </a:rPr>
-              <a:t>▪  </a:t>
-            </a:r>
-            <a:r>
-              <a:rPr sz="1250">
-                <a:solidFill>
-                  <a:srgbClr val="222A38"/>
-                </a:solidFill>
-                <a:latin typeface="Calibri"/>
-              </a:rPr>
-              <a:t>Geolocation: LIST por estado</a:t>
-            </a:r>
-          </a:p>
-          <a:p>
-            <a:pPr>
-              <a:spcAft>
-                <a:spcPts val="800"/>
-              </a:spcAft>
-            </a:pPr>
-            <a:r>
-              <a:rPr sz="1250" b="1">
-                <a:solidFill>
-                  <a:srgbClr val="336791"/>
-                </a:solidFill>
-                <a:latin typeface="Calibri"/>
-              </a:rPr>
-              <a:t>▪  </a:t>
-            </a:r>
-            <a:r>
-              <a:rPr sz="1250">
-                <a:solidFill>
-                  <a:srgbClr val="222A38"/>
-                </a:solidFill>
-                <a:latin typeface="Calibri"/>
-              </a:rPr>
-              <a:t>Partition pruning en reportes</a:t>
-            </a:r>
-          </a:p>
-          <a:p>
-            <a:pPr>
-              <a:spcAft>
-                <a:spcPts val="800"/>
-              </a:spcAft>
-            </a:pPr>
-            <a:r>
-              <a:rPr sz="1250" b="1">
-                <a:solidFill>
-                  <a:srgbClr val="336791"/>
-                </a:solidFill>
-                <a:latin typeface="Calibri"/>
-              </a:rPr>
-              <a:t>▪  </a:t>
-            </a:r>
-            <a:r>
-              <a:rPr sz="1250">
-                <a:solidFill>
-                  <a:srgbClr val="222A38"/>
-                </a:solidFill>
-                <a:latin typeface="Calibri"/>
-              </a:rPr>
-              <a:t>Diferido en tablas de hechos menores</a:t>
-            </a:r>
-          </a:p>
-        </p:txBody>
-      </p:sp>
-      <p:sp>
-        <p:nvSpPr>
-          <p:cNvPr id="19" name="TextBox 18"/>
-          <p:cNvSpPr txBox="1"/>
-          <p:nvPr/>
-        </p:nvSpPr>
-        <p:spPr>
-          <a:xfrm>
-            <a:off x="640080" y="5897880"/>
-            <a:ext cx="10972800" cy="548640"/>
-          </a:xfrm>
-          <a:prstGeom prst="rect">
-            <a:avLst/>
-          </a:prstGeom>
-          <a:noFill/>
-        </p:spPr>
-        <p:txBody>
-          <a:bodyPr wrap="square" anchor="t">
-            <a:spAutoFit/>
-          </a:bodyPr>
-          <a:lstStyle/>
-          <a:p>
-            <a:pPr algn="l">
-              <a:spcBef>
-                <a:spcPts val="0"/>
-              </a:spcBef>
-              <a:spcAft>
-                <a:spcPts val="600"/>
-              </a:spcAft>
-            </a:pPr>
-            <a:r>
-              <a:rPr sz="1250" b="1">
-                <a:solidFill>
-                  <a:srgbClr val="336791"/>
-                </a:solidFill>
-                <a:latin typeface="Calibri"/>
-              </a:rPr>
-              <a:t>Todo el DDL de esta sección fue validado contra PostgreSQL 16 (ejecución sin errores).</a:t>
+              <a:rPr sz="1400">
+                <a:solidFill>
+                  <a:srgbClr val="222A38"/>
+                </a:solidFill>
+                <a:latin typeface="Calibri"/>
+              </a:rPr>
+              <a:t>Subset Pattern — solo lo más consultado (límite Atlas M0).</a:t>
             </a:r>
           </a:p>
         </p:txBody>
@@ -5703,7 +5687,7 @@
                 </a:solidFill>
                 <a:latin typeface="Calibri"/>
               </a:rPr>
-              <a:t>7 · MONGODB</a:t>
+              <a:t>8 · CIERRE TÉCNICO</a:t>
             </a:r>
           </a:p>
         </p:txBody>
@@ -5745,7 +5729,7 @@
                 </a:solidFill>
                 <a:latin typeface="Calibri"/>
               </a:rPr>
-              <a:t>Diseño lógico preliminar — MongoDB</a:t>
+              <a:t>Frontera de datos, reconciliación y estado</a:t>
             </a:r>
           </a:p>
         </p:txBody>
@@ -5874,27 +5858,150 @@
                 </a:solidFill>
                 <a:latin typeface="Calibri"/>
               </a:rPr>
-              <a:t>10</a:t>
-            </a:r>
-          </a:p>
-        </p:txBody>
-      </p:sp>
-      <p:sp>
-        <p:nvSpPr>
-          <p:cNvPr id="10" name="Rectangle 9"/>
+              <a:t>11</a:t>
+            </a:r>
+          </a:p>
+        </p:txBody>
+      </p:sp>
+      <p:sp>
+        <p:nvSpPr>
+          <p:cNvPr id="10" name="TextBox 9"/>
+          <p:cNvSpPr txBox="1"/>
+          <p:nvPr/>
+        </p:nvSpPr>
+        <p:spPr>
+          <a:xfrm>
+            <a:off x="640080" y="1463040"/>
+            <a:ext cx="6766560" cy="3657600"/>
+          </a:xfrm>
+          <a:prstGeom prst="rect">
+            <a:avLst/>
+          </a:prstGeom>
+          <a:noFill/>
+        </p:spPr>
+        <p:txBody>
+          <a:bodyPr wrap="square">
+            <a:spAutoFit/>
+          </a:bodyPr>
+          <a:lstStyle/>
+          <a:p>
+            <a:pPr>
+              <a:spcAft>
+                <a:spcPts val="800"/>
+              </a:spcAft>
+            </a:pPr>
+            <a:r>
+              <a:rPr sz="1700" b="1">
+                <a:solidFill>
+                  <a:srgbClr val="336791"/>
+                </a:solidFill>
+                <a:latin typeface="Calibri"/>
+              </a:rPr>
+              <a:t>▪  </a:t>
+            </a:r>
+            <a:r>
+              <a:rPr sz="1700">
+                <a:solidFill>
+                  <a:srgbClr val="222A38"/>
+                </a:solidFill>
+                <a:latin typeface="Calibri"/>
+              </a:rPr>
+              <a:t>Criterio de frontera (CAP): consistencia fuerte y relaciones estrictas → PostgreSQL; flexibilidad y lectura intensiva → MongoDB.</a:t>
+            </a:r>
+          </a:p>
+          <a:p>
+            <a:pPr>
+              <a:spcAft>
+                <a:spcPts val="800"/>
+              </a:spcAft>
+            </a:pPr>
+            <a:r>
+              <a:rPr sz="1700" b="1">
+                <a:solidFill>
+                  <a:srgbClr val="336791"/>
+                </a:solidFill>
+                <a:latin typeface="Calibri"/>
+              </a:rPr>
+              <a:t>▪  </a:t>
+            </a:r>
+            <a:r>
+              <a:rPr sz="1700">
+                <a:solidFill>
+                  <a:srgbClr val="222A38"/>
+                </a:solidFill>
+                <a:latin typeface="Calibri"/>
+              </a:rPr>
+              <a:t>PostgreSQL conserva order_reviews por integridad; MongoDB lo explota como capa analítica.</a:t>
+            </a:r>
+          </a:p>
+          <a:p>
+            <a:pPr>
+              <a:spcAft>
+                <a:spcPts val="800"/>
+              </a:spcAft>
+            </a:pPr>
+            <a:r>
+              <a:rPr sz="1700" b="1">
+                <a:solidFill>
+                  <a:srgbClr val="336791"/>
+                </a:solidFill>
+                <a:latin typeface="Calibri"/>
+              </a:rPr>
+              <a:t>▪  </a:t>
+            </a:r>
+            <a:r>
+              <a:rPr sz="1700">
+                <a:solidFill>
+                  <a:srgbClr val="222A38"/>
+                </a:solidFill>
+                <a:latin typeface="Calibri"/>
+              </a:rPr>
+              <a:t>Sincronización por lotes vía ETL en Colab: cruza product_id entre ambos sistemas (sin Change Streams en M0).</a:t>
+            </a:r>
+          </a:p>
+          <a:p>
+            <a:pPr>
+              <a:spcAft>
+                <a:spcPts val="800"/>
+              </a:spcAft>
+            </a:pPr>
+            <a:r>
+              <a:rPr sz="1700" b="1">
+                <a:solidFill>
+                  <a:srgbClr val="336791"/>
+                </a:solidFill>
+                <a:latin typeface="Calibri"/>
+              </a:rPr>
+              <a:t>▪  </a:t>
+            </a:r>
+            <a:r>
+              <a:rPr sz="1700">
+                <a:solidFill>
+                  <a:srgbClr val="222A38"/>
+                </a:solidFill>
+                <a:latin typeface="Calibri"/>
+              </a:rPr>
+              <a:t>Diccionario de datos y trade-offs documentados en el entregable.</a:t>
+            </a:r>
+          </a:p>
+        </p:txBody>
+      </p:sp>
+      <p:sp>
+        <p:nvSpPr>
+          <p:cNvPr id="11" name="Rectangle 10"/>
           <p:cNvSpPr/>
           <p:nvPr/>
         </p:nvSpPr>
         <p:spPr>
           <a:xfrm>
-            <a:off x="640080" y="1417320"/>
-            <a:ext cx="5349240" cy="457200"/>
+            <a:off x="7680960" y="1554480"/>
+            <a:ext cx="3886200" cy="4206240"/>
           </a:xfrm>
           <a:prstGeom prst="rect">
             <a:avLst/>
           </a:prstGeom>
           <a:solidFill>
-            <a:srgbClr val="13AA52"/>
+            <a:srgbClr val="F4F6F9"/>
           </a:solidFill>
           <a:ln>
             <a:noFill/>
@@ -5926,14 +6033,14 @@
       </p:sp>
       <p:sp>
         <p:nvSpPr>
-          <p:cNvPr id="11" name="TextBox 10"/>
+          <p:cNvPr id="12" name="TextBox 11"/>
           <p:cNvSpPr txBox="1"/>
           <p:nvPr/>
         </p:nvSpPr>
         <p:spPr>
           <a:xfrm>
-            <a:off x="822960" y="1435608"/>
-            <a:ext cx="5029200" cy="411480"/>
+            <a:off x="7909560" y="1737360"/>
+            <a:ext cx="3474720" cy="457200"/>
           </a:xfrm>
           <a:prstGeom prst="rect">
             <a:avLst/>
@@ -5941,7 +6048,7 @@
           <a:noFill/>
         </p:spPr>
         <p:txBody>
-          <a:bodyPr wrap="square" anchor="ctr">
+          <a:bodyPr wrap="square" anchor="t">
             <a:spAutoFit/>
           </a:bodyPr>
           <a:lstStyle/>
@@ -5955,27 +6062,27 @@
               </a:spcAft>
             </a:pPr>
             <a:r>
-              <a:rPr sz="1500" b="1">
-                <a:solidFill>
-                  <a:srgbClr val="FFFFFF"/>
-                </a:solidFill>
-                <a:latin typeface="Calibri"/>
-              </a:rPr>
-              <a:t>Colecciones</a:t>
-            </a:r>
-          </a:p>
-        </p:txBody>
-      </p:sp>
-      <p:sp>
-        <p:nvSpPr>
-          <p:cNvPr id="12" name="TextBox 11"/>
+              <a:rPr sz="1300" b="1">
+                <a:solidFill>
+                  <a:srgbClr val="336791"/>
+                </a:solidFill>
+                <a:latin typeface="Calibri"/>
+              </a:rPr>
+              <a:t>ESTADO DE VALIDACIÓN</a:t>
+            </a:r>
+          </a:p>
+        </p:txBody>
+      </p:sp>
+      <p:sp>
+        <p:nvSpPr>
+          <p:cNvPr id="13" name="TextBox 12"/>
           <p:cNvSpPr txBox="1"/>
           <p:nvPr/>
         </p:nvSpPr>
         <p:spPr>
           <a:xfrm>
-            <a:off x="777240" y="2011680"/>
-            <a:ext cx="5212080" cy="4206240"/>
+            <a:off x="7909560" y="2286000"/>
+            <a:ext cx="3474720" cy="3291840"/>
           </a:xfrm>
           <a:prstGeom prst="rect">
             <a:avLst/>
@@ -5994,7 +6101,7 @@
               </a:spcAft>
             </a:pPr>
             <a:r>
-              <a:rPr sz="1400" b="1">
+              <a:rPr sz="1250" b="1">
                 <a:solidFill>
                   <a:srgbClr val="336791"/>
                 </a:solidFill>
@@ -6003,13 +6110,13 @@
               <a:t>▪  </a:t>
             </a:r>
             <a:r>
-              <a:rPr sz="1400">
-                <a:solidFill>
-                  <a:srgbClr val="222A38"/>
-                </a:solidFill>
-                <a:latin typeface="Calibri"/>
-              </a:rPr>
-              <a:t>products — catálogo enriquecido y flexible</a:t>
+              <a:rPr sz="1250">
+                <a:solidFill>
+                  <a:srgbClr val="222A38"/>
+                </a:solidFill>
+                <a:latin typeface="Calibri"/>
+              </a:rPr>
+              <a:t>DDL validado en PostgreSQL 16</a:t>
             </a:r>
           </a:p>
           <a:p>
@@ -6019,7 +6126,7 @@
               </a:spcAft>
             </a:pPr>
             <a:r>
-              <a:rPr sz="1400" b="1">
+              <a:rPr sz="1250" b="1">
                 <a:solidFill>
                   <a:srgbClr val="336791"/>
                 </a:solidFill>
@@ -6028,13 +6135,13 @@
               <a:t>▪  </a:t>
             </a:r>
             <a:r>
-              <a:rPr sz="1400">
-                <a:solidFill>
-                  <a:srgbClr val="222A38"/>
-                </a:solidFill>
-                <a:latin typeface="Calibri"/>
-              </a:rPr>
-              <a:t>reviews — reseñas con texto libre y análisis</a:t>
+              <a:rPr sz="1250">
+                <a:solidFill>
+                  <a:srgbClr val="222A38"/>
+                </a:solidFill>
+                <a:latin typeface="Calibri"/>
+              </a:rPr>
+              <a:t>0 registros huérfanos (M4)</a:t>
             </a:r>
           </a:p>
           <a:p>
@@ -6044,7 +6151,7 @@
               </a:spcAft>
             </a:pPr>
             <a:r>
-              <a:rPr sz="1400" b="1">
+              <a:rPr sz="1250" b="1">
                 <a:solidFill>
                   <a:srgbClr val="336791"/>
                 </a:solidFill>
@@ -6053,13 +6160,13 @@
               <a:t>▪  </a:t>
             </a:r>
             <a:r>
-              <a:rPr sz="1400">
-                <a:solidFill>
-                  <a:srgbClr val="222A38"/>
-                </a:solidFill>
-                <a:latin typeface="Calibri"/>
-              </a:rPr>
-              <a:t>product_catalog_view — vista desnormalizada para frontend</a:t>
+              <a:rPr sz="1250">
+                <a:solidFill>
+                  <a:srgbClr val="222A38"/>
+                </a:solidFill>
+                <a:latin typeface="Calibri"/>
+              </a:rPr>
+              <a:t>Repositorio + Pull Request creados</a:t>
             </a:r>
           </a:p>
           <a:p>
@@ -6069,7 +6176,7 @@
               </a:spcAft>
             </a:pPr>
             <a:r>
-              <a:rPr sz="1400" b="1">
+              <a:rPr sz="1250" b="1">
                 <a:solidFill>
                   <a:srgbClr val="336791"/>
                 </a:solidFill>
@@ -6078,248 +6185,13 @@
               <a:t>▪  </a:t>
             </a:r>
             <a:r>
-              <a:rPr sz="1400">
-                <a:solidFill>
-                  <a:srgbClr val="222A38"/>
-                </a:solidFill>
-                <a:latin typeface="Calibri"/>
-              </a:rPr>
-              <a:t>user_behavior — eventos de navegación (sintéticos)</a:t>
-            </a:r>
-          </a:p>
-          <a:p>
-            <a:pPr>
-              <a:spcAft>
-                <a:spcPts val="800"/>
-              </a:spcAft>
-            </a:pPr>
-            <a:r>
-              <a:rPr sz="1400" b="1">
-                <a:solidFill>
-                  <a:srgbClr val="336791"/>
-                </a:solidFill>
-                <a:latin typeface="Calibri"/>
-              </a:rPr>
-              <a:t>▪  </a:t>
-            </a:r>
-            <a:r>
-              <a:rPr sz="1400">
-                <a:solidFill>
-                  <a:srgbClr val="222A38"/>
-                </a:solidFill>
-                <a:latin typeface="Calibri"/>
-              </a:rPr>
-              <a:t>recommendations — sugerencias precalculadas</a:t>
-            </a:r>
-          </a:p>
-        </p:txBody>
-      </p:sp>
-      <p:sp>
-        <p:nvSpPr>
-          <p:cNvPr id="13" name="Rectangle 12"/>
-          <p:cNvSpPr/>
-          <p:nvPr/>
-        </p:nvSpPr>
-        <p:spPr>
-          <a:xfrm>
-            <a:off x="6199632" y="1417320"/>
-            <a:ext cx="5349240" cy="457200"/>
-          </a:xfrm>
-          <a:prstGeom prst="rect">
-            <a:avLst/>
-          </a:prstGeom>
-          <a:solidFill>
-            <a:srgbClr val="336791"/>
-          </a:solidFill>
-          <a:ln>
-            <a:noFill/>
-          </a:ln>
-          <a:effectLst/>
-        </p:spPr>
-        <p:style>
-          <a:lnRef idx="1">
-            <a:schemeClr val="accent1"/>
-          </a:lnRef>
-          <a:fillRef idx="3">
-            <a:schemeClr val="accent1"/>
-          </a:fillRef>
-          <a:effectRef idx="2">
-            <a:schemeClr val="accent1"/>
-          </a:effectRef>
-          <a:fontRef idx="minor">
-            <a:schemeClr val="lt1"/>
-          </a:fontRef>
-        </p:style>
-        <p:txBody>
-          <a:bodyPr rtlCol="0" anchor="ctr"/>
-          <a:lstStyle/>
-          <a:p>
-            <a:pPr algn="ctr"/>
-            <a:endParaRPr/>
-          </a:p>
-        </p:txBody>
-      </p:sp>
-      <p:sp>
-        <p:nvSpPr>
-          <p:cNvPr id="14" name="TextBox 13"/>
-          <p:cNvSpPr txBox="1"/>
-          <p:nvPr/>
-        </p:nvSpPr>
-        <p:spPr>
-          <a:xfrm>
-            <a:off x="6382512" y="1435608"/>
-            <a:ext cx="5029200" cy="411480"/>
-          </a:xfrm>
-          <a:prstGeom prst="rect">
-            <a:avLst/>
-          </a:prstGeom>
-          <a:noFill/>
-        </p:spPr>
-        <p:txBody>
-          <a:bodyPr wrap="square" anchor="ctr">
-            <a:spAutoFit/>
-          </a:bodyPr>
-          <a:lstStyle/>
-          <a:p>
-            <a:pPr algn="l">
-              <a:spcBef>
-                <a:spcPts val="0"/>
-              </a:spcBef>
-              <a:spcAft>
-                <a:spcPts val="600"/>
-              </a:spcAft>
-            </a:pPr>
-            <a:r>
-              <a:rPr sz="1500" b="1">
-                <a:solidFill>
-                  <a:srgbClr val="FFFFFF"/>
-                </a:solidFill>
-                <a:latin typeface="Calibri"/>
-              </a:rPr>
-              <a:t>Patrones de modelado</a:t>
-            </a:r>
-          </a:p>
-        </p:txBody>
-      </p:sp>
-      <p:sp>
-        <p:nvSpPr>
-          <p:cNvPr id="15" name="TextBox 14"/>
-          <p:cNvSpPr txBox="1"/>
-          <p:nvPr/>
-        </p:nvSpPr>
-        <p:spPr>
-          <a:xfrm>
-            <a:off x="6336792" y="2011680"/>
-            <a:ext cx="5212080" cy="4206240"/>
-          </a:xfrm>
-          <a:prstGeom prst="rect">
-            <a:avLst/>
-          </a:prstGeom>
-          <a:noFill/>
-        </p:spPr>
-        <p:txBody>
-          <a:bodyPr wrap="square">
-            <a:spAutoFit/>
-          </a:bodyPr>
-          <a:lstStyle/>
-          <a:p>
-            <a:pPr>
-              <a:spcAft>
-                <a:spcPts val="800"/>
-              </a:spcAft>
-            </a:pPr>
-            <a:r>
-              <a:rPr sz="1400" b="1">
-                <a:solidFill>
-                  <a:srgbClr val="336791"/>
-                </a:solidFill>
-                <a:latin typeface="Calibri"/>
-              </a:rPr>
-              <a:t>▪  </a:t>
-            </a:r>
-            <a:r>
-              <a:rPr sz="1400">
-                <a:solidFill>
-                  <a:srgbClr val="222A38"/>
-                </a:solidFill>
-                <a:latin typeface="Calibri"/>
-              </a:rPr>
-              <a:t>Embedding — datos consultados juntos (categoría, dimensiones, comentarios).</a:t>
-            </a:r>
-          </a:p>
-          <a:p>
-            <a:pPr>
-              <a:spcAft>
-                <a:spcPts val="800"/>
-              </a:spcAft>
-            </a:pPr>
-            <a:r>
-              <a:rPr sz="1400" b="1">
-                <a:solidFill>
-                  <a:srgbClr val="336791"/>
-                </a:solidFill>
-                <a:latin typeface="Calibri"/>
-              </a:rPr>
-              <a:t>▪  </a:t>
-            </a:r>
-            <a:r>
-              <a:rPr sz="1400">
-                <a:solidFill>
-                  <a:srgbClr val="222A38"/>
-                </a:solidFill>
-                <a:latin typeface="Calibri"/>
-              </a:rPr>
-              <a:t>Referencing — claves compartidas (product_id, order_id, customer_id).</a:t>
-            </a:r>
-          </a:p>
-          <a:p>
-            <a:pPr>
-              <a:spcAft>
-                <a:spcPts val="800"/>
-              </a:spcAft>
-            </a:pPr>
-            <a:r>
-              <a:rPr sz="1400" b="1">
-                <a:solidFill>
-                  <a:srgbClr val="336791"/>
-                </a:solidFill>
-                <a:latin typeface="Calibri"/>
-              </a:rPr>
-              <a:t>▪  </a:t>
-            </a:r>
-            <a:r>
-              <a:rPr sz="1400">
-                <a:solidFill>
-                  <a:srgbClr val="222A38"/>
-                </a:solidFill>
-                <a:latin typeface="Calibri"/>
-              </a:rPr>
-              <a:t>Computed Pattern — métricas precalculadas (promedio, ventas).</a:t>
-            </a:r>
-          </a:p>
-          <a:p>
-            <a:pPr>
-              <a:spcAft>
-                <a:spcPts val="800"/>
-              </a:spcAft>
-            </a:pPr>
-            <a:r>
-              <a:rPr sz="1400" b="1">
-                <a:solidFill>
-                  <a:srgbClr val="336791"/>
-                </a:solidFill>
-                <a:latin typeface="Calibri"/>
-              </a:rPr>
-              <a:t>▪  </a:t>
-            </a:r>
-            <a:r>
-              <a:rPr sz="1400">
-                <a:solidFill>
-                  <a:srgbClr val="222A38"/>
-                </a:solidFill>
-                <a:latin typeface="Calibri"/>
-              </a:rPr>
-              <a:t>Subset Pattern — solo lo más consultado (límite Atlas M0).</a:t>
+              <a:rPr sz="1250">
+                <a:solidFill>
+                  <a:srgbClr val="222A38"/>
+                </a:solidFill>
+                <a:latin typeface="Calibri"/>
+              </a:rPr>
+              <a:t>Notebooks EDA + MongoDB Atlas ejecutados</a:t>
             </a:r>
           </a:p>
         </p:txBody>
@@ -6358,712 +6230,6 @@
         <p:spPr>
           <a:xfrm>
             <a:off x="0" y="0"/>
-            <a:ext cx="12191695" cy="1051560"/>
-          </a:xfrm>
-          <a:prstGeom prst="rect">
-            <a:avLst/>
-          </a:prstGeom>
-          <a:solidFill>
-            <a:srgbClr val="16284A"/>
-          </a:solidFill>
-          <a:ln>
-            <a:noFill/>
-          </a:ln>
-          <a:effectLst/>
-        </p:spPr>
-        <p:style>
-          <a:lnRef idx="1">
-            <a:schemeClr val="accent1"/>
-          </a:lnRef>
-          <a:fillRef idx="3">
-            <a:schemeClr val="accent1"/>
-          </a:fillRef>
-          <a:effectRef idx="2">
-            <a:schemeClr val="accent1"/>
-          </a:effectRef>
-          <a:fontRef idx="minor">
-            <a:schemeClr val="lt1"/>
-          </a:fontRef>
-        </p:style>
-        <p:txBody>
-          <a:bodyPr rtlCol="0" anchor="ctr"/>
-          <a:lstStyle/>
-          <a:p>
-            <a:pPr algn="ctr"/>
-            <a:endParaRPr/>
-          </a:p>
-        </p:txBody>
-      </p:sp>
-      <p:sp>
-        <p:nvSpPr>
-          <p:cNvPr id="3" name="Rectangle 2"/>
-          <p:cNvSpPr/>
-          <p:nvPr/>
-        </p:nvSpPr>
-        <p:spPr>
-          <a:xfrm>
-            <a:off x="0" y="1051560"/>
-            <a:ext cx="12191695" cy="54864"/>
-          </a:xfrm>
-          <a:prstGeom prst="rect">
-            <a:avLst/>
-          </a:prstGeom>
-          <a:solidFill>
-            <a:srgbClr val="13AA52"/>
-          </a:solidFill>
-          <a:ln>
-            <a:noFill/>
-          </a:ln>
-          <a:effectLst/>
-        </p:spPr>
-        <p:style>
-          <a:lnRef idx="1">
-            <a:schemeClr val="accent1"/>
-          </a:lnRef>
-          <a:fillRef idx="3">
-            <a:schemeClr val="accent1"/>
-          </a:fillRef>
-          <a:effectRef idx="2">
-            <a:schemeClr val="accent1"/>
-          </a:effectRef>
-          <a:fontRef idx="minor">
-            <a:schemeClr val="lt1"/>
-          </a:fontRef>
-        </p:style>
-        <p:txBody>
-          <a:bodyPr rtlCol="0" anchor="ctr"/>
-          <a:lstStyle/>
-          <a:p>
-            <a:pPr algn="ctr"/>
-            <a:endParaRPr/>
-          </a:p>
-        </p:txBody>
-      </p:sp>
-      <p:sp>
-        <p:nvSpPr>
-          <p:cNvPr id="4" name="Rectangle 3"/>
-          <p:cNvSpPr/>
-          <p:nvPr/>
-        </p:nvSpPr>
-        <p:spPr>
-          <a:xfrm>
-            <a:off x="0" y="1051560"/>
-            <a:ext cx="3840480" cy="54864"/>
-          </a:xfrm>
-          <a:prstGeom prst="rect">
-            <a:avLst/>
-          </a:prstGeom>
-          <a:solidFill>
-            <a:srgbClr val="336791"/>
-          </a:solidFill>
-          <a:ln>
-            <a:noFill/>
-          </a:ln>
-          <a:effectLst/>
-        </p:spPr>
-        <p:style>
-          <a:lnRef idx="1">
-            <a:schemeClr val="accent1"/>
-          </a:lnRef>
-          <a:fillRef idx="3">
-            <a:schemeClr val="accent1"/>
-          </a:fillRef>
-          <a:effectRef idx="2">
-            <a:schemeClr val="accent1"/>
-          </a:effectRef>
-          <a:fontRef idx="minor">
-            <a:schemeClr val="lt1"/>
-          </a:fontRef>
-        </p:style>
-        <p:txBody>
-          <a:bodyPr rtlCol="0" anchor="ctr"/>
-          <a:lstStyle/>
-          <a:p>
-            <a:pPr algn="ctr"/>
-            <a:endParaRPr/>
-          </a:p>
-        </p:txBody>
-      </p:sp>
-      <p:sp>
-        <p:nvSpPr>
-          <p:cNvPr id="5" name="TextBox 4"/>
-          <p:cNvSpPr txBox="1"/>
-          <p:nvPr/>
-        </p:nvSpPr>
-        <p:spPr>
-          <a:xfrm>
-            <a:off x="548640" y="146304"/>
-            <a:ext cx="10058400" cy="274320"/>
-          </a:xfrm>
-          <a:prstGeom prst="rect">
-            <a:avLst/>
-          </a:prstGeom>
-          <a:noFill/>
-        </p:spPr>
-        <p:txBody>
-          <a:bodyPr wrap="square" anchor="t">
-            <a:spAutoFit/>
-          </a:bodyPr>
-          <a:lstStyle/>
-          <a:p>
-            <a:pPr algn="l">
-              <a:spcBef>
-                <a:spcPts val="0"/>
-              </a:spcBef>
-              <a:spcAft>
-                <a:spcPts val="600"/>
-              </a:spcAft>
-            </a:pPr>
-            <a:r>
-              <a:rPr sz="1200" b="1">
-                <a:solidFill>
-                  <a:srgbClr val="13AA52"/>
-                </a:solidFill>
-                <a:latin typeface="Calibri"/>
-              </a:rPr>
-              <a:t>8 · CIERRE TÉCNICO</a:t>
-            </a:r>
-          </a:p>
-        </p:txBody>
-      </p:sp>
-      <p:sp>
-        <p:nvSpPr>
-          <p:cNvPr id="6" name="TextBox 5"/>
-          <p:cNvSpPr txBox="1"/>
-          <p:nvPr/>
-        </p:nvSpPr>
-        <p:spPr>
-          <a:xfrm>
-            <a:off x="548640" y="365760"/>
-            <a:ext cx="11064240" cy="640080"/>
-          </a:xfrm>
-          <a:prstGeom prst="rect">
-            <a:avLst/>
-          </a:prstGeom>
-          <a:noFill/>
-        </p:spPr>
-        <p:txBody>
-          <a:bodyPr wrap="square" anchor="ctr">
-            <a:spAutoFit/>
-          </a:bodyPr>
-          <a:lstStyle/>
-          <a:p>
-            <a:pPr algn="l">
-              <a:spcBef>
-                <a:spcPts val="0"/>
-              </a:spcBef>
-              <a:spcAft>
-                <a:spcPts val="600"/>
-              </a:spcAft>
-            </a:pPr>
-            <a:r>
-              <a:rPr sz="2600" b="1">
-                <a:solidFill>
-                  <a:srgbClr val="FFFFFF"/>
-                </a:solidFill>
-                <a:latin typeface="Calibri"/>
-              </a:rPr>
-              <a:t>Frontera de datos, reconciliación y estado</a:t>
-            </a:r>
-          </a:p>
-        </p:txBody>
-      </p:sp>
-      <p:sp>
-        <p:nvSpPr>
-          <p:cNvPr id="7" name="Rectangle 6"/>
-          <p:cNvSpPr/>
-          <p:nvPr/>
-        </p:nvSpPr>
-        <p:spPr>
-          <a:xfrm>
-            <a:off x="0" y="6537960"/>
-            <a:ext cx="12191695" cy="320040"/>
-          </a:xfrm>
-          <a:prstGeom prst="rect">
-            <a:avLst/>
-          </a:prstGeom>
-          <a:solidFill>
-            <a:srgbClr val="F4F6F9"/>
-          </a:solidFill>
-          <a:ln>
-            <a:noFill/>
-          </a:ln>
-          <a:effectLst/>
-        </p:spPr>
-        <p:style>
-          <a:lnRef idx="1">
-            <a:schemeClr val="accent1"/>
-          </a:lnRef>
-          <a:fillRef idx="3">
-            <a:schemeClr val="accent1"/>
-          </a:fillRef>
-          <a:effectRef idx="2">
-            <a:schemeClr val="accent1"/>
-          </a:effectRef>
-          <a:fontRef idx="minor">
-            <a:schemeClr val="lt1"/>
-          </a:fontRef>
-        </p:style>
-        <p:txBody>
-          <a:bodyPr rtlCol="0" anchor="ctr"/>
-          <a:lstStyle/>
-          <a:p>
-            <a:pPr algn="ctr"/>
-            <a:endParaRPr/>
-          </a:p>
-        </p:txBody>
-      </p:sp>
-      <p:sp>
-        <p:nvSpPr>
-          <p:cNvPr id="8" name="TextBox 7"/>
-          <p:cNvSpPr txBox="1"/>
-          <p:nvPr/>
-        </p:nvSpPr>
-        <p:spPr>
-          <a:xfrm>
-            <a:off x="548640" y="6528816"/>
-            <a:ext cx="8229600" cy="292608"/>
-          </a:xfrm>
-          <a:prstGeom prst="rect">
-            <a:avLst/>
-          </a:prstGeom>
-          <a:noFill/>
-        </p:spPr>
-        <p:txBody>
-          <a:bodyPr wrap="square" anchor="ctr">
-            <a:spAutoFit/>
-          </a:bodyPr>
-          <a:lstStyle/>
-          <a:p>
-            <a:pPr algn="l">
-              <a:spcBef>
-                <a:spcPts val="0"/>
-              </a:spcBef>
-              <a:spcAft>
-                <a:spcPts val="600"/>
-              </a:spcAft>
-            </a:pPr>
-            <a:r>
-              <a:rPr sz="900" b="0">
-                <a:solidFill>
-                  <a:srgbClr val="555F6E"/>
-                </a:solidFill>
-                <a:latin typeface="Calibri"/>
-              </a:rPr>
-              <a:t>Ecommify · Arquitectura Híbrida PostgreSQL + MongoDB</a:t>
-            </a:r>
-          </a:p>
-        </p:txBody>
-      </p:sp>
-      <p:sp>
-        <p:nvSpPr>
-          <p:cNvPr id="9" name="TextBox 8"/>
-          <p:cNvSpPr txBox="1"/>
-          <p:nvPr/>
-        </p:nvSpPr>
-        <p:spPr>
-          <a:xfrm>
-            <a:off x="11002975" y="6528816"/>
-            <a:ext cx="822960" cy="292608"/>
-          </a:xfrm>
-          <a:prstGeom prst="rect">
-            <a:avLst/>
-          </a:prstGeom>
-          <a:noFill/>
-        </p:spPr>
-        <p:txBody>
-          <a:bodyPr wrap="square" anchor="ctr">
-            <a:spAutoFit/>
-          </a:bodyPr>
-          <a:lstStyle/>
-          <a:p>
-            <a:pPr algn="r">
-              <a:spcBef>
-                <a:spcPts val="0"/>
-              </a:spcBef>
-              <a:spcAft>
-                <a:spcPts val="600"/>
-              </a:spcAft>
-            </a:pPr>
-            <a:r>
-              <a:rPr sz="900" b="1">
-                <a:solidFill>
-                  <a:srgbClr val="555F6E"/>
-                </a:solidFill>
-                <a:latin typeface="Calibri"/>
-              </a:rPr>
-              <a:t>11</a:t>
-            </a:r>
-          </a:p>
-        </p:txBody>
-      </p:sp>
-      <p:sp>
-        <p:nvSpPr>
-          <p:cNvPr id="10" name="TextBox 9"/>
-          <p:cNvSpPr txBox="1"/>
-          <p:nvPr/>
-        </p:nvSpPr>
-        <p:spPr>
-          <a:xfrm>
-            <a:off x="640080" y="1463040"/>
-            <a:ext cx="6766560" cy="3657600"/>
-          </a:xfrm>
-          <a:prstGeom prst="rect">
-            <a:avLst/>
-          </a:prstGeom>
-          <a:noFill/>
-        </p:spPr>
-        <p:txBody>
-          <a:bodyPr wrap="square">
-            <a:spAutoFit/>
-          </a:bodyPr>
-          <a:lstStyle/>
-          <a:p>
-            <a:pPr>
-              <a:spcAft>
-                <a:spcPts val="800"/>
-              </a:spcAft>
-            </a:pPr>
-            <a:r>
-              <a:rPr sz="1700" b="1">
-                <a:solidFill>
-                  <a:srgbClr val="336791"/>
-                </a:solidFill>
-                <a:latin typeface="Calibri"/>
-              </a:rPr>
-              <a:t>▪  </a:t>
-            </a:r>
-            <a:r>
-              <a:rPr sz="1700">
-                <a:solidFill>
-                  <a:srgbClr val="222A38"/>
-                </a:solidFill>
-                <a:latin typeface="Calibri"/>
-              </a:rPr>
-              <a:t>Criterio de frontera (CAP): consistencia fuerte y relaciones estrictas → PostgreSQL; flexibilidad y lectura intensiva → MongoDB.</a:t>
-            </a:r>
-          </a:p>
-          <a:p>
-            <a:pPr>
-              <a:spcAft>
-                <a:spcPts val="800"/>
-              </a:spcAft>
-            </a:pPr>
-            <a:r>
-              <a:rPr sz="1700" b="1">
-                <a:solidFill>
-                  <a:srgbClr val="336791"/>
-                </a:solidFill>
-                <a:latin typeface="Calibri"/>
-              </a:rPr>
-              <a:t>▪  </a:t>
-            </a:r>
-            <a:r>
-              <a:rPr sz="1700">
-                <a:solidFill>
-                  <a:srgbClr val="222A38"/>
-                </a:solidFill>
-                <a:latin typeface="Calibri"/>
-              </a:rPr>
-              <a:t>PostgreSQL conserva order_reviews por integridad; MongoDB lo explota como capa analítica.</a:t>
-            </a:r>
-          </a:p>
-          <a:p>
-            <a:pPr>
-              <a:spcAft>
-                <a:spcPts val="800"/>
-              </a:spcAft>
-            </a:pPr>
-            <a:r>
-              <a:rPr sz="1700" b="1">
-                <a:solidFill>
-                  <a:srgbClr val="336791"/>
-                </a:solidFill>
-                <a:latin typeface="Calibri"/>
-              </a:rPr>
-              <a:t>▪  </a:t>
-            </a:r>
-            <a:r>
-              <a:rPr sz="1700">
-                <a:solidFill>
-                  <a:srgbClr val="222A38"/>
-                </a:solidFill>
-                <a:latin typeface="Calibri"/>
-              </a:rPr>
-              <a:t>Sincronización por lotes vía ETL en Colab: cruza product_id entre ambos sistemas (sin Change Streams en M0).</a:t>
-            </a:r>
-          </a:p>
-          <a:p>
-            <a:pPr>
-              <a:spcAft>
-                <a:spcPts val="800"/>
-              </a:spcAft>
-            </a:pPr>
-            <a:r>
-              <a:rPr sz="1700" b="1">
-                <a:solidFill>
-                  <a:srgbClr val="336791"/>
-                </a:solidFill>
-                <a:latin typeface="Calibri"/>
-              </a:rPr>
-              <a:t>▪  </a:t>
-            </a:r>
-            <a:r>
-              <a:rPr sz="1700">
-                <a:solidFill>
-                  <a:srgbClr val="222A38"/>
-                </a:solidFill>
-                <a:latin typeface="Calibri"/>
-              </a:rPr>
-              <a:t>Diccionario de datos y trade-offs documentados en el entregable.</a:t>
-            </a:r>
-          </a:p>
-        </p:txBody>
-      </p:sp>
-      <p:sp>
-        <p:nvSpPr>
-          <p:cNvPr id="11" name="Rectangle 10"/>
-          <p:cNvSpPr/>
-          <p:nvPr/>
-        </p:nvSpPr>
-        <p:spPr>
-          <a:xfrm>
-            <a:off x="7680960" y="1554480"/>
-            <a:ext cx="3886200" cy="4206240"/>
-          </a:xfrm>
-          <a:prstGeom prst="rect">
-            <a:avLst/>
-          </a:prstGeom>
-          <a:solidFill>
-            <a:srgbClr val="F4F6F9"/>
-          </a:solidFill>
-          <a:ln>
-            <a:noFill/>
-          </a:ln>
-          <a:effectLst/>
-        </p:spPr>
-        <p:style>
-          <a:lnRef idx="1">
-            <a:schemeClr val="accent1"/>
-          </a:lnRef>
-          <a:fillRef idx="3">
-            <a:schemeClr val="accent1"/>
-          </a:fillRef>
-          <a:effectRef idx="2">
-            <a:schemeClr val="accent1"/>
-          </a:effectRef>
-          <a:fontRef idx="minor">
-            <a:schemeClr val="lt1"/>
-          </a:fontRef>
-        </p:style>
-        <p:txBody>
-          <a:bodyPr rtlCol="0" anchor="ctr"/>
-          <a:lstStyle/>
-          <a:p>
-            <a:pPr algn="ctr"/>
-            <a:endParaRPr/>
-          </a:p>
-        </p:txBody>
-      </p:sp>
-      <p:sp>
-        <p:nvSpPr>
-          <p:cNvPr id="12" name="TextBox 11"/>
-          <p:cNvSpPr txBox="1"/>
-          <p:nvPr/>
-        </p:nvSpPr>
-        <p:spPr>
-          <a:xfrm>
-            <a:off x="7909560" y="1737360"/>
-            <a:ext cx="3474720" cy="457200"/>
-          </a:xfrm>
-          <a:prstGeom prst="rect">
-            <a:avLst/>
-          </a:prstGeom>
-          <a:noFill/>
-        </p:spPr>
-        <p:txBody>
-          <a:bodyPr wrap="square" anchor="t">
-            <a:spAutoFit/>
-          </a:bodyPr>
-          <a:lstStyle/>
-          <a:p>
-            <a:pPr algn="l">
-              <a:spcBef>
-                <a:spcPts val="0"/>
-              </a:spcBef>
-              <a:spcAft>
-                <a:spcPts val="600"/>
-              </a:spcAft>
-            </a:pPr>
-            <a:r>
-              <a:rPr sz="1300" b="1">
-                <a:solidFill>
-                  <a:srgbClr val="336791"/>
-                </a:solidFill>
-                <a:latin typeface="Calibri"/>
-              </a:rPr>
-              <a:t>ESTADO DE VALIDACIÓN</a:t>
-            </a:r>
-          </a:p>
-        </p:txBody>
-      </p:sp>
-      <p:sp>
-        <p:nvSpPr>
-          <p:cNvPr id="13" name="TextBox 12"/>
-          <p:cNvSpPr txBox="1"/>
-          <p:nvPr/>
-        </p:nvSpPr>
-        <p:spPr>
-          <a:xfrm>
-            <a:off x="7909560" y="2286000"/>
-            <a:ext cx="3474720" cy="3291840"/>
-          </a:xfrm>
-          <a:prstGeom prst="rect">
-            <a:avLst/>
-          </a:prstGeom>
-          <a:noFill/>
-        </p:spPr>
-        <p:txBody>
-          <a:bodyPr wrap="square">
-            <a:spAutoFit/>
-          </a:bodyPr>
-          <a:lstStyle/>
-          <a:p>
-            <a:pPr>
-              <a:spcAft>
-                <a:spcPts val="800"/>
-              </a:spcAft>
-            </a:pPr>
-            <a:r>
-              <a:rPr sz="1250" b="1">
-                <a:solidFill>
-                  <a:srgbClr val="336791"/>
-                </a:solidFill>
-                <a:latin typeface="Calibri"/>
-              </a:rPr>
-              <a:t>▪  </a:t>
-            </a:r>
-            <a:r>
-              <a:rPr sz="1250">
-                <a:solidFill>
-                  <a:srgbClr val="222A38"/>
-                </a:solidFill>
-                <a:latin typeface="Calibri"/>
-              </a:rPr>
-              <a:t>DDL validado en PostgreSQL 16</a:t>
-            </a:r>
-          </a:p>
-          <a:p>
-            <a:pPr>
-              <a:spcAft>
-                <a:spcPts val="800"/>
-              </a:spcAft>
-            </a:pPr>
-            <a:r>
-              <a:rPr sz="1250" b="1">
-                <a:solidFill>
-                  <a:srgbClr val="336791"/>
-                </a:solidFill>
-                <a:latin typeface="Calibri"/>
-              </a:rPr>
-              <a:t>▪  </a:t>
-            </a:r>
-            <a:r>
-              <a:rPr sz="1250">
-                <a:solidFill>
-                  <a:srgbClr val="222A38"/>
-                </a:solidFill>
-                <a:latin typeface="Calibri"/>
-              </a:rPr>
-              <a:t>0 registros huérfanos (M4)</a:t>
-            </a:r>
-          </a:p>
-          <a:p>
-            <a:pPr>
-              <a:spcAft>
-                <a:spcPts val="800"/>
-              </a:spcAft>
-            </a:pPr>
-            <a:r>
-              <a:rPr sz="1250" b="1">
-                <a:solidFill>
-                  <a:srgbClr val="336791"/>
-                </a:solidFill>
-                <a:latin typeface="Calibri"/>
-              </a:rPr>
-              <a:t>▪  </a:t>
-            </a:r>
-            <a:r>
-              <a:rPr sz="1250">
-                <a:solidFill>
-                  <a:srgbClr val="222A38"/>
-                </a:solidFill>
-                <a:latin typeface="Calibri"/>
-              </a:rPr>
-              <a:t>Repositorio + Pull Request creados</a:t>
-            </a:r>
-          </a:p>
-          <a:p>
-            <a:pPr>
-              <a:spcAft>
-                <a:spcPts val="800"/>
-              </a:spcAft>
-            </a:pPr>
-            <a:r>
-              <a:rPr sz="1250" b="1">
-                <a:solidFill>
-                  <a:srgbClr val="336791"/>
-                </a:solidFill>
-                <a:latin typeface="Calibri"/>
-              </a:rPr>
-              <a:t>▪  </a:t>
-            </a:r>
-            <a:r>
-              <a:rPr sz="1250">
-                <a:solidFill>
-                  <a:srgbClr val="222A38"/>
-                </a:solidFill>
-                <a:latin typeface="Calibri"/>
-              </a:rPr>
-              <a:t>Notebooks EDA + MongoDB Atlas ejecutados</a:t>
-            </a:r>
-          </a:p>
-        </p:txBody>
-      </p:sp>
-    </p:spTree>
-  </p:cSld>
-  <p:clrMapOvr>
-    <a:masterClrMapping/>
-  </p:clrMapOvr>
-</p:sld>
-</file>
-
-<file path=ppt/slides/slide14.xml><?xml version="1.0" encoding="utf-8"?>
-<p:sld xmlns:a="http://schemas.openxmlformats.org/drawingml/2006/main" xmlns:r="http://schemas.openxmlformats.org/officeDocument/2006/relationships" xmlns:p="http://schemas.openxmlformats.org/presentationml/2006/main">
-  <p:cSld>
-    <p:spTree>
-      <p:nvGrpSpPr>
-        <p:cNvPr id="1" name=""/>
-        <p:cNvGrpSpPr/>
-        <p:nvPr/>
-      </p:nvGrpSpPr>
-      <p:grpSpPr>
-        <a:xfrm>
-          <a:off x="0" y="0"/>
-          <a:ext cx="0" cy="0"/>
-          <a:chOff x="0" y="0"/>
-          <a:chExt cx="0" cy="0"/>
-        </a:xfrm>
-      </p:grpSpPr>
-      <p:sp>
-        <p:nvSpPr>
-          <p:cNvPr id="2" name="Rectangle 1"/>
-          <p:cNvSpPr/>
-          <p:nvPr/>
-        </p:nvSpPr>
-        <p:spPr>
-          <a:xfrm>
-            <a:off x="0" y="0"/>
             <a:ext cx="12191695" cy="6858000"/>
           </a:xfrm>
           <a:prstGeom prst="rect">
@@ -8898,7 +8064,7 @@
               </a:spcAft>
             </a:pPr>
             <a:r>
-              <a:rPr sz="1700" b="1">
+              <a:rPr sz="1700" b="1" dirty="0">
                 <a:solidFill>
                   <a:srgbClr val="336791"/>
                 </a:solidFill>
@@ -8907,13 +8073,184 @@
               <a:t>▪  </a:t>
             </a:r>
             <a:r>
-              <a:rPr sz="1700">
-                <a:solidFill>
-                  <a:srgbClr val="222A38"/>
-                </a:solidFill>
-                <a:latin typeface="Calibri"/>
-              </a:rPr>
-              <a:t>Arquitectura políglota híbrida: cada dato se ubica según su naturaleza, no por defecto.</a:t>
+              <a:rPr sz="1700" dirty="0" err="1">
+                <a:solidFill>
+                  <a:srgbClr val="222A38"/>
+                </a:solidFill>
+                <a:latin typeface="Calibri"/>
+              </a:rPr>
+              <a:t>Arquitectura</a:t>
+            </a:r>
+            <a:r>
+              <a:rPr sz="1700" dirty="0">
+                <a:solidFill>
+                  <a:srgbClr val="222A38"/>
+                </a:solidFill>
+                <a:latin typeface="Calibri"/>
+              </a:rPr>
+              <a:t> </a:t>
+            </a:r>
+            <a:r>
+              <a:rPr sz="1700" dirty="0" err="1">
+                <a:solidFill>
+                  <a:srgbClr val="222A38"/>
+                </a:solidFill>
+                <a:latin typeface="Calibri"/>
+              </a:rPr>
+              <a:t>políglota</a:t>
+            </a:r>
+            <a:r>
+              <a:rPr sz="1700" dirty="0">
+                <a:solidFill>
+                  <a:srgbClr val="222A38"/>
+                </a:solidFill>
+                <a:latin typeface="Calibri"/>
+              </a:rPr>
+              <a:t> </a:t>
+            </a:r>
+            <a:r>
+              <a:rPr sz="1700" dirty="0" err="1">
+                <a:solidFill>
+                  <a:srgbClr val="222A38"/>
+                </a:solidFill>
+                <a:latin typeface="Calibri"/>
+              </a:rPr>
+              <a:t>híbrida</a:t>
+            </a:r>
+            <a:r>
+              <a:rPr sz="1700" dirty="0">
+                <a:solidFill>
+                  <a:srgbClr val="222A38"/>
+                </a:solidFill>
+                <a:latin typeface="Calibri"/>
+              </a:rPr>
+              <a:t>: </a:t>
+            </a:r>
+            <a:r>
+              <a:rPr sz="1700" dirty="0" err="1">
+                <a:solidFill>
+                  <a:srgbClr val="222A38"/>
+                </a:solidFill>
+                <a:latin typeface="Calibri"/>
+              </a:rPr>
+              <a:t>cada</a:t>
+            </a:r>
+            <a:r>
+              <a:rPr sz="1700" dirty="0">
+                <a:solidFill>
+                  <a:srgbClr val="222A38"/>
+                </a:solidFill>
+                <a:latin typeface="Calibri"/>
+              </a:rPr>
+              <a:t> </a:t>
+            </a:r>
+            <a:r>
+              <a:rPr sz="1700" dirty="0" err="1">
+                <a:solidFill>
+                  <a:srgbClr val="222A38"/>
+                </a:solidFill>
+                <a:latin typeface="Calibri"/>
+              </a:rPr>
+              <a:t>dato</a:t>
+            </a:r>
+            <a:r>
+              <a:rPr sz="1700" dirty="0">
+                <a:solidFill>
+                  <a:srgbClr val="222A38"/>
+                </a:solidFill>
+                <a:latin typeface="Calibri"/>
+              </a:rPr>
+              <a:t> se </a:t>
+            </a:r>
+            <a:r>
+              <a:rPr sz="1700" dirty="0" err="1">
+                <a:solidFill>
+                  <a:srgbClr val="222A38"/>
+                </a:solidFill>
+                <a:latin typeface="Calibri"/>
+              </a:rPr>
+              <a:t>ubica</a:t>
+            </a:r>
+            <a:r>
+              <a:rPr sz="1700" dirty="0">
+                <a:solidFill>
+                  <a:srgbClr val="222A38"/>
+                </a:solidFill>
+                <a:latin typeface="Calibri"/>
+              </a:rPr>
+              <a:t> </a:t>
+            </a:r>
+            <a:r>
+              <a:rPr sz="1700" dirty="0" err="1">
+                <a:solidFill>
+                  <a:srgbClr val="222A38"/>
+                </a:solidFill>
+                <a:latin typeface="Calibri"/>
+              </a:rPr>
+              <a:t>según</a:t>
+            </a:r>
+            <a:r>
+              <a:rPr sz="1700" dirty="0">
+                <a:solidFill>
+                  <a:srgbClr val="222A38"/>
+                </a:solidFill>
+                <a:latin typeface="Calibri"/>
+              </a:rPr>
+              <a:t> </a:t>
+            </a:r>
+            <a:r>
+              <a:rPr sz="1700" dirty="0" err="1">
+                <a:solidFill>
+                  <a:srgbClr val="222A38"/>
+                </a:solidFill>
+                <a:latin typeface="Calibri"/>
+              </a:rPr>
+              <a:t>su</a:t>
+            </a:r>
+            <a:r>
+              <a:rPr sz="1700" dirty="0">
+                <a:solidFill>
+                  <a:srgbClr val="222A38"/>
+                </a:solidFill>
+                <a:latin typeface="Calibri"/>
+              </a:rPr>
+              <a:t> </a:t>
+            </a:r>
+            <a:r>
+              <a:rPr sz="1700" dirty="0" err="1">
+                <a:solidFill>
+                  <a:srgbClr val="222A38"/>
+                </a:solidFill>
+                <a:latin typeface="Calibri"/>
+              </a:rPr>
+              <a:t>naturaleza</a:t>
+            </a:r>
+            <a:r>
+              <a:rPr sz="1700" dirty="0">
+                <a:solidFill>
+                  <a:srgbClr val="222A38"/>
+                </a:solidFill>
+                <a:latin typeface="Calibri"/>
+              </a:rPr>
+              <a:t>, no por </a:t>
+            </a:r>
+            <a:r>
+              <a:rPr sz="1700" dirty="0" err="1">
+                <a:solidFill>
+                  <a:srgbClr val="222A38"/>
+                </a:solidFill>
+                <a:latin typeface="Calibri"/>
+              </a:rPr>
+              <a:t>defecto</a:t>
+            </a:r>
+            <a:r>
+              <a:rPr sz="1700" dirty="0">
+                <a:solidFill>
+                  <a:srgbClr val="222A38"/>
+                </a:solidFill>
+                <a:latin typeface="Calibri"/>
+              </a:rPr>
+              <a:t>.</a:t>
             </a:r>
           </a:p>
           <a:p>
@@ -8923,7 +8260,7 @@
               </a:spcAft>
             </a:pPr>
             <a:r>
-              <a:rPr sz="1700" b="1">
+              <a:rPr sz="1700" b="1" dirty="0">
                 <a:solidFill>
                   <a:srgbClr val="13AA52"/>
                 </a:solidFill>
@@ -8932,13 +8269,103 @@
               <a:t>–  </a:t>
             </a:r>
             <a:r>
-              <a:rPr sz="1600">
-                <a:solidFill>
-                  <a:srgbClr val="222A38"/>
-                </a:solidFill>
-                <a:latin typeface="Calibri"/>
-              </a:rPr>
-              <a:t>PostgreSQL (Supabase) → núcleo transaccional ACID: Customers, Orders, Order_Items, Order_Payments, Sellers.</a:t>
+              <a:rPr sz="1600" dirty="0">
+                <a:solidFill>
+                  <a:srgbClr val="222A38"/>
+                </a:solidFill>
+                <a:latin typeface="Calibri"/>
+              </a:rPr>
+              <a:t>PostgreSQL (</a:t>
+            </a:r>
+            <a:r>
+              <a:rPr sz="1600" dirty="0" err="1">
+                <a:solidFill>
+                  <a:srgbClr val="222A38"/>
+                </a:solidFill>
+                <a:latin typeface="Calibri"/>
+              </a:rPr>
+              <a:t>Supabase</a:t>
+            </a:r>
+            <a:r>
+              <a:rPr sz="1600" dirty="0">
+                <a:solidFill>
+                  <a:srgbClr val="222A38"/>
+                </a:solidFill>
+                <a:latin typeface="Calibri"/>
+              </a:rPr>
+              <a:t>) → </a:t>
+            </a:r>
+            <a:r>
+              <a:rPr sz="1600" dirty="0" err="1">
+                <a:solidFill>
+                  <a:srgbClr val="222A38"/>
+                </a:solidFill>
+                <a:latin typeface="Calibri"/>
+              </a:rPr>
+              <a:t>núcleo</a:t>
+            </a:r>
+            <a:r>
+              <a:rPr sz="1600" dirty="0">
+                <a:solidFill>
+                  <a:srgbClr val="222A38"/>
+                </a:solidFill>
+                <a:latin typeface="Calibri"/>
+              </a:rPr>
+              <a:t> </a:t>
+            </a:r>
+            <a:r>
+              <a:rPr sz="1600" dirty="0" err="1">
+                <a:solidFill>
+                  <a:srgbClr val="222A38"/>
+                </a:solidFill>
+                <a:latin typeface="Calibri"/>
+              </a:rPr>
+              <a:t>transaccional</a:t>
+            </a:r>
+            <a:r>
+              <a:rPr sz="1600" dirty="0">
+                <a:solidFill>
+                  <a:srgbClr val="222A38"/>
+                </a:solidFill>
+                <a:latin typeface="Calibri"/>
+              </a:rPr>
+              <a:t> ACID: Customers, Orders, </a:t>
+            </a:r>
+            <a:r>
+              <a:rPr sz="1600" dirty="0" err="1">
+                <a:solidFill>
+                  <a:srgbClr val="222A38"/>
+                </a:solidFill>
+                <a:latin typeface="Calibri"/>
+              </a:rPr>
+              <a:t>Order_Items</a:t>
+            </a:r>
+            <a:r>
+              <a:rPr sz="1600" dirty="0">
+                <a:solidFill>
+                  <a:srgbClr val="222A38"/>
+                </a:solidFill>
+                <a:latin typeface="Calibri"/>
+              </a:rPr>
+              <a:t>, </a:t>
+            </a:r>
+            <a:r>
+              <a:rPr sz="1600" dirty="0" err="1">
+                <a:solidFill>
+                  <a:srgbClr val="222A38"/>
+                </a:solidFill>
+                <a:latin typeface="Calibri"/>
+              </a:rPr>
+              <a:t>Order_Payments</a:t>
+            </a:r>
+            <a:r>
+              <a:rPr sz="1600" dirty="0">
+                <a:solidFill>
+                  <a:srgbClr val="222A38"/>
+                </a:solidFill>
+                <a:latin typeface="Calibri"/>
+              </a:rPr>
+              <a:t>, Sellers.</a:t>
             </a:r>
           </a:p>
           <a:p>
@@ -8948,7 +8375,7 @@
               </a:spcAft>
             </a:pPr>
             <a:r>
-              <a:rPr sz="1700" b="1">
+              <a:rPr sz="1700" b="1" dirty="0">
                 <a:solidFill>
                   <a:srgbClr val="13AA52"/>
                 </a:solidFill>
@@ -8957,13 +8384,85 @@
               <a:t>–  </a:t>
             </a:r>
             <a:r>
-              <a:rPr sz="1600">
-                <a:solidFill>
-                  <a:srgbClr val="222A38"/>
-                </a:solidFill>
-                <a:latin typeface="Calibri"/>
-              </a:rPr>
-              <a:t>MongoDB Atlas (M0) → capa documental flexible: catálogo (Products) y reseñas (Order_Reviews).</a:t>
+              <a:rPr sz="1600" dirty="0">
+                <a:solidFill>
+                  <a:srgbClr val="222A38"/>
+                </a:solidFill>
+                <a:latin typeface="Calibri"/>
+              </a:rPr>
+              <a:t>MongoDB Atlas (M0) → </a:t>
+            </a:r>
+            <a:r>
+              <a:rPr sz="1600" dirty="0" err="1">
+                <a:solidFill>
+                  <a:srgbClr val="222A38"/>
+                </a:solidFill>
+                <a:latin typeface="Calibri"/>
+              </a:rPr>
+              <a:t>capa</a:t>
+            </a:r>
+            <a:r>
+              <a:rPr sz="1600" dirty="0">
+                <a:solidFill>
+                  <a:srgbClr val="222A38"/>
+                </a:solidFill>
+                <a:latin typeface="Calibri"/>
+              </a:rPr>
+              <a:t> documental flexible: </a:t>
+            </a:r>
+            <a:r>
+              <a:rPr sz="1600" dirty="0" err="1">
+                <a:solidFill>
+                  <a:srgbClr val="222A38"/>
+                </a:solidFill>
+                <a:latin typeface="Calibri"/>
+              </a:rPr>
+              <a:t>catálogo</a:t>
+            </a:r>
+            <a:r>
+              <a:rPr sz="1600" dirty="0">
+                <a:solidFill>
+                  <a:srgbClr val="222A38"/>
+                </a:solidFill>
+                <a:latin typeface="Calibri"/>
+              </a:rPr>
+              <a:t> (Products) y </a:t>
+            </a:r>
+            <a:r>
+              <a:rPr sz="1600" dirty="0" err="1">
+                <a:solidFill>
+                  <a:srgbClr val="222A38"/>
+                </a:solidFill>
+                <a:latin typeface="Calibri"/>
+              </a:rPr>
+              <a:t>reseñas</a:t>
+            </a:r>
+            <a:r>
+              <a:rPr sz="1600" dirty="0">
+                <a:solidFill>
+                  <a:srgbClr val="222A38"/>
+                </a:solidFill>
+                <a:latin typeface="Calibri"/>
+              </a:rPr>
+              <a:t> (</a:t>
+            </a:r>
+            <a:r>
+              <a:rPr sz="1600" dirty="0" err="1">
+                <a:solidFill>
+                  <a:srgbClr val="222A38"/>
+                </a:solidFill>
+                <a:latin typeface="Calibri"/>
+              </a:rPr>
+              <a:t>Order_Reviews</a:t>
+            </a:r>
+            <a:r>
+              <a:rPr sz="1600" dirty="0">
+                <a:solidFill>
+                  <a:srgbClr val="222A38"/>
+                </a:solidFill>
+                <a:latin typeface="Calibri"/>
+              </a:rPr>
+              <a:t>).</a:t>
             </a:r>
           </a:p>
           <a:p>
@@ -8973,7 +8472,7 @@
               </a:spcAft>
             </a:pPr>
             <a:r>
-              <a:rPr sz="1700" b="1">
+              <a:rPr sz="1700" b="1" dirty="0">
                 <a:solidFill>
                   <a:srgbClr val="336791"/>
                 </a:solidFill>
@@ -8982,13 +8481,121 @@
               <a:t>▪  </a:t>
             </a:r>
             <a:r>
-              <a:rPr sz="1700">
-                <a:solidFill>
-                  <a:srgbClr val="222A38"/>
-                </a:solidFill>
-                <a:latin typeface="Calibri"/>
-              </a:rPr>
-              <a:t>Frontera definida por consistencia, estructura del dato y patrón de consulta (Teorema CAP).</a:t>
+              <a:rPr sz="1700" dirty="0">
+                <a:solidFill>
+                  <a:srgbClr val="222A38"/>
+                </a:solidFill>
+                <a:latin typeface="Calibri"/>
+              </a:rPr>
+              <a:t>Frontera </a:t>
+            </a:r>
+            <a:r>
+              <a:rPr sz="1700" dirty="0" err="1">
+                <a:solidFill>
+                  <a:srgbClr val="222A38"/>
+                </a:solidFill>
+                <a:latin typeface="Calibri"/>
+              </a:rPr>
+              <a:t>definida</a:t>
+            </a:r>
+            <a:r>
+              <a:rPr sz="1700" dirty="0">
+                <a:solidFill>
+                  <a:srgbClr val="222A38"/>
+                </a:solidFill>
+                <a:latin typeface="Calibri"/>
+              </a:rPr>
+              <a:t> por </a:t>
+            </a:r>
+            <a:r>
+              <a:rPr sz="1700" dirty="0" err="1">
+                <a:solidFill>
+                  <a:srgbClr val="222A38"/>
+                </a:solidFill>
+                <a:latin typeface="Calibri"/>
+              </a:rPr>
+              <a:t>consistencia</a:t>
+            </a:r>
+            <a:r>
+              <a:rPr sz="1700" dirty="0">
+                <a:solidFill>
+                  <a:srgbClr val="222A38"/>
+                </a:solidFill>
+                <a:latin typeface="Calibri"/>
+              </a:rPr>
+              <a:t>, </a:t>
+            </a:r>
+            <a:r>
+              <a:rPr sz="1700" dirty="0" err="1">
+                <a:solidFill>
+                  <a:srgbClr val="222A38"/>
+                </a:solidFill>
+                <a:latin typeface="Calibri"/>
+              </a:rPr>
+              <a:t>estructura</a:t>
+            </a:r>
+            <a:r>
+              <a:rPr sz="1700" dirty="0">
+                <a:solidFill>
+                  <a:srgbClr val="222A38"/>
+                </a:solidFill>
+                <a:latin typeface="Calibri"/>
+              </a:rPr>
+              <a:t> del </a:t>
+            </a:r>
+            <a:r>
+              <a:rPr sz="1700" dirty="0" err="1">
+                <a:solidFill>
+                  <a:srgbClr val="222A38"/>
+                </a:solidFill>
+                <a:latin typeface="Calibri"/>
+              </a:rPr>
+              <a:t>dato</a:t>
+            </a:r>
+            <a:r>
+              <a:rPr sz="1700" dirty="0">
+                <a:solidFill>
+                  <a:srgbClr val="222A38"/>
+                </a:solidFill>
+                <a:latin typeface="Calibri"/>
+              </a:rPr>
+              <a:t> y </a:t>
+            </a:r>
+            <a:r>
+              <a:rPr sz="1700" dirty="0" err="1">
+                <a:solidFill>
+                  <a:srgbClr val="222A38"/>
+                </a:solidFill>
+                <a:latin typeface="Calibri"/>
+              </a:rPr>
+              <a:t>patrón</a:t>
+            </a:r>
+            <a:r>
+              <a:rPr sz="1700" dirty="0">
+                <a:solidFill>
+                  <a:srgbClr val="222A38"/>
+                </a:solidFill>
+                <a:latin typeface="Calibri"/>
+              </a:rPr>
+              <a:t> de consulta (</a:t>
+            </a:r>
+            <a:r>
+              <a:rPr sz="1700" dirty="0" err="1">
+                <a:solidFill>
+                  <a:srgbClr val="222A38"/>
+                </a:solidFill>
+                <a:latin typeface="Calibri"/>
+              </a:rPr>
+              <a:t>Teorema</a:t>
+            </a:r>
+            <a:r>
+              <a:rPr sz="1700" dirty="0">
+                <a:solidFill>
+                  <a:srgbClr val="222A38"/>
+                </a:solidFill>
+                <a:latin typeface="Calibri"/>
+              </a:rPr>
+              <a:t> CAP).</a:t>
             </a:r>
           </a:p>
           <a:p>
@@ -8998,7 +8605,7 @@
               </a:spcAft>
             </a:pPr>
             <a:r>
-              <a:rPr sz="1700" b="1">
+              <a:rPr sz="1700" b="1" dirty="0">
                 <a:solidFill>
                   <a:srgbClr val="336791"/>
                 </a:solidFill>
@@ -9007,13 +8614,148 @@
               <a:t>▪  </a:t>
             </a:r>
             <a:r>
-              <a:rPr sz="1700">
-                <a:solidFill>
-                  <a:srgbClr val="222A38"/>
-                </a:solidFill>
-                <a:latin typeface="Calibri"/>
-              </a:rPr>
-              <a:t>Normalización mínimo 3FN: elimina dependencias parciales y transitivas de la tabla orders_full.</a:t>
+              <a:rPr sz="1700" dirty="0" err="1">
+                <a:solidFill>
+                  <a:srgbClr val="222A38"/>
+                </a:solidFill>
+                <a:latin typeface="Calibri"/>
+              </a:rPr>
+              <a:t>Normalización</a:t>
+            </a:r>
+            <a:r>
+              <a:rPr sz="1700" dirty="0">
+                <a:solidFill>
+                  <a:srgbClr val="222A38"/>
+                </a:solidFill>
+                <a:latin typeface="Calibri"/>
+              </a:rPr>
+              <a:t> </a:t>
+            </a:r>
+            <a:r>
+              <a:rPr sz="1700" dirty="0" err="1">
+                <a:solidFill>
+                  <a:srgbClr val="222A38"/>
+                </a:solidFill>
+                <a:latin typeface="Calibri"/>
+              </a:rPr>
+              <a:t>mínimo</a:t>
+            </a:r>
+            <a:r>
+              <a:rPr sz="1700" dirty="0">
+                <a:solidFill>
+                  <a:srgbClr val="222A38"/>
+                </a:solidFill>
+                <a:latin typeface="Calibri"/>
+              </a:rPr>
+              <a:t> 3FN: </a:t>
+            </a:r>
+            <a:r>
+              <a:rPr sz="1700" dirty="0" err="1">
+                <a:solidFill>
+                  <a:srgbClr val="222A38"/>
+                </a:solidFill>
+                <a:latin typeface="Calibri"/>
+              </a:rPr>
+              <a:t>elimina</a:t>
+            </a:r>
+            <a:r>
+              <a:rPr sz="1700" dirty="0">
+                <a:solidFill>
+                  <a:srgbClr val="222A38"/>
+                </a:solidFill>
+                <a:latin typeface="Calibri"/>
+              </a:rPr>
+              <a:t> </a:t>
+            </a:r>
+            <a:r>
+              <a:rPr sz="1700" dirty="0" err="1">
+                <a:solidFill>
+                  <a:srgbClr val="222A38"/>
+                </a:solidFill>
+                <a:latin typeface="Calibri"/>
+              </a:rPr>
+              <a:t>dependencias</a:t>
+            </a:r>
+            <a:r>
+              <a:rPr sz="1700" dirty="0">
+                <a:solidFill>
+                  <a:srgbClr val="222A38"/>
+                </a:solidFill>
+                <a:latin typeface="Calibri"/>
+              </a:rPr>
+              <a:t> </a:t>
+            </a:r>
+            <a:r>
+              <a:rPr sz="1700" dirty="0" err="1">
+                <a:solidFill>
+                  <a:srgbClr val="222A38"/>
+                </a:solidFill>
+                <a:latin typeface="Calibri"/>
+              </a:rPr>
+              <a:t>parciales</a:t>
+            </a:r>
+            <a:r>
+              <a:rPr sz="1700" dirty="0">
+                <a:solidFill>
+                  <a:srgbClr val="222A38"/>
+                </a:solidFill>
+                <a:latin typeface="Calibri"/>
+              </a:rPr>
+              <a:t> y </a:t>
+            </a:r>
+            <a:r>
+              <a:rPr sz="1700" dirty="0" err="1">
+                <a:solidFill>
+                  <a:srgbClr val="222A38"/>
+                </a:solidFill>
+                <a:latin typeface="Calibri"/>
+              </a:rPr>
+              <a:t>transitivas</a:t>
+            </a:r>
+            <a:r>
+              <a:rPr sz="1700" dirty="0">
+                <a:solidFill>
+                  <a:srgbClr val="222A38"/>
+                </a:solidFill>
+                <a:latin typeface="Calibri"/>
+              </a:rPr>
+              <a:t> de la </a:t>
+            </a:r>
+            <a:r>
+              <a:rPr sz="1700" dirty="0" err="1">
+                <a:solidFill>
+                  <a:srgbClr val="222A38"/>
+                </a:solidFill>
+                <a:latin typeface="Calibri"/>
+              </a:rPr>
+              <a:t>tabla</a:t>
+            </a:r>
+            <a:r>
+              <a:rPr sz="1700" dirty="0">
+                <a:solidFill>
+                  <a:srgbClr val="222A38"/>
+                </a:solidFill>
+                <a:latin typeface="Calibri"/>
+              </a:rPr>
+              <a:t> </a:t>
+            </a:r>
+            <a:r>
+              <a:rPr sz="1700" dirty="0" err="1">
+                <a:solidFill>
+                  <a:srgbClr val="222A38"/>
+                </a:solidFill>
+                <a:latin typeface="Calibri"/>
+              </a:rPr>
+              <a:t>orders_full</a:t>
+            </a:r>
+            <a:r>
+              <a:rPr sz="1700" dirty="0">
+                <a:solidFill>
+                  <a:srgbClr val="222A38"/>
+                </a:solidFill>
+                <a:latin typeface="Calibri"/>
+              </a:rPr>
+              <a:t>.</a:t>
             </a:r>
           </a:p>
           <a:p>
@@ -9023,7 +8765,7 @@
               </a:spcAft>
             </a:pPr>
             <a:r>
-              <a:rPr sz="1700" b="1">
+              <a:rPr sz="1700" b="1" dirty="0">
                 <a:solidFill>
                   <a:srgbClr val="336791"/>
                 </a:solidFill>
@@ -9032,13 +8774,112 @@
               <a:t>▪  </a:t>
             </a:r>
             <a:r>
-              <a:rPr sz="1700">
-                <a:solidFill>
-                  <a:srgbClr val="222A38"/>
-                </a:solidFill>
-                <a:latin typeface="Calibri"/>
-              </a:rPr>
-              <a:t>Tipos avanzados de PostgreSQL (JSONB, arrays, rangos) donde la estructura variable lo justifica.</a:t>
+              <a:rPr sz="1700" dirty="0" err="1">
+                <a:solidFill>
+                  <a:srgbClr val="222A38"/>
+                </a:solidFill>
+                <a:latin typeface="Calibri"/>
+              </a:rPr>
+              <a:t>Tipos</a:t>
+            </a:r>
+            <a:r>
+              <a:rPr sz="1700" dirty="0">
+                <a:solidFill>
+                  <a:srgbClr val="222A38"/>
+                </a:solidFill>
+                <a:latin typeface="Calibri"/>
+              </a:rPr>
+              <a:t> </a:t>
+            </a:r>
+            <a:r>
+              <a:rPr sz="1700" dirty="0" err="1">
+                <a:solidFill>
+                  <a:srgbClr val="222A38"/>
+                </a:solidFill>
+                <a:latin typeface="Calibri"/>
+              </a:rPr>
+              <a:t>avanzados</a:t>
+            </a:r>
+            <a:r>
+              <a:rPr sz="1700" dirty="0">
+                <a:solidFill>
+                  <a:srgbClr val="222A38"/>
+                </a:solidFill>
+                <a:latin typeface="Calibri"/>
+              </a:rPr>
+              <a:t> de PostgreSQL (JSONB, arrays, </a:t>
+            </a:r>
+            <a:r>
+              <a:rPr sz="1700" dirty="0" err="1">
+                <a:solidFill>
+                  <a:srgbClr val="222A38"/>
+                </a:solidFill>
+                <a:latin typeface="Calibri"/>
+              </a:rPr>
+              <a:t>rangos</a:t>
+            </a:r>
+            <a:r>
+              <a:rPr sz="1700" dirty="0">
+                <a:solidFill>
+                  <a:srgbClr val="222A38"/>
+                </a:solidFill>
+                <a:latin typeface="Calibri"/>
+              </a:rPr>
+              <a:t>) </a:t>
+            </a:r>
+            <a:r>
+              <a:rPr sz="1700" dirty="0" err="1">
+                <a:solidFill>
+                  <a:srgbClr val="222A38"/>
+                </a:solidFill>
+                <a:latin typeface="Calibri"/>
+              </a:rPr>
+              <a:t>donde</a:t>
+            </a:r>
+            <a:r>
+              <a:rPr sz="1700" dirty="0">
+                <a:solidFill>
+                  <a:srgbClr val="222A38"/>
+                </a:solidFill>
+                <a:latin typeface="Calibri"/>
+              </a:rPr>
+              <a:t> la </a:t>
+            </a:r>
+            <a:r>
+              <a:rPr sz="1700" dirty="0" err="1">
+                <a:solidFill>
+                  <a:srgbClr val="222A38"/>
+                </a:solidFill>
+                <a:latin typeface="Calibri"/>
+              </a:rPr>
+              <a:t>estructura</a:t>
+            </a:r>
+            <a:r>
+              <a:rPr sz="1700" dirty="0">
+                <a:solidFill>
+                  <a:srgbClr val="222A38"/>
+                </a:solidFill>
+                <a:latin typeface="Calibri"/>
+              </a:rPr>
+              <a:t> variable lo </a:t>
+            </a:r>
+            <a:r>
+              <a:rPr sz="1700" dirty="0" err="1">
+                <a:solidFill>
+                  <a:srgbClr val="222A38"/>
+                </a:solidFill>
+                <a:latin typeface="Calibri"/>
+              </a:rPr>
+              <a:t>justifica</a:t>
+            </a:r>
+            <a:r>
+              <a:rPr sz="1700" dirty="0">
+                <a:solidFill>
+                  <a:srgbClr val="222A38"/>
+                </a:solidFill>
+                <a:latin typeface="Calibri"/>
+              </a:rPr>
+              <a:t>.</a:t>
             </a:r>
           </a:p>
           <a:p>
@@ -9048,7 +8889,7 @@
               </a:spcAft>
             </a:pPr>
             <a:r>
-              <a:rPr sz="1700" b="1">
+              <a:rPr sz="1700" b="1" dirty="0">
                 <a:solidFill>
                   <a:srgbClr val="336791"/>
                 </a:solidFill>
@@ -9057,13 +8898,139 @@
               <a:t>▪  </a:t>
             </a:r>
             <a:r>
-              <a:rPr sz="1700">
-                <a:solidFill>
-                  <a:srgbClr val="222A38"/>
-                </a:solidFill>
-                <a:latin typeface="Calibri"/>
-              </a:rPr>
-              <a:t>Clave compartida product_id reconciliada por lotes en Colab (no hay Change Streams en M0).</a:t>
+              <a:rPr sz="1700" dirty="0">
+                <a:solidFill>
+                  <a:srgbClr val="222A38"/>
+                </a:solidFill>
+                <a:latin typeface="Calibri"/>
+              </a:rPr>
+              <a:t>Clave </a:t>
+            </a:r>
+            <a:r>
+              <a:rPr sz="1700" dirty="0" err="1">
+                <a:solidFill>
+                  <a:srgbClr val="222A38"/>
+                </a:solidFill>
+                <a:latin typeface="Calibri"/>
+              </a:rPr>
+              <a:t>compartida</a:t>
+            </a:r>
+            <a:r>
+              <a:rPr sz="1700" dirty="0">
+                <a:solidFill>
+                  <a:srgbClr val="222A38"/>
+                </a:solidFill>
+                <a:latin typeface="Calibri"/>
+              </a:rPr>
+              <a:t> </a:t>
+            </a:r>
+            <a:r>
+              <a:rPr sz="1700" dirty="0" err="1">
+                <a:solidFill>
+                  <a:srgbClr val="222A38"/>
+                </a:solidFill>
+                <a:latin typeface="Calibri"/>
+              </a:rPr>
+              <a:t>product_id</a:t>
+            </a:r>
+            <a:r>
+              <a:rPr sz="1700" dirty="0">
+                <a:solidFill>
+                  <a:srgbClr val="222A38"/>
+                </a:solidFill>
+                <a:latin typeface="Calibri"/>
+              </a:rPr>
+              <a:t> </a:t>
+            </a:r>
+            <a:r>
+              <a:rPr sz="1700" dirty="0" err="1">
+                <a:solidFill>
+                  <a:srgbClr val="222A38"/>
+                </a:solidFill>
+                <a:latin typeface="Calibri"/>
+              </a:rPr>
+              <a:t>reconciliada</a:t>
+            </a:r>
+            <a:r>
+              <a:rPr sz="1700" dirty="0">
+                <a:solidFill>
+                  <a:srgbClr val="222A38"/>
+                </a:solidFill>
+                <a:latin typeface="Calibri"/>
+              </a:rPr>
+              <a:t> por </a:t>
+            </a:r>
+            <a:r>
+              <a:rPr sz="1700" dirty="0" err="1">
+                <a:solidFill>
+                  <a:srgbClr val="222A38"/>
+                </a:solidFill>
+                <a:latin typeface="Calibri"/>
+              </a:rPr>
+              <a:t>lotes</a:t>
+            </a:r>
+            <a:r>
+              <a:rPr sz="1700" dirty="0">
+                <a:solidFill>
+                  <a:srgbClr val="222A38"/>
+                </a:solidFill>
+                <a:latin typeface="Calibri"/>
+              </a:rPr>
+              <a:t> </a:t>
+            </a:r>
+            <a:r>
+              <a:rPr sz="1700" dirty="0" err="1">
+                <a:solidFill>
+                  <a:srgbClr val="222A38"/>
+                </a:solidFill>
+                <a:latin typeface="Calibri"/>
+              </a:rPr>
+              <a:t>en</a:t>
+            </a:r>
+            <a:r>
+              <a:rPr sz="1700" dirty="0">
+                <a:solidFill>
+                  <a:srgbClr val="222A38"/>
+                </a:solidFill>
+                <a:latin typeface="Calibri"/>
+              </a:rPr>
+              <a:t> </a:t>
+            </a:r>
+            <a:r>
+              <a:rPr sz="1700" dirty="0" err="1">
+                <a:solidFill>
+                  <a:srgbClr val="222A38"/>
+                </a:solidFill>
+                <a:latin typeface="Calibri"/>
+              </a:rPr>
+              <a:t>Colab</a:t>
+            </a:r>
+            <a:r>
+              <a:rPr sz="1700" dirty="0">
+                <a:solidFill>
+                  <a:srgbClr val="222A38"/>
+                </a:solidFill>
+                <a:latin typeface="Calibri"/>
+              </a:rPr>
+              <a:t> (no hay Change Streams </a:t>
+            </a:r>
+            <a:r>
+              <a:rPr sz="1700" dirty="0" err="1">
+                <a:solidFill>
+                  <a:srgbClr val="222A38"/>
+                </a:solidFill>
+                <a:latin typeface="Calibri"/>
+              </a:rPr>
+              <a:t>en</a:t>
+            </a:r>
+            <a:r>
+              <a:rPr sz="1700" dirty="0">
+                <a:solidFill>
+                  <a:srgbClr val="222A38"/>
+                </a:solidFill>
+                <a:latin typeface="Calibri"/>
+              </a:rPr>
+              <a:t> M0).</a:t>
             </a:r>
           </a:p>
           <a:p>
@@ -9073,7 +9040,7 @@
               </a:spcAft>
             </a:pPr>
             <a:r>
-              <a:rPr sz="1700" b="1">
+              <a:rPr sz="1700" b="1" dirty="0">
                 <a:solidFill>
                   <a:srgbClr val="336791"/>
                 </a:solidFill>
@@ -9082,13 +9049,148 @@
               <a:t>▪  </a:t>
             </a:r>
             <a:r>
-              <a:rPr sz="1700">
-                <a:solidFill>
-                  <a:srgbClr val="222A38"/>
-                </a:solidFill>
-                <a:latin typeface="Calibri"/>
-              </a:rPr>
-              <a:t>Prioridades: integridad transaccional, flexibilidad del catálogo y escalabilidad, dentro de plataformas gratuitas.</a:t>
+              <a:rPr sz="1700" dirty="0" err="1">
+                <a:solidFill>
+                  <a:srgbClr val="222A38"/>
+                </a:solidFill>
+                <a:latin typeface="Calibri"/>
+              </a:rPr>
+              <a:t>Prioridades</a:t>
+            </a:r>
+            <a:r>
+              <a:rPr sz="1700" dirty="0">
+                <a:solidFill>
+                  <a:srgbClr val="222A38"/>
+                </a:solidFill>
+                <a:latin typeface="Calibri"/>
+              </a:rPr>
+              <a:t>: </a:t>
+            </a:r>
+            <a:r>
+              <a:rPr sz="1700" dirty="0" err="1">
+                <a:solidFill>
+                  <a:srgbClr val="222A38"/>
+                </a:solidFill>
+                <a:latin typeface="Calibri"/>
+              </a:rPr>
+              <a:t>integridad</a:t>
+            </a:r>
+            <a:r>
+              <a:rPr sz="1700" dirty="0">
+                <a:solidFill>
+                  <a:srgbClr val="222A38"/>
+                </a:solidFill>
+                <a:latin typeface="Calibri"/>
+              </a:rPr>
+              <a:t> </a:t>
+            </a:r>
+            <a:r>
+              <a:rPr sz="1700" dirty="0" err="1">
+                <a:solidFill>
+                  <a:srgbClr val="222A38"/>
+                </a:solidFill>
+                <a:latin typeface="Calibri"/>
+              </a:rPr>
+              <a:t>transaccional</a:t>
+            </a:r>
+            <a:r>
+              <a:rPr sz="1700" dirty="0">
+                <a:solidFill>
+                  <a:srgbClr val="222A38"/>
+                </a:solidFill>
+                <a:latin typeface="Calibri"/>
+              </a:rPr>
+              <a:t>, </a:t>
+            </a:r>
+            <a:r>
+              <a:rPr sz="1700" dirty="0" err="1">
+                <a:solidFill>
+                  <a:srgbClr val="222A38"/>
+                </a:solidFill>
+                <a:latin typeface="Calibri"/>
+              </a:rPr>
+              <a:t>flexibilidad</a:t>
+            </a:r>
+            <a:r>
+              <a:rPr sz="1700" dirty="0">
+                <a:solidFill>
+                  <a:srgbClr val="222A38"/>
+                </a:solidFill>
+                <a:latin typeface="Calibri"/>
+              </a:rPr>
+              <a:t> del </a:t>
+            </a:r>
+            <a:r>
+              <a:rPr sz="1700" dirty="0" err="1">
+                <a:solidFill>
+                  <a:srgbClr val="222A38"/>
+                </a:solidFill>
+                <a:latin typeface="Calibri"/>
+              </a:rPr>
+              <a:t>catálogo</a:t>
+            </a:r>
+            <a:r>
+              <a:rPr sz="1700" dirty="0">
+                <a:solidFill>
+                  <a:srgbClr val="222A38"/>
+                </a:solidFill>
+                <a:latin typeface="Calibri"/>
+              </a:rPr>
+              <a:t> y </a:t>
+            </a:r>
+            <a:r>
+              <a:rPr sz="1700" dirty="0" err="1">
+                <a:solidFill>
+                  <a:srgbClr val="222A38"/>
+                </a:solidFill>
+                <a:latin typeface="Calibri"/>
+              </a:rPr>
+              <a:t>escalabilidad</a:t>
+            </a:r>
+            <a:r>
+              <a:rPr sz="1700" dirty="0">
+                <a:solidFill>
+                  <a:srgbClr val="222A38"/>
+                </a:solidFill>
+                <a:latin typeface="Calibri"/>
+              </a:rPr>
+              <a:t>, dentro de </a:t>
+            </a:r>
+            <a:r>
+              <a:rPr sz="1700" dirty="0" err="1">
+                <a:solidFill>
+                  <a:srgbClr val="222A38"/>
+                </a:solidFill>
+                <a:latin typeface="Calibri"/>
+              </a:rPr>
+              <a:t>plataformas</a:t>
+            </a:r>
+            <a:r>
+              <a:rPr sz="1700" dirty="0">
+                <a:solidFill>
+                  <a:srgbClr val="222A38"/>
+                </a:solidFill>
+                <a:latin typeface="Calibri"/>
+              </a:rPr>
+              <a:t> </a:t>
+            </a:r>
+            <a:r>
+              <a:rPr sz="1700" dirty="0" err="1">
+                <a:solidFill>
+                  <a:srgbClr val="222A38"/>
+                </a:solidFill>
+                <a:latin typeface="Calibri"/>
+              </a:rPr>
+              <a:t>gratuitas</a:t>
+            </a:r>
+            <a:r>
+              <a:rPr sz="1700" dirty="0">
+                <a:solidFill>
+                  <a:srgbClr val="222A38"/>
+                </a:solidFill>
+                <a:latin typeface="Calibri"/>
+              </a:rPr>
+              <a:t>.</a:t>
             </a:r>
           </a:p>
         </p:txBody>
@@ -11610,12 +11712,775 @@
           <a:chExt cx="0" cy="0"/>
         </a:xfrm>
       </p:grpSpPr>
+      <p:sp>
+        <p:nvSpPr>
+          <p:cNvPr id="2" name="Rectangle 1"/>
+          <p:cNvSpPr/>
+          <p:nvPr/>
+        </p:nvSpPr>
+        <p:spPr>
+          <a:xfrm>
+            <a:off x="0" y="0"/>
+            <a:ext cx="12191695" cy="1051560"/>
+          </a:xfrm>
+          <a:prstGeom prst="rect">
+            <a:avLst/>
+          </a:prstGeom>
+          <a:solidFill>
+            <a:srgbClr val="16284A"/>
+          </a:solidFill>
+          <a:ln>
+            <a:noFill/>
+          </a:ln>
+          <a:effectLst/>
+        </p:spPr>
+        <p:style>
+          <a:lnRef idx="1">
+            <a:schemeClr val="accent1"/>
+          </a:lnRef>
+          <a:fillRef idx="3">
+            <a:schemeClr val="accent1"/>
+          </a:fillRef>
+          <a:effectRef idx="2">
+            <a:schemeClr val="accent1"/>
+          </a:effectRef>
+          <a:fontRef idx="minor">
+            <a:schemeClr val="lt1"/>
+          </a:fontRef>
+        </p:style>
+        <p:txBody>
+          <a:bodyPr rtlCol="0" anchor="ctr"/>
+          <a:lstStyle/>
+          <a:p>
+            <a:pPr algn="ctr"/>
+            <a:endParaRPr/>
+          </a:p>
+        </p:txBody>
+      </p:sp>
+      <p:sp>
+        <p:nvSpPr>
+          <p:cNvPr id="3" name="Rectangle 2"/>
+          <p:cNvSpPr/>
+          <p:nvPr/>
+        </p:nvSpPr>
+        <p:spPr>
+          <a:xfrm>
+            <a:off x="0" y="1051560"/>
+            <a:ext cx="12191695" cy="54864"/>
+          </a:xfrm>
+          <a:prstGeom prst="rect">
+            <a:avLst/>
+          </a:prstGeom>
+          <a:solidFill>
+            <a:srgbClr val="13AA52"/>
+          </a:solidFill>
+          <a:ln>
+            <a:noFill/>
+          </a:ln>
+          <a:effectLst/>
+        </p:spPr>
+        <p:style>
+          <a:lnRef idx="1">
+            <a:schemeClr val="accent1"/>
+          </a:lnRef>
+          <a:fillRef idx="3">
+            <a:schemeClr val="accent1"/>
+          </a:fillRef>
+          <a:effectRef idx="2">
+            <a:schemeClr val="accent1"/>
+          </a:effectRef>
+          <a:fontRef idx="minor">
+            <a:schemeClr val="lt1"/>
+          </a:fontRef>
+        </p:style>
+        <p:txBody>
+          <a:bodyPr rtlCol="0" anchor="ctr"/>
+          <a:lstStyle/>
+          <a:p>
+            <a:pPr algn="ctr"/>
+            <a:endParaRPr/>
+          </a:p>
+        </p:txBody>
+      </p:sp>
+      <p:sp>
+        <p:nvSpPr>
+          <p:cNvPr id="4" name="Rectangle 3"/>
+          <p:cNvSpPr/>
+          <p:nvPr/>
+        </p:nvSpPr>
+        <p:spPr>
+          <a:xfrm>
+            <a:off x="0" y="1051560"/>
+            <a:ext cx="3840480" cy="54864"/>
+          </a:xfrm>
+          <a:prstGeom prst="rect">
+            <a:avLst/>
+          </a:prstGeom>
+          <a:solidFill>
+            <a:srgbClr val="336791"/>
+          </a:solidFill>
+          <a:ln>
+            <a:noFill/>
+          </a:ln>
+          <a:effectLst/>
+        </p:spPr>
+        <p:style>
+          <a:lnRef idx="1">
+            <a:schemeClr val="accent1"/>
+          </a:lnRef>
+          <a:fillRef idx="3">
+            <a:schemeClr val="accent1"/>
+          </a:fillRef>
+          <a:effectRef idx="2">
+            <a:schemeClr val="accent1"/>
+          </a:effectRef>
+          <a:fontRef idx="minor">
+            <a:schemeClr val="lt1"/>
+          </a:fontRef>
+        </p:style>
+        <p:txBody>
+          <a:bodyPr rtlCol="0" anchor="ctr"/>
+          <a:lstStyle/>
+          <a:p>
+            <a:pPr algn="ctr"/>
+            <a:endParaRPr/>
+          </a:p>
+        </p:txBody>
+      </p:sp>
+      <p:sp>
+        <p:nvSpPr>
+          <p:cNvPr id="5" name="TextBox 4"/>
+          <p:cNvSpPr txBox="1"/>
+          <p:nvPr/>
+        </p:nvSpPr>
+        <p:spPr>
+          <a:xfrm>
+            <a:off x="548640" y="146304"/>
+            <a:ext cx="10058400" cy="274320"/>
+          </a:xfrm>
+          <a:prstGeom prst="rect">
+            <a:avLst/>
+          </a:prstGeom>
+          <a:noFill/>
+        </p:spPr>
+        <p:txBody>
+          <a:bodyPr wrap="square" anchor="t">
+            <a:spAutoFit/>
+          </a:bodyPr>
+          <a:lstStyle/>
+          <a:p>
+            <a:pPr algn="l">
+              <a:spcBef>
+                <a:spcPts val="0"/>
+              </a:spcBef>
+              <a:spcAft>
+                <a:spcPts val="600"/>
+              </a:spcAft>
+            </a:pPr>
+            <a:r>
+              <a:rPr sz="1200" b="1">
+                <a:solidFill>
+                  <a:srgbClr val="13AA52"/>
+                </a:solidFill>
+                <a:latin typeface="Calibri"/>
+              </a:rPr>
+              <a:t>4 · REQUISITOS</a:t>
+            </a:r>
+          </a:p>
+        </p:txBody>
+      </p:sp>
+      <p:sp>
+        <p:nvSpPr>
+          <p:cNvPr id="6" name="TextBox 5"/>
+          <p:cNvSpPr txBox="1"/>
+          <p:nvPr/>
+        </p:nvSpPr>
+        <p:spPr>
+          <a:xfrm>
+            <a:off x="548640" y="365760"/>
+            <a:ext cx="11064240" cy="640080"/>
+          </a:xfrm>
+          <a:prstGeom prst="rect">
+            <a:avLst/>
+          </a:prstGeom>
+          <a:noFill/>
+        </p:spPr>
+        <p:txBody>
+          <a:bodyPr wrap="square" anchor="ctr">
+            <a:spAutoFit/>
+          </a:bodyPr>
+          <a:lstStyle/>
+          <a:p>
+            <a:pPr algn="l">
+              <a:spcBef>
+                <a:spcPts val="0"/>
+              </a:spcBef>
+              <a:spcAft>
+                <a:spcPts val="600"/>
+              </a:spcAft>
+            </a:pPr>
+            <a:r>
+              <a:rPr sz="2600" b="1">
+                <a:solidFill>
+                  <a:srgbClr val="FFFFFF"/>
+                </a:solidFill>
+                <a:latin typeface="Calibri"/>
+              </a:rPr>
+              <a:t>Análisis de requisitos</a:t>
+            </a:r>
+          </a:p>
+        </p:txBody>
+      </p:sp>
+      <p:sp>
+        <p:nvSpPr>
+          <p:cNvPr id="7" name="Rectangle 6"/>
+          <p:cNvSpPr/>
+          <p:nvPr/>
+        </p:nvSpPr>
+        <p:spPr>
+          <a:xfrm>
+            <a:off x="0" y="6537960"/>
+            <a:ext cx="12191695" cy="320040"/>
+          </a:xfrm>
+          <a:prstGeom prst="rect">
+            <a:avLst/>
+          </a:prstGeom>
+          <a:solidFill>
+            <a:srgbClr val="F4F6F9"/>
+          </a:solidFill>
+          <a:ln>
+            <a:noFill/>
+          </a:ln>
+          <a:effectLst/>
+        </p:spPr>
+        <p:style>
+          <a:lnRef idx="1">
+            <a:schemeClr val="accent1"/>
+          </a:lnRef>
+          <a:fillRef idx="3">
+            <a:schemeClr val="accent1"/>
+          </a:fillRef>
+          <a:effectRef idx="2">
+            <a:schemeClr val="accent1"/>
+          </a:effectRef>
+          <a:fontRef idx="minor">
+            <a:schemeClr val="lt1"/>
+          </a:fontRef>
+        </p:style>
+        <p:txBody>
+          <a:bodyPr rtlCol="0" anchor="ctr"/>
+          <a:lstStyle/>
+          <a:p>
+            <a:pPr algn="ctr"/>
+            <a:endParaRPr/>
+          </a:p>
+        </p:txBody>
+      </p:sp>
+      <p:sp>
+        <p:nvSpPr>
+          <p:cNvPr id="8" name="TextBox 7"/>
+          <p:cNvSpPr txBox="1"/>
+          <p:nvPr/>
+        </p:nvSpPr>
+        <p:spPr>
+          <a:xfrm>
+            <a:off x="548640" y="6528816"/>
+            <a:ext cx="8229600" cy="292608"/>
+          </a:xfrm>
+          <a:prstGeom prst="rect">
+            <a:avLst/>
+          </a:prstGeom>
+          <a:noFill/>
+        </p:spPr>
+        <p:txBody>
+          <a:bodyPr wrap="square" anchor="ctr">
+            <a:spAutoFit/>
+          </a:bodyPr>
+          <a:lstStyle/>
+          <a:p>
+            <a:pPr algn="l">
+              <a:spcBef>
+                <a:spcPts val="0"/>
+              </a:spcBef>
+              <a:spcAft>
+                <a:spcPts val="600"/>
+              </a:spcAft>
+            </a:pPr>
+            <a:r>
+              <a:rPr sz="900" b="0">
+                <a:solidFill>
+                  <a:srgbClr val="555F6E"/>
+                </a:solidFill>
+                <a:latin typeface="Calibri"/>
+              </a:rPr>
+              <a:t>Ecommify · Arquitectura Híbrida PostgreSQL + MongoDB</a:t>
+            </a:r>
+          </a:p>
+        </p:txBody>
+      </p:sp>
+      <p:sp>
+        <p:nvSpPr>
+          <p:cNvPr id="9" name="TextBox 8"/>
+          <p:cNvSpPr txBox="1"/>
+          <p:nvPr/>
+        </p:nvSpPr>
+        <p:spPr>
+          <a:xfrm>
+            <a:off x="11002975" y="6528816"/>
+            <a:ext cx="822960" cy="292608"/>
+          </a:xfrm>
+          <a:prstGeom prst="rect">
+            <a:avLst/>
+          </a:prstGeom>
+          <a:noFill/>
+        </p:spPr>
+        <p:txBody>
+          <a:bodyPr wrap="square" anchor="ctr">
+            <a:spAutoFit/>
+          </a:bodyPr>
+          <a:lstStyle/>
+          <a:p>
+            <a:pPr algn="r">
+              <a:spcBef>
+                <a:spcPts val="0"/>
+              </a:spcBef>
+              <a:spcAft>
+                <a:spcPts val="600"/>
+              </a:spcAft>
+            </a:pPr>
+            <a:r>
+              <a:rPr sz="900" b="1">
+                <a:solidFill>
+                  <a:srgbClr val="555F6E"/>
+                </a:solidFill>
+                <a:latin typeface="Calibri"/>
+              </a:rPr>
+              <a:t>5</a:t>
+            </a:r>
+          </a:p>
+        </p:txBody>
+      </p:sp>
+      <p:sp>
+        <p:nvSpPr>
+          <p:cNvPr id="10" name="Rectangle 9"/>
+          <p:cNvSpPr/>
+          <p:nvPr/>
+        </p:nvSpPr>
+        <p:spPr>
+          <a:xfrm>
+            <a:off x="640080" y="1417320"/>
+            <a:ext cx="5349240" cy="502920"/>
+          </a:xfrm>
+          <a:prstGeom prst="rect">
+            <a:avLst/>
+          </a:prstGeom>
+          <a:solidFill>
+            <a:srgbClr val="336791"/>
+          </a:solidFill>
+          <a:ln>
+            <a:noFill/>
+          </a:ln>
+          <a:effectLst/>
+        </p:spPr>
+        <p:style>
+          <a:lnRef idx="1">
+            <a:schemeClr val="accent1"/>
+          </a:lnRef>
+          <a:fillRef idx="3">
+            <a:schemeClr val="accent1"/>
+          </a:fillRef>
+          <a:effectRef idx="2">
+            <a:schemeClr val="accent1"/>
+          </a:effectRef>
+          <a:fontRef idx="minor">
+            <a:schemeClr val="lt1"/>
+          </a:fontRef>
+        </p:style>
+        <p:txBody>
+          <a:bodyPr rtlCol="0" anchor="ctr"/>
+          <a:lstStyle/>
+          <a:p>
+            <a:pPr algn="ctr"/>
+            <a:endParaRPr/>
+          </a:p>
+        </p:txBody>
+      </p:sp>
+      <p:sp>
+        <p:nvSpPr>
+          <p:cNvPr id="11" name="TextBox 10"/>
+          <p:cNvSpPr txBox="1"/>
+          <p:nvPr/>
+        </p:nvSpPr>
+        <p:spPr>
+          <a:xfrm>
+            <a:off x="822960" y="1435608"/>
+            <a:ext cx="5029200" cy="457200"/>
+          </a:xfrm>
+          <a:prstGeom prst="rect">
+            <a:avLst/>
+          </a:prstGeom>
+          <a:noFill/>
+        </p:spPr>
+        <p:txBody>
+          <a:bodyPr wrap="square" anchor="ctr">
+            <a:spAutoFit/>
+          </a:bodyPr>
+          <a:lstStyle/>
+          <a:p>
+            <a:pPr algn="l">
+              <a:spcBef>
+                <a:spcPts val="0"/>
+              </a:spcBef>
+              <a:spcAft>
+                <a:spcPts val="600"/>
+              </a:spcAft>
+            </a:pPr>
+            <a:r>
+              <a:rPr sz="1600" b="1">
+                <a:solidFill>
+                  <a:srgbClr val="FFFFFF"/>
+                </a:solidFill>
+                <a:latin typeface="Calibri"/>
+              </a:rPr>
+              <a:t>Funcionales</a:t>
+            </a:r>
+          </a:p>
+        </p:txBody>
+      </p:sp>
+      <p:sp>
+        <p:nvSpPr>
+          <p:cNvPr id="12" name="TextBox 11"/>
+          <p:cNvSpPr txBox="1"/>
+          <p:nvPr/>
+        </p:nvSpPr>
+        <p:spPr>
+          <a:xfrm>
+            <a:off x="777240" y="2057400"/>
+            <a:ext cx="5120640" cy="4206240"/>
+          </a:xfrm>
+          <a:prstGeom prst="rect">
+            <a:avLst/>
+          </a:prstGeom>
+          <a:noFill/>
+        </p:spPr>
+        <p:txBody>
+          <a:bodyPr wrap="square">
+            <a:spAutoFit/>
+          </a:bodyPr>
+          <a:lstStyle/>
+          <a:p>
+            <a:pPr>
+              <a:spcAft>
+                <a:spcPts val="800"/>
+              </a:spcAft>
+            </a:pPr>
+            <a:r>
+              <a:rPr sz="1400" b="1">
+                <a:solidFill>
+                  <a:srgbClr val="336791"/>
+                </a:solidFill>
+                <a:latin typeface="Calibri"/>
+              </a:rPr>
+              <a:t>▪  </a:t>
+            </a:r>
+            <a:r>
+              <a:rPr sz="1400">
+                <a:solidFill>
+                  <a:srgbClr val="222A38"/>
+                </a:solidFill>
+                <a:latin typeface="Calibri"/>
+              </a:rPr>
+              <a:t>Gestión de órdenes: ciclo de vida, estados y fechas.</a:t>
+            </a:r>
+          </a:p>
+          <a:p>
+            <a:pPr>
+              <a:spcAft>
+                <a:spcPts val="800"/>
+              </a:spcAft>
+            </a:pPr>
+            <a:r>
+              <a:rPr sz="1400" b="1">
+                <a:solidFill>
+                  <a:srgbClr val="336791"/>
+                </a:solidFill>
+                <a:latin typeface="Calibri"/>
+              </a:rPr>
+              <a:t>▪  </a:t>
+            </a:r>
+            <a:r>
+              <a:rPr sz="1400">
+                <a:solidFill>
+                  <a:srgbClr val="222A38"/>
+                </a:solidFill>
+                <a:latin typeface="Calibri"/>
+              </a:rPr>
+              <a:t>Entidades comerciales: clientes y vendedores con geolocalización.</a:t>
+            </a:r>
+          </a:p>
+          <a:p>
+            <a:pPr>
+              <a:spcAft>
+                <a:spcPts val="800"/>
+              </a:spcAft>
+            </a:pPr>
+            <a:r>
+              <a:rPr sz="1400" b="1">
+                <a:solidFill>
+                  <a:srgbClr val="336791"/>
+                </a:solidFill>
+                <a:latin typeface="Calibri"/>
+              </a:rPr>
+              <a:t>▪  </a:t>
+            </a:r>
+            <a:r>
+              <a:rPr sz="1400">
+                <a:solidFill>
+                  <a:srgbClr val="222A38"/>
+                </a:solidFill>
+                <a:latin typeface="Calibri"/>
+              </a:rPr>
+              <a:t>Catálogo heterogéneo con traducción de categorías.</a:t>
+            </a:r>
+          </a:p>
+          <a:p>
+            <a:pPr>
+              <a:spcAft>
+                <a:spcPts val="800"/>
+              </a:spcAft>
+            </a:pPr>
+            <a:r>
+              <a:rPr sz="1400" b="1">
+                <a:solidFill>
+                  <a:srgbClr val="336791"/>
+                </a:solidFill>
+                <a:latin typeface="Calibri"/>
+              </a:rPr>
+              <a:t>▪  </a:t>
+            </a:r>
+            <a:r>
+              <a:rPr sz="1400">
+                <a:solidFill>
+                  <a:srgbClr val="222A38"/>
+                </a:solidFill>
+                <a:latin typeface="Calibri"/>
+              </a:rPr>
+              <a:t>Transacciones financieras: pagos múltiples y secuenciales.</a:t>
+            </a:r>
+          </a:p>
+          <a:p>
+            <a:pPr>
+              <a:spcAft>
+                <a:spcPts val="800"/>
+              </a:spcAft>
+            </a:pPr>
+            <a:r>
+              <a:rPr sz="1400" b="1">
+                <a:solidFill>
+                  <a:srgbClr val="336791"/>
+                </a:solidFill>
+                <a:latin typeface="Calibri"/>
+              </a:rPr>
+              <a:t>▪  </a:t>
+            </a:r>
+            <a:r>
+              <a:rPr sz="1400">
+                <a:solidFill>
+                  <a:srgbClr val="222A38"/>
+                </a:solidFill>
+                <a:latin typeface="Calibri"/>
+              </a:rPr>
+              <a:t>Retroalimentación: reseñas vinculadas a pedidos.</a:t>
+            </a:r>
+          </a:p>
+        </p:txBody>
+      </p:sp>
+      <p:sp>
+        <p:nvSpPr>
+          <p:cNvPr id="13" name="Rectangle 12"/>
+          <p:cNvSpPr/>
+          <p:nvPr/>
+        </p:nvSpPr>
+        <p:spPr>
+          <a:xfrm>
+            <a:off x="6199632" y="1417320"/>
+            <a:ext cx="5349240" cy="502920"/>
+          </a:xfrm>
+          <a:prstGeom prst="rect">
+            <a:avLst/>
+          </a:prstGeom>
+          <a:solidFill>
+            <a:srgbClr val="13AA52"/>
+          </a:solidFill>
+          <a:ln>
+            <a:noFill/>
+          </a:ln>
+          <a:effectLst/>
+        </p:spPr>
+        <p:style>
+          <a:lnRef idx="1">
+            <a:schemeClr val="accent1"/>
+          </a:lnRef>
+          <a:fillRef idx="3">
+            <a:schemeClr val="accent1"/>
+          </a:fillRef>
+          <a:effectRef idx="2">
+            <a:schemeClr val="accent1"/>
+          </a:effectRef>
+          <a:fontRef idx="minor">
+            <a:schemeClr val="lt1"/>
+          </a:fontRef>
+        </p:style>
+        <p:txBody>
+          <a:bodyPr rtlCol="0" anchor="ctr"/>
+          <a:lstStyle/>
+          <a:p>
+            <a:pPr algn="ctr"/>
+            <a:endParaRPr/>
+          </a:p>
+        </p:txBody>
+      </p:sp>
+      <p:sp>
+        <p:nvSpPr>
+          <p:cNvPr id="14" name="TextBox 13"/>
+          <p:cNvSpPr txBox="1"/>
+          <p:nvPr/>
+        </p:nvSpPr>
+        <p:spPr>
+          <a:xfrm>
+            <a:off x="6382512" y="1435608"/>
+            <a:ext cx="5029200" cy="457200"/>
+          </a:xfrm>
+          <a:prstGeom prst="rect">
+            <a:avLst/>
+          </a:prstGeom>
+          <a:noFill/>
+        </p:spPr>
+        <p:txBody>
+          <a:bodyPr wrap="square" anchor="ctr">
+            <a:spAutoFit/>
+          </a:bodyPr>
+          <a:lstStyle/>
+          <a:p>
+            <a:pPr algn="l">
+              <a:spcBef>
+                <a:spcPts val="0"/>
+              </a:spcBef>
+              <a:spcAft>
+                <a:spcPts val="600"/>
+              </a:spcAft>
+            </a:pPr>
+            <a:r>
+              <a:rPr sz="1600" b="1">
+                <a:solidFill>
+                  <a:srgbClr val="FFFFFF"/>
+                </a:solidFill>
+                <a:latin typeface="Calibri"/>
+              </a:rPr>
+              <a:t>No funcionales</a:t>
+            </a:r>
+          </a:p>
+        </p:txBody>
+      </p:sp>
+      <p:sp>
+        <p:nvSpPr>
+          <p:cNvPr id="15" name="TextBox 14"/>
+          <p:cNvSpPr txBox="1"/>
+          <p:nvPr/>
+        </p:nvSpPr>
+        <p:spPr>
+          <a:xfrm>
+            <a:off x="6336792" y="2057400"/>
+            <a:ext cx="5120640" cy="4206240"/>
+          </a:xfrm>
+          <a:prstGeom prst="rect">
+            <a:avLst/>
+          </a:prstGeom>
+          <a:noFill/>
+        </p:spPr>
+        <p:txBody>
+          <a:bodyPr wrap="square">
+            <a:spAutoFit/>
+          </a:bodyPr>
+          <a:lstStyle/>
+          <a:p>
+            <a:pPr>
+              <a:spcAft>
+                <a:spcPts val="800"/>
+              </a:spcAft>
+            </a:pPr>
+            <a:r>
+              <a:rPr sz="1400" b="1">
+                <a:solidFill>
+                  <a:srgbClr val="336791"/>
+                </a:solidFill>
+                <a:latin typeface="Calibri"/>
+              </a:rPr>
+              <a:t>▪  </a:t>
+            </a:r>
+            <a:r>
+              <a:rPr sz="1400">
+                <a:solidFill>
+                  <a:srgbClr val="222A38"/>
+                </a:solidFill>
+                <a:latin typeface="Calibri"/>
+              </a:rPr>
+              <a:t>Integridad y consistencia: normalización mínima 3FN.</a:t>
+            </a:r>
+          </a:p>
+          <a:p>
+            <a:pPr>
+              <a:spcAft>
+                <a:spcPts val="800"/>
+              </a:spcAft>
+            </a:pPr>
+            <a:r>
+              <a:rPr sz="1400" b="1">
+                <a:solidFill>
+                  <a:srgbClr val="336791"/>
+                </a:solidFill>
+                <a:latin typeface="Calibri"/>
+              </a:rPr>
+              <a:t>▪  </a:t>
+            </a:r>
+            <a:r>
+              <a:rPr sz="1400">
+                <a:solidFill>
+                  <a:srgbClr val="222A38"/>
+                </a:solidFill>
+                <a:latin typeface="Calibri"/>
+              </a:rPr>
+              <a:t>Escalabilidad de lectura (OLAP): desnormalización estratégica y vistas materializadas.</a:t>
+            </a:r>
+          </a:p>
+          <a:p>
+            <a:pPr>
+              <a:spcAft>
+                <a:spcPts val="800"/>
+              </a:spcAft>
+            </a:pPr>
+            <a:r>
+              <a:rPr sz="1400" b="1">
+                <a:solidFill>
+                  <a:srgbClr val="336791"/>
+                </a:solidFill>
+                <a:latin typeface="Calibri"/>
+              </a:rPr>
+              <a:t>▪  </a:t>
+            </a:r>
+            <a:r>
+              <a:rPr sz="1400">
+                <a:solidFill>
+                  <a:srgbClr val="222A38"/>
+                </a:solidFill>
+                <a:latin typeface="Calibri"/>
+              </a:rPr>
+              <a:t>Rendimiento en altos volúmenes: tablas estructurales de gran peso (Geolocation &gt; 1M) sin degradar el OLTP.</a:t>
+            </a:r>
+          </a:p>
+        </p:txBody>
+      </p:sp>
     </p:spTree>
-    <p:extLst>
-      <p:ext uri="{BB962C8B-B14F-4D97-AF65-F5344CB8AC3E}">
-        <p14:creationId xmlns:p14="http://schemas.microsoft.com/office/powerpoint/2010/main" val="3765560649"/>
-      </p:ext>
-    </p:extLst>
   </p:cSld>
   <p:clrMapOvr>
     <a:masterClrMapping/>
@@ -11624,799 +12489,6 @@
 </file>
 
 <file path=ppt/slides/slide7.xml><?xml version="1.0" encoding="utf-8"?>
-<p:sld xmlns:a="http://schemas.openxmlformats.org/drawingml/2006/main" xmlns:r="http://schemas.openxmlformats.org/officeDocument/2006/relationships" xmlns:p="http://schemas.openxmlformats.org/presentationml/2006/main">
-  <p:cSld>
-    <p:spTree>
-      <p:nvGrpSpPr>
-        <p:cNvPr id="1" name=""/>
-        <p:cNvGrpSpPr/>
-        <p:nvPr/>
-      </p:nvGrpSpPr>
-      <p:grpSpPr>
-        <a:xfrm>
-          <a:off x="0" y="0"/>
-          <a:ext cx="0" cy="0"/>
-          <a:chOff x="0" y="0"/>
-          <a:chExt cx="0" cy="0"/>
-        </a:xfrm>
-      </p:grpSpPr>
-      <p:sp>
-        <p:nvSpPr>
-          <p:cNvPr id="2" name="Rectangle 1"/>
-          <p:cNvSpPr/>
-          <p:nvPr/>
-        </p:nvSpPr>
-        <p:spPr>
-          <a:xfrm>
-            <a:off x="0" y="0"/>
-            <a:ext cx="12191695" cy="1051560"/>
-          </a:xfrm>
-          <a:prstGeom prst="rect">
-            <a:avLst/>
-          </a:prstGeom>
-          <a:solidFill>
-            <a:srgbClr val="16284A"/>
-          </a:solidFill>
-          <a:ln>
-            <a:noFill/>
-          </a:ln>
-          <a:effectLst/>
-        </p:spPr>
-        <p:style>
-          <a:lnRef idx="1">
-            <a:schemeClr val="accent1"/>
-          </a:lnRef>
-          <a:fillRef idx="3">
-            <a:schemeClr val="accent1"/>
-          </a:fillRef>
-          <a:effectRef idx="2">
-            <a:schemeClr val="accent1"/>
-          </a:effectRef>
-          <a:fontRef idx="minor">
-            <a:schemeClr val="lt1"/>
-          </a:fontRef>
-        </p:style>
-        <p:txBody>
-          <a:bodyPr rtlCol="0" anchor="ctr"/>
-          <a:lstStyle/>
-          <a:p>
-            <a:pPr algn="ctr"/>
-            <a:endParaRPr/>
-          </a:p>
-        </p:txBody>
-      </p:sp>
-      <p:sp>
-        <p:nvSpPr>
-          <p:cNvPr id="3" name="Rectangle 2"/>
-          <p:cNvSpPr/>
-          <p:nvPr/>
-        </p:nvSpPr>
-        <p:spPr>
-          <a:xfrm>
-            <a:off x="0" y="1051560"/>
-            <a:ext cx="12191695" cy="54864"/>
-          </a:xfrm>
-          <a:prstGeom prst="rect">
-            <a:avLst/>
-          </a:prstGeom>
-          <a:solidFill>
-            <a:srgbClr val="13AA52"/>
-          </a:solidFill>
-          <a:ln>
-            <a:noFill/>
-          </a:ln>
-          <a:effectLst/>
-        </p:spPr>
-        <p:style>
-          <a:lnRef idx="1">
-            <a:schemeClr val="accent1"/>
-          </a:lnRef>
-          <a:fillRef idx="3">
-            <a:schemeClr val="accent1"/>
-          </a:fillRef>
-          <a:effectRef idx="2">
-            <a:schemeClr val="accent1"/>
-          </a:effectRef>
-          <a:fontRef idx="minor">
-            <a:schemeClr val="lt1"/>
-          </a:fontRef>
-        </p:style>
-        <p:txBody>
-          <a:bodyPr rtlCol="0" anchor="ctr"/>
-          <a:lstStyle/>
-          <a:p>
-            <a:pPr algn="ctr"/>
-            <a:endParaRPr/>
-          </a:p>
-        </p:txBody>
-      </p:sp>
-      <p:sp>
-        <p:nvSpPr>
-          <p:cNvPr id="4" name="Rectangle 3"/>
-          <p:cNvSpPr/>
-          <p:nvPr/>
-        </p:nvSpPr>
-        <p:spPr>
-          <a:xfrm>
-            <a:off x="0" y="1051560"/>
-            <a:ext cx="3840480" cy="54864"/>
-          </a:xfrm>
-          <a:prstGeom prst="rect">
-            <a:avLst/>
-          </a:prstGeom>
-          <a:solidFill>
-            <a:srgbClr val="336791"/>
-          </a:solidFill>
-          <a:ln>
-            <a:noFill/>
-          </a:ln>
-          <a:effectLst/>
-        </p:spPr>
-        <p:style>
-          <a:lnRef idx="1">
-            <a:schemeClr val="accent1"/>
-          </a:lnRef>
-          <a:fillRef idx="3">
-            <a:schemeClr val="accent1"/>
-          </a:fillRef>
-          <a:effectRef idx="2">
-            <a:schemeClr val="accent1"/>
-          </a:effectRef>
-          <a:fontRef idx="minor">
-            <a:schemeClr val="lt1"/>
-          </a:fontRef>
-        </p:style>
-        <p:txBody>
-          <a:bodyPr rtlCol="0" anchor="ctr"/>
-          <a:lstStyle/>
-          <a:p>
-            <a:pPr algn="ctr"/>
-            <a:endParaRPr/>
-          </a:p>
-        </p:txBody>
-      </p:sp>
-      <p:sp>
-        <p:nvSpPr>
-          <p:cNvPr id="5" name="TextBox 4"/>
-          <p:cNvSpPr txBox="1"/>
-          <p:nvPr/>
-        </p:nvSpPr>
-        <p:spPr>
-          <a:xfrm>
-            <a:off x="548640" y="146304"/>
-            <a:ext cx="10058400" cy="274320"/>
-          </a:xfrm>
-          <a:prstGeom prst="rect">
-            <a:avLst/>
-          </a:prstGeom>
-          <a:noFill/>
-        </p:spPr>
-        <p:txBody>
-          <a:bodyPr wrap="square" anchor="t">
-            <a:spAutoFit/>
-          </a:bodyPr>
-          <a:lstStyle/>
-          <a:p>
-            <a:pPr algn="l">
-              <a:spcBef>
-                <a:spcPts val="0"/>
-              </a:spcBef>
-              <a:spcAft>
-                <a:spcPts val="600"/>
-              </a:spcAft>
-            </a:pPr>
-            <a:r>
-              <a:rPr sz="1200" b="1">
-                <a:solidFill>
-                  <a:srgbClr val="13AA52"/>
-                </a:solidFill>
-                <a:latin typeface="Calibri"/>
-              </a:rPr>
-              <a:t>4 · REQUISITOS</a:t>
-            </a:r>
-          </a:p>
-        </p:txBody>
-      </p:sp>
-      <p:sp>
-        <p:nvSpPr>
-          <p:cNvPr id="6" name="TextBox 5"/>
-          <p:cNvSpPr txBox="1"/>
-          <p:nvPr/>
-        </p:nvSpPr>
-        <p:spPr>
-          <a:xfrm>
-            <a:off x="548640" y="365760"/>
-            <a:ext cx="11064240" cy="640080"/>
-          </a:xfrm>
-          <a:prstGeom prst="rect">
-            <a:avLst/>
-          </a:prstGeom>
-          <a:noFill/>
-        </p:spPr>
-        <p:txBody>
-          <a:bodyPr wrap="square" anchor="ctr">
-            <a:spAutoFit/>
-          </a:bodyPr>
-          <a:lstStyle/>
-          <a:p>
-            <a:pPr algn="l">
-              <a:spcBef>
-                <a:spcPts val="0"/>
-              </a:spcBef>
-              <a:spcAft>
-                <a:spcPts val="600"/>
-              </a:spcAft>
-            </a:pPr>
-            <a:r>
-              <a:rPr sz="2600" b="1">
-                <a:solidFill>
-                  <a:srgbClr val="FFFFFF"/>
-                </a:solidFill>
-                <a:latin typeface="Calibri"/>
-              </a:rPr>
-              <a:t>Análisis de requisitos</a:t>
-            </a:r>
-          </a:p>
-        </p:txBody>
-      </p:sp>
-      <p:sp>
-        <p:nvSpPr>
-          <p:cNvPr id="7" name="Rectangle 6"/>
-          <p:cNvSpPr/>
-          <p:nvPr/>
-        </p:nvSpPr>
-        <p:spPr>
-          <a:xfrm>
-            <a:off x="0" y="6537960"/>
-            <a:ext cx="12191695" cy="320040"/>
-          </a:xfrm>
-          <a:prstGeom prst="rect">
-            <a:avLst/>
-          </a:prstGeom>
-          <a:solidFill>
-            <a:srgbClr val="F4F6F9"/>
-          </a:solidFill>
-          <a:ln>
-            <a:noFill/>
-          </a:ln>
-          <a:effectLst/>
-        </p:spPr>
-        <p:style>
-          <a:lnRef idx="1">
-            <a:schemeClr val="accent1"/>
-          </a:lnRef>
-          <a:fillRef idx="3">
-            <a:schemeClr val="accent1"/>
-          </a:fillRef>
-          <a:effectRef idx="2">
-            <a:schemeClr val="accent1"/>
-          </a:effectRef>
-          <a:fontRef idx="minor">
-            <a:schemeClr val="lt1"/>
-          </a:fontRef>
-        </p:style>
-        <p:txBody>
-          <a:bodyPr rtlCol="0" anchor="ctr"/>
-          <a:lstStyle/>
-          <a:p>
-            <a:pPr algn="ctr"/>
-            <a:endParaRPr/>
-          </a:p>
-        </p:txBody>
-      </p:sp>
-      <p:sp>
-        <p:nvSpPr>
-          <p:cNvPr id="8" name="TextBox 7"/>
-          <p:cNvSpPr txBox="1"/>
-          <p:nvPr/>
-        </p:nvSpPr>
-        <p:spPr>
-          <a:xfrm>
-            <a:off x="548640" y="6528816"/>
-            <a:ext cx="8229600" cy="292608"/>
-          </a:xfrm>
-          <a:prstGeom prst="rect">
-            <a:avLst/>
-          </a:prstGeom>
-          <a:noFill/>
-        </p:spPr>
-        <p:txBody>
-          <a:bodyPr wrap="square" anchor="ctr">
-            <a:spAutoFit/>
-          </a:bodyPr>
-          <a:lstStyle/>
-          <a:p>
-            <a:pPr algn="l">
-              <a:spcBef>
-                <a:spcPts val="0"/>
-              </a:spcBef>
-              <a:spcAft>
-                <a:spcPts val="600"/>
-              </a:spcAft>
-            </a:pPr>
-            <a:r>
-              <a:rPr sz="900" b="0">
-                <a:solidFill>
-                  <a:srgbClr val="555F6E"/>
-                </a:solidFill>
-                <a:latin typeface="Calibri"/>
-              </a:rPr>
-              <a:t>Ecommify · Arquitectura Híbrida PostgreSQL + MongoDB</a:t>
-            </a:r>
-          </a:p>
-        </p:txBody>
-      </p:sp>
-      <p:sp>
-        <p:nvSpPr>
-          <p:cNvPr id="9" name="TextBox 8"/>
-          <p:cNvSpPr txBox="1"/>
-          <p:nvPr/>
-        </p:nvSpPr>
-        <p:spPr>
-          <a:xfrm>
-            <a:off x="11002975" y="6528816"/>
-            <a:ext cx="822960" cy="292608"/>
-          </a:xfrm>
-          <a:prstGeom prst="rect">
-            <a:avLst/>
-          </a:prstGeom>
-          <a:noFill/>
-        </p:spPr>
-        <p:txBody>
-          <a:bodyPr wrap="square" anchor="ctr">
-            <a:spAutoFit/>
-          </a:bodyPr>
-          <a:lstStyle/>
-          <a:p>
-            <a:pPr algn="r">
-              <a:spcBef>
-                <a:spcPts val="0"/>
-              </a:spcBef>
-              <a:spcAft>
-                <a:spcPts val="600"/>
-              </a:spcAft>
-            </a:pPr>
-            <a:r>
-              <a:rPr sz="900" b="1">
-                <a:solidFill>
-                  <a:srgbClr val="555F6E"/>
-                </a:solidFill>
-                <a:latin typeface="Calibri"/>
-              </a:rPr>
-              <a:t>5</a:t>
-            </a:r>
-          </a:p>
-        </p:txBody>
-      </p:sp>
-      <p:sp>
-        <p:nvSpPr>
-          <p:cNvPr id="10" name="Rectangle 9"/>
-          <p:cNvSpPr/>
-          <p:nvPr/>
-        </p:nvSpPr>
-        <p:spPr>
-          <a:xfrm>
-            <a:off x="640080" y="1417320"/>
-            <a:ext cx="5349240" cy="502920"/>
-          </a:xfrm>
-          <a:prstGeom prst="rect">
-            <a:avLst/>
-          </a:prstGeom>
-          <a:solidFill>
-            <a:srgbClr val="336791"/>
-          </a:solidFill>
-          <a:ln>
-            <a:noFill/>
-          </a:ln>
-          <a:effectLst/>
-        </p:spPr>
-        <p:style>
-          <a:lnRef idx="1">
-            <a:schemeClr val="accent1"/>
-          </a:lnRef>
-          <a:fillRef idx="3">
-            <a:schemeClr val="accent1"/>
-          </a:fillRef>
-          <a:effectRef idx="2">
-            <a:schemeClr val="accent1"/>
-          </a:effectRef>
-          <a:fontRef idx="minor">
-            <a:schemeClr val="lt1"/>
-          </a:fontRef>
-        </p:style>
-        <p:txBody>
-          <a:bodyPr rtlCol="0" anchor="ctr"/>
-          <a:lstStyle/>
-          <a:p>
-            <a:pPr algn="ctr"/>
-            <a:endParaRPr/>
-          </a:p>
-        </p:txBody>
-      </p:sp>
-      <p:sp>
-        <p:nvSpPr>
-          <p:cNvPr id="11" name="TextBox 10"/>
-          <p:cNvSpPr txBox="1"/>
-          <p:nvPr/>
-        </p:nvSpPr>
-        <p:spPr>
-          <a:xfrm>
-            <a:off x="822960" y="1435608"/>
-            <a:ext cx="5029200" cy="457200"/>
-          </a:xfrm>
-          <a:prstGeom prst="rect">
-            <a:avLst/>
-          </a:prstGeom>
-          <a:noFill/>
-        </p:spPr>
-        <p:txBody>
-          <a:bodyPr wrap="square" anchor="ctr">
-            <a:spAutoFit/>
-          </a:bodyPr>
-          <a:lstStyle/>
-          <a:p>
-            <a:pPr algn="l">
-              <a:spcBef>
-                <a:spcPts val="0"/>
-              </a:spcBef>
-              <a:spcAft>
-                <a:spcPts val="600"/>
-              </a:spcAft>
-            </a:pPr>
-            <a:r>
-              <a:rPr sz="1600" b="1">
-                <a:solidFill>
-                  <a:srgbClr val="FFFFFF"/>
-                </a:solidFill>
-                <a:latin typeface="Calibri"/>
-              </a:rPr>
-              <a:t>Funcionales</a:t>
-            </a:r>
-          </a:p>
-        </p:txBody>
-      </p:sp>
-      <p:sp>
-        <p:nvSpPr>
-          <p:cNvPr id="12" name="TextBox 11"/>
-          <p:cNvSpPr txBox="1"/>
-          <p:nvPr/>
-        </p:nvSpPr>
-        <p:spPr>
-          <a:xfrm>
-            <a:off x="777240" y="2057400"/>
-            <a:ext cx="5120640" cy="4206240"/>
-          </a:xfrm>
-          <a:prstGeom prst="rect">
-            <a:avLst/>
-          </a:prstGeom>
-          <a:noFill/>
-        </p:spPr>
-        <p:txBody>
-          <a:bodyPr wrap="square">
-            <a:spAutoFit/>
-          </a:bodyPr>
-          <a:lstStyle/>
-          <a:p>
-            <a:pPr>
-              <a:spcAft>
-                <a:spcPts val="800"/>
-              </a:spcAft>
-            </a:pPr>
-            <a:r>
-              <a:rPr sz="1400" b="1">
-                <a:solidFill>
-                  <a:srgbClr val="336791"/>
-                </a:solidFill>
-                <a:latin typeface="Calibri"/>
-              </a:rPr>
-              <a:t>▪  </a:t>
-            </a:r>
-            <a:r>
-              <a:rPr sz="1400">
-                <a:solidFill>
-                  <a:srgbClr val="222A38"/>
-                </a:solidFill>
-                <a:latin typeface="Calibri"/>
-              </a:rPr>
-              <a:t>Gestión de órdenes: ciclo de vida, estados y fechas.</a:t>
-            </a:r>
-          </a:p>
-          <a:p>
-            <a:pPr>
-              <a:spcAft>
-                <a:spcPts val="800"/>
-              </a:spcAft>
-            </a:pPr>
-            <a:r>
-              <a:rPr sz="1400" b="1">
-                <a:solidFill>
-                  <a:srgbClr val="336791"/>
-                </a:solidFill>
-                <a:latin typeface="Calibri"/>
-              </a:rPr>
-              <a:t>▪  </a:t>
-            </a:r>
-            <a:r>
-              <a:rPr sz="1400">
-                <a:solidFill>
-                  <a:srgbClr val="222A38"/>
-                </a:solidFill>
-                <a:latin typeface="Calibri"/>
-              </a:rPr>
-              <a:t>Entidades comerciales: clientes y vendedores con geolocalización.</a:t>
-            </a:r>
-          </a:p>
-          <a:p>
-            <a:pPr>
-              <a:spcAft>
-                <a:spcPts val="800"/>
-              </a:spcAft>
-            </a:pPr>
-            <a:r>
-              <a:rPr sz="1400" b="1">
-                <a:solidFill>
-                  <a:srgbClr val="336791"/>
-                </a:solidFill>
-                <a:latin typeface="Calibri"/>
-              </a:rPr>
-              <a:t>▪  </a:t>
-            </a:r>
-            <a:r>
-              <a:rPr sz="1400">
-                <a:solidFill>
-                  <a:srgbClr val="222A38"/>
-                </a:solidFill>
-                <a:latin typeface="Calibri"/>
-              </a:rPr>
-              <a:t>Catálogo heterogéneo con traducción de categorías.</a:t>
-            </a:r>
-          </a:p>
-          <a:p>
-            <a:pPr>
-              <a:spcAft>
-                <a:spcPts val="800"/>
-              </a:spcAft>
-            </a:pPr>
-            <a:r>
-              <a:rPr sz="1400" b="1">
-                <a:solidFill>
-                  <a:srgbClr val="336791"/>
-                </a:solidFill>
-                <a:latin typeface="Calibri"/>
-              </a:rPr>
-              <a:t>▪  </a:t>
-            </a:r>
-            <a:r>
-              <a:rPr sz="1400">
-                <a:solidFill>
-                  <a:srgbClr val="222A38"/>
-                </a:solidFill>
-                <a:latin typeface="Calibri"/>
-              </a:rPr>
-              <a:t>Transacciones financieras: pagos múltiples y secuenciales.</a:t>
-            </a:r>
-          </a:p>
-          <a:p>
-            <a:pPr>
-              <a:spcAft>
-                <a:spcPts val="800"/>
-              </a:spcAft>
-            </a:pPr>
-            <a:r>
-              <a:rPr sz="1400" b="1">
-                <a:solidFill>
-                  <a:srgbClr val="336791"/>
-                </a:solidFill>
-                <a:latin typeface="Calibri"/>
-              </a:rPr>
-              <a:t>▪  </a:t>
-            </a:r>
-            <a:r>
-              <a:rPr sz="1400">
-                <a:solidFill>
-                  <a:srgbClr val="222A38"/>
-                </a:solidFill>
-                <a:latin typeface="Calibri"/>
-              </a:rPr>
-              <a:t>Retroalimentación: reseñas vinculadas a pedidos.</a:t>
-            </a:r>
-          </a:p>
-        </p:txBody>
-      </p:sp>
-      <p:sp>
-        <p:nvSpPr>
-          <p:cNvPr id="13" name="Rectangle 12"/>
-          <p:cNvSpPr/>
-          <p:nvPr/>
-        </p:nvSpPr>
-        <p:spPr>
-          <a:xfrm>
-            <a:off x="6199632" y="1417320"/>
-            <a:ext cx="5349240" cy="502920"/>
-          </a:xfrm>
-          <a:prstGeom prst="rect">
-            <a:avLst/>
-          </a:prstGeom>
-          <a:solidFill>
-            <a:srgbClr val="13AA52"/>
-          </a:solidFill>
-          <a:ln>
-            <a:noFill/>
-          </a:ln>
-          <a:effectLst/>
-        </p:spPr>
-        <p:style>
-          <a:lnRef idx="1">
-            <a:schemeClr val="accent1"/>
-          </a:lnRef>
-          <a:fillRef idx="3">
-            <a:schemeClr val="accent1"/>
-          </a:fillRef>
-          <a:effectRef idx="2">
-            <a:schemeClr val="accent1"/>
-          </a:effectRef>
-          <a:fontRef idx="minor">
-            <a:schemeClr val="lt1"/>
-          </a:fontRef>
-        </p:style>
-        <p:txBody>
-          <a:bodyPr rtlCol="0" anchor="ctr"/>
-          <a:lstStyle/>
-          <a:p>
-            <a:pPr algn="ctr"/>
-            <a:endParaRPr/>
-          </a:p>
-        </p:txBody>
-      </p:sp>
-      <p:sp>
-        <p:nvSpPr>
-          <p:cNvPr id="14" name="TextBox 13"/>
-          <p:cNvSpPr txBox="1"/>
-          <p:nvPr/>
-        </p:nvSpPr>
-        <p:spPr>
-          <a:xfrm>
-            <a:off x="6382512" y="1435608"/>
-            <a:ext cx="5029200" cy="457200"/>
-          </a:xfrm>
-          <a:prstGeom prst="rect">
-            <a:avLst/>
-          </a:prstGeom>
-          <a:noFill/>
-        </p:spPr>
-        <p:txBody>
-          <a:bodyPr wrap="square" anchor="ctr">
-            <a:spAutoFit/>
-          </a:bodyPr>
-          <a:lstStyle/>
-          <a:p>
-            <a:pPr algn="l">
-              <a:spcBef>
-                <a:spcPts val="0"/>
-              </a:spcBef>
-              <a:spcAft>
-                <a:spcPts val="600"/>
-              </a:spcAft>
-            </a:pPr>
-            <a:r>
-              <a:rPr sz="1600" b="1">
-                <a:solidFill>
-                  <a:srgbClr val="FFFFFF"/>
-                </a:solidFill>
-                <a:latin typeface="Calibri"/>
-              </a:rPr>
-              <a:t>No funcionales</a:t>
-            </a:r>
-          </a:p>
-        </p:txBody>
-      </p:sp>
-      <p:sp>
-        <p:nvSpPr>
-          <p:cNvPr id="15" name="TextBox 14"/>
-          <p:cNvSpPr txBox="1"/>
-          <p:nvPr/>
-        </p:nvSpPr>
-        <p:spPr>
-          <a:xfrm>
-            <a:off x="6336792" y="2057400"/>
-            <a:ext cx="5120640" cy="4206240"/>
-          </a:xfrm>
-          <a:prstGeom prst="rect">
-            <a:avLst/>
-          </a:prstGeom>
-          <a:noFill/>
-        </p:spPr>
-        <p:txBody>
-          <a:bodyPr wrap="square">
-            <a:spAutoFit/>
-          </a:bodyPr>
-          <a:lstStyle/>
-          <a:p>
-            <a:pPr>
-              <a:spcAft>
-                <a:spcPts val="800"/>
-              </a:spcAft>
-            </a:pPr>
-            <a:r>
-              <a:rPr sz="1400" b="1">
-                <a:solidFill>
-                  <a:srgbClr val="336791"/>
-                </a:solidFill>
-                <a:latin typeface="Calibri"/>
-              </a:rPr>
-              <a:t>▪  </a:t>
-            </a:r>
-            <a:r>
-              <a:rPr sz="1400">
-                <a:solidFill>
-                  <a:srgbClr val="222A38"/>
-                </a:solidFill>
-                <a:latin typeface="Calibri"/>
-              </a:rPr>
-              <a:t>Integridad y consistencia: normalización mínima 3FN.</a:t>
-            </a:r>
-          </a:p>
-          <a:p>
-            <a:pPr>
-              <a:spcAft>
-                <a:spcPts val="800"/>
-              </a:spcAft>
-            </a:pPr>
-            <a:r>
-              <a:rPr sz="1400" b="1">
-                <a:solidFill>
-                  <a:srgbClr val="336791"/>
-                </a:solidFill>
-                <a:latin typeface="Calibri"/>
-              </a:rPr>
-              <a:t>▪  </a:t>
-            </a:r>
-            <a:r>
-              <a:rPr sz="1400">
-                <a:solidFill>
-                  <a:srgbClr val="222A38"/>
-                </a:solidFill>
-                <a:latin typeface="Calibri"/>
-              </a:rPr>
-              <a:t>Escalabilidad de lectura (OLAP): desnormalización estratégica y vistas materializadas.</a:t>
-            </a:r>
-          </a:p>
-          <a:p>
-            <a:pPr>
-              <a:spcAft>
-                <a:spcPts val="800"/>
-              </a:spcAft>
-            </a:pPr>
-            <a:r>
-              <a:rPr sz="1400" b="1">
-                <a:solidFill>
-                  <a:srgbClr val="336791"/>
-                </a:solidFill>
-                <a:latin typeface="Calibri"/>
-              </a:rPr>
-              <a:t>▪  </a:t>
-            </a:r>
-            <a:r>
-              <a:rPr sz="1400">
-                <a:solidFill>
-                  <a:srgbClr val="222A38"/>
-                </a:solidFill>
-                <a:latin typeface="Calibri"/>
-              </a:rPr>
-              <a:t>Rendimiento en altos volúmenes: tablas estructurales de gran peso (Geolocation &gt; 1M) sin degradar el OLTP.</a:t>
-            </a:r>
-          </a:p>
-        </p:txBody>
-      </p:sp>
-    </p:spTree>
-  </p:cSld>
-  <p:clrMapOvr>
-    <a:masterClrMapping/>
-  </p:clrMapOvr>
-</p:sld>
-</file>
-
-<file path=ppt/slides/slide8.xml><?xml version="1.0" encoding="utf-8"?>
 <p:sld xmlns:a="http://schemas.openxmlformats.org/drawingml/2006/main" xmlns:r="http://schemas.openxmlformats.org/officeDocument/2006/relationships" xmlns:p="http://schemas.openxmlformats.org/presentationml/2006/main">
   <p:cSld>
     <p:spTree>
@@ -13546,7 +13618,7 @@
 </p:sld>
 </file>
 
-<file path=ppt/slides/slide9.xml><?xml version="1.0" encoding="utf-8"?>
+<file path=ppt/slides/slide8.xml><?xml version="1.0" encoding="utf-8"?>
 <p:sld xmlns:a="http://schemas.openxmlformats.org/drawingml/2006/main" xmlns:r="http://schemas.openxmlformats.org/officeDocument/2006/relationships" xmlns:p="http://schemas.openxmlformats.org/presentationml/2006/main">
   <p:cSld>
     <p:spTree>
@@ -14444,6 +14516,839 @@
 </p:sld>
 </file>
 
+<file path=ppt/slides/slide9.xml><?xml version="1.0" encoding="utf-8"?>
+<p:sld xmlns:a="http://schemas.openxmlformats.org/drawingml/2006/main" xmlns:r="http://schemas.openxmlformats.org/officeDocument/2006/relationships" xmlns:p="http://schemas.openxmlformats.org/presentationml/2006/main">
+  <p:cSld>
+    <p:spTree>
+      <p:nvGrpSpPr>
+        <p:cNvPr id="1" name=""/>
+        <p:cNvGrpSpPr/>
+        <p:nvPr/>
+      </p:nvGrpSpPr>
+      <p:grpSpPr>
+        <a:xfrm>
+          <a:off x="0" y="0"/>
+          <a:ext cx="0" cy="0"/>
+          <a:chOff x="0" y="0"/>
+          <a:chExt cx="0" cy="0"/>
+        </a:xfrm>
+      </p:grpSpPr>
+      <p:sp>
+        <p:nvSpPr>
+          <p:cNvPr id="2" name="Rectangle 1"/>
+          <p:cNvSpPr/>
+          <p:nvPr/>
+        </p:nvSpPr>
+        <p:spPr>
+          <a:xfrm>
+            <a:off x="0" y="0"/>
+            <a:ext cx="12191695" cy="1051560"/>
+          </a:xfrm>
+          <a:prstGeom prst="rect">
+            <a:avLst/>
+          </a:prstGeom>
+          <a:solidFill>
+            <a:srgbClr val="16284A"/>
+          </a:solidFill>
+          <a:ln>
+            <a:noFill/>
+          </a:ln>
+          <a:effectLst/>
+        </p:spPr>
+        <p:style>
+          <a:lnRef idx="1">
+            <a:schemeClr val="accent1"/>
+          </a:lnRef>
+          <a:fillRef idx="3">
+            <a:schemeClr val="accent1"/>
+          </a:fillRef>
+          <a:effectRef idx="2">
+            <a:schemeClr val="accent1"/>
+          </a:effectRef>
+          <a:fontRef idx="minor">
+            <a:schemeClr val="lt1"/>
+          </a:fontRef>
+        </p:style>
+        <p:txBody>
+          <a:bodyPr rtlCol="0" anchor="ctr"/>
+          <a:lstStyle/>
+          <a:p>
+            <a:pPr algn="ctr"/>
+            <a:endParaRPr/>
+          </a:p>
+        </p:txBody>
+      </p:sp>
+      <p:sp>
+        <p:nvSpPr>
+          <p:cNvPr id="3" name="Rectangle 2"/>
+          <p:cNvSpPr/>
+          <p:nvPr/>
+        </p:nvSpPr>
+        <p:spPr>
+          <a:xfrm>
+            <a:off x="0" y="1051560"/>
+            <a:ext cx="12191695" cy="54864"/>
+          </a:xfrm>
+          <a:prstGeom prst="rect">
+            <a:avLst/>
+          </a:prstGeom>
+          <a:solidFill>
+            <a:srgbClr val="13AA52"/>
+          </a:solidFill>
+          <a:ln>
+            <a:noFill/>
+          </a:ln>
+          <a:effectLst/>
+        </p:spPr>
+        <p:style>
+          <a:lnRef idx="1">
+            <a:schemeClr val="accent1"/>
+          </a:lnRef>
+          <a:fillRef idx="3">
+            <a:schemeClr val="accent1"/>
+          </a:fillRef>
+          <a:effectRef idx="2">
+            <a:schemeClr val="accent1"/>
+          </a:effectRef>
+          <a:fontRef idx="minor">
+            <a:schemeClr val="lt1"/>
+          </a:fontRef>
+        </p:style>
+        <p:txBody>
+          <a:bodyPr rtlCol="0" anchor="ctr"/>
+          <a:lstStyle/>
+          <a:p>
+            <a:pPr algn="ctr"/>
+            <a:endParaRPr/>
+          </a:p>
+        </p:txBody>
+      </p:sp>
+      <p:sp>
+        <p:nvSpPr>
+          <p:cNvPr id="4" name="Rectangle 3"/>
+          <p:cNvSpPr/>
+          <p:nvPr/>
+        </p:nvSpPr>
+        <p:spPr>
+          <a:xfrm>
+            <a:off x="0" y="1051560"/>
+            <a:ext cx="3840480" cy="54864"/>
+          </a:xfrm>
+          <a:prstGeom prst="rect">
+            <a:avLst/>
+          </a:prstGeom>
+          <a:solidFill>
+            <a:srgbClr val="336791"/>
+          </a:solidFill>
+          <a:ln>
+            <a:noFill/>
+          </a:ln>
+          <a:effectLst/>
+        </p:spPr>
+        <p:style>
+          <a:lnRef idx="1">
+            <a:schemeClr val="accent1"/>
+          </a:lnRef>
+          <a:fillRef idx="3">
+            <a:schemeClr val="accent1"/>
+          </a:fillRef>
+          <a:effectRef idx="2">
+            <a:schemeClr val="accent1"/>
+          </a:effectRef>
+          <a:fontRef idx="minor">
+            <a:schemeClr val="lt1"/>
+          </a:fontRef>
+        </p:style>
+        <p:txBody>
+          <a:bodyPr rtlCol="0" anchor="ctr"/>
+          <a:lstStyle/>
+          <a:p>
+            <a:pPr algn="ctr"/>
+            <a:endParaRPr/>
+          </a:p>
+        </p:txBody>
+      </p:sp>
+      <p:sp>
+        <p:nvSpPr>
+          <p:cNvPr id="5" name="TextBox 4"/>
+          <p:cNvSpPr txBox="1"/>
+          <p:nvPr/>
+        </p:nvSpPr>
+        <p:spPr>
+          <a:xfrm>
+            <a:off x="548640" y="146304"/>
+            <a:ext cx="10058400" cy="274320"/>
+          </a:xfrm>
+          <a:prstGeom prst="rect">
+            <a:avLst/>
+          </a:prstGeom>
+          <a:noFill/>
+        </p:spPr>
+        <p:txBody>
+          <a:bodyPr wrap="square" anchor="t">
+            <a:spAutoFit/>
+          </a:bodyPr>
+          <a:lstStyle/>
+          <a:p>
+            <a:pPr algn="l">
+              <a:spcBef>
+                <a:spcPts val="0"/>
+              </a:spcBef>
+              <a:spcAft>
+                <a:spcPts val="600"/>
+              </a:spcAft>
+            </a:pPr>
+            <a:r>
+              <a:rPr sz="1200" b="1">
+                <a:solidFill>
+                  <a:srgbClr val="13AA52"/>
+                </a:solidFill>
+                <a:latin typeface="Calibri"/>
+              </a:rPr>
+              <a:t>6 · POSTGRESQL</a:t>
+            </a:r>
+          </a:p>
+        </p:txBody>
+      </p:sp>
+      <p:sp>
+        <p:nvSpPr>
+          <p:cNvPr id="6" name="TextBox 5"/>
+          <p:cNvSpPr txBox="1"/>
+          <p:nvPr/>
+        </p:nvSpPr>
+        <p:spPr>
+          <a:xfrm>
+            <a:off x="548640" y="365760"/>
+            <a:ext cx="11064240" cy="640080"/>
+          </a:xfrm>
+          <a:prstGeom prst="rect">
+            <a:avLst/>
+          </a:prstGeom>
+          <a:noFill/>
+        </p:spPr>
+        <p:txBody>
+          <a:bodyPr wrap="square" anchor="ctr">
+            <a:spAutoFit/>
+          </a:bodyPr>
+          <a:lstStyle/>
+          <a:p>
+            <a:pPr algn="l">
+              <a:spcBef>
+                <a:spcPts val="0"/>
+              </a:spcBef>
+              <a:spcAft>
+                <a:spcPts val="600"/>
+              </a:spcAft>
+            </a:pPr>
+            <a:r>
+              <a:rPr sz="2600" b="1">
+                <a:solidFill>
+                  <a:srgbClr val="FFFFFF"/>
+                </a:solidFill>
+                <a:latin typeface="Calibri"/>
+              </a:rPr>
+              <a:t>Diseño lógico PostgreSQL — Normalización 3FN</a:t>
+            </a:r>
+          </a:p>
+        </p:txBody>
+      </p:sp>
+      <p:sp>
+        <p:nvSpPr>
+          <p:cNvPr id="7" name="Rectangle 6"/>
+          <p:cNvSpPr/>
+          <p:nvPr/>
+        </p:nvSpPr>
+        <p:spPr>
+          <a:xfrm>
+            <a:off x="0" y="6537960"/>
+            <a:ext cx="12191695" cy="320040"/>
+          </a:xfrm>
+          <a:prstGeom prst="rect">
+            <a:avLst/>
+          </a:prstGeom>
+          <a:solidFill>
+            <a:srgbClr val="F4F6F9"/>
+          </a:solidFill>
+          <a:ln>
+            <a:noFill/>
+          </a:ln>
+          <a:effectLst/>
+        </p:spPr>
+        <p:style>
+          <a:lnRef idx="1">
+            <a:schemeClr val="accent1"/>
+          </a:lnRef>
+          <a:fillRef idx="3">
+            <a:schemeClr val="accent1"/>
+          </a:fillRef>
+          <a:effectRef idx="2">
+            <a:schemeClr val="accent1"/>
+          </a:effectRef>
+          <a:fontRef idx="minor">
+            <a:schemeClr val="lt1"/>
+          </a:fontRef>
+        </p:style>
+        <p:txBody>
+          <a:bodyPr rtlCol="0" anchor="ctr"/>
+          <a:lstStyle/>
+          <a:p>
+            <a:pPr algn="ctr"/>
+            <a:endParaRPr/>
+          </a:p>
+        </p:txBody>
+      </p:sp>
+      <p:sp>
+        <p:nvSpPr>
+          <p:cNvPr id="8" name="TextBox 7"/>
+          <p:cNvSpPr txBox="1"/>
+          <p:nvPr/>
+        </p:nvSpPr>
+        <p:spPr>
+          <a:xfrm>
+            <a:off x="548640" y="6528816"/>
+            <a:ext cx="8229600" cy="292608"/>
+          </a:xfrm>
+          <a:prstGeom prst="rect">
+            <a:avLst/>
+          </a:prstGeom>
+          <a:noFill/>
+        </p:spPr>
+        <p:txBody>
+          <a:bodyPr wrap="square" anchor="ctr">
+            <a:spAutoFit/>
+          </a:bodyPr>
+          <a:lstStyle/>
+          <a:p>
+            <a:pPr algn="l">
+              <a:spcBef>
+                <a:spcPts val="0"/>
+              </a:spcBef>
+              <a:spcAft>
+                <a:spcPts val="600"/>
+              </a:spcAft>
+            </a:pPr>
+            <a:r>
+              <a:rPr sz="900" b="0">
+                <a:solidFill>
+                  <a:srgbClr val="555F6E"/>
+                </a:solidFill>
+                <a:latin typeface="Calibri"/>
+              </a:rPr>
+              <a:t>Ecommify · Arquitectura Híbrida PostgreSQL + MongoDB</a:t>
+            </a:r>
+          </a:p>
+        </p:txBody>
+      </p:sp>
+      <p:sp>
+        <p:nvSpPr>
+          <p:cNvPr id="9" name="TextBox 8"/>
+          <p:cNvSpPr txBox="1"/>
+          <p:nvPr/>
+        </p:nvSpPr>
+        <p:spPr>
+          <a:xfrm>
+            <a:off x="11002975" y="6528816"/>
+            <a:ext cx="822960" cy="292608"/>
+          </a:xfrm>
+          <a:prstGeom prst="rect">
+            <a:avLst/>
+          </a:prstGeom>
+          <a:noFill/>
+        </p:spPr>
+        <p:txBody>
+          <a:bodyPr wrap="square" anchor="ctr">
+            <a:spAutoFit/>
+          </a:bodyPr>
+          <a:lstStyle/>
+          <a:p>
+            <a:pPr algn="r">
+              <a:spcBef>
+                <a:spcPts val="0"/>
+              </a:spcBef>
+              <a:spcAft>
+                <a:spcPts val="600"/>
+              </a:spcAft>
+            </a:pPr>
+            <a:r>
+              <a:rPr sz="900" b="1">
+                <a:solidFill>
+                  <a:srgbClr val="555F6E"/>
+                </a:solidFill>
+                <a:latin typeface="Calibri"/>
+              </a:rPr>
+              <a:t>8</a:t>
+            </a:r>
+          </a:p>
+        </p:txBody>
+      </p:sp>
+      <p:sp>
+        <p:nvSpPr>
+          <p:cNvPr id="10" name="TextBox 9"/>
+          <p:cNvSpPr txBox="1"/>
+          <p:nvPr/>
+        </p:nvSpPr>
+        <p:spPr>
+          <a:xfrm>
+            <a:off x="640080" y="1417320"/>
+            <a:ext cx="10972800" cy="1737360"/>
+          </a:xfrm>
+          <a:prstGeom prst="rect">
+            <a:avLst/>
+          </a:prstGeom>
+          <a:noFill/>
+        </p:spPr>
+        <p:txBody>
+          <a:bodyPr wrap="square">
+            <a:spAutoFit/>
+          </a:bodyPr>
+          <a:lstStyle/>
+          <a:p>
+            <a:pPr>
+              <a:spcAft>
+                <a:spcPts val="800"/>
+              </a:spcAft>
+            </a:pPr>
+            <a:r>
+              <a:rPr sz="1700" b="1">
+                <a:solidFill>
+                  <a:srgbClr val="336791"/>
+                </a:solidFill>
+                <a:latin typeface="Calibri"/>
+              </a:rPr>
+              <a:t>▪  </a:t>
+            </a:r>
+            <a:r>
+              <a:rPr sz="1700">
+                <a:solidFill>
+                  <a:srgbClr val="222A38"/>
+                </a:solidFill>
+                <a:latin typeface="Calibri"/>
+              </a:rPr>
+              <a:t>Se parte de la tabla desnormalizada orders_full y se eliminan anomalías forma por forma:</a:t>
+            </a:r>
+          </a:p>
+          <a:p>
+            <a:pPr lvl="1">
+              <a:spcAft>
+                <a:spcPts val="800"/>
+              </a:spcAft>
+            </a:pPr>
+            <a:r>
+              <a:rPr sz="1700" b="1">
+                <a:solidFill>
+                  <a:srgbClr val="13AA52"/>
+                </a:solidFill>
+                <a:latin typeface="Calibri"/>
+              </a:rPr>
+              <a:t>–  </a:t>
+            </a:r>
+            <a:r>
+              <a:rPr sz="1600">
+                <a:solidFill>
+                  <a:srgbClr val="222A38"/>
+                </a:solidFill>
+                <a:latin typeface="Calibri"/>
+              </a:rPr>
+              <a:t>1FN: ítems y pagos múltiples → entidades Order_Items y Order_Payments (filas atómicas).</a:t>
+            </a:r>
+          </a:p>
+          <a:p>
+            <a:pPr lvl="1">
+              <a:spcAft>
+                <a:spcPts val="800"/>
+              </a:spcAft>
+            </a:pPr>
+            <a:r>
+              <a:rPr sz="1700" b="1">
+                <a:solidFill>
+                  <a:srgbClr val="13AA52"/>
+                </a:solidFill>
+                <a:latin typeface="Calibri"/>
+              </a:rPr>
+              <a:t>–  </a:t>
+            </a:r>
+            <a:r>
+              <a:rPr sz="1600">
+                <a:solidFill>
+                  <a:srgbClr val="222A38"/>
+                </a:solidFill>
+                <a:latin typeface="Calibri"/>
+              </a:rPr>
+              <a:t>2FN: atributos del producto dependientes solo de product_id → entidad Products.</a:t>
+            </a:r>
+          </a:p>
+          <a:p>
+            <a:pPr lvl="1">
+              <a:spcAft>
+                <a:spcPts val="800"/>
+              </a:spcAft>
+            </a:pPr>
+            <a:r>
+              <a:rPr sz="1700" b="1">
+                <a:solidFill>
+                  <a:srgbClr val="13AA52"/>
+                </a:solidFill>
+                <a:latin typeface="Calibri"/>
+              </a:rPr>
+              <a:t>–  </a:t>
+            </a:r>
+            <a:r>
+              <a:rPr sz="1600">
+                <a:solidFill>
+                  <a:srgbClr val="222A38"/>
+                </a:solidFill>
+                <a:latin typeface="Calibri"/>
+              </a:rPr>
+              <a:t>3FN: ciudad/estado (transitivos del zip) → Geolocation; traducción → Category_Translation.</a:t>
+            </a:r>
+          </a:p>
+        </p:txBody>
+      </p:sp>
+      <p:graphicFrame>
+        <p:nvGraphicFramePr>
+          <p:cNvPr id="11" name="Table 10"/>
+          <p:cNvGraphicFramePr>
+            <a:graphicFrameLocks noGrp="1"/>
+          </p:cNvGraphicFramePr>
+          <p:nvPr/>
+        </p:nvGraphicFramePr>
+        <p:xfrm>
+          <a:off x="640080" y="3429000"/>
+          <a:ext cx="10881360" cy="2377440"/>
+        </p:xfrm>
+        <a:graphic>
+          <a:graphicData uri="http://schemas.openxmlformats.org/drawingml/2006/table">
+            <a:tbl>
+              <a:tblPr firstRow="1" bandRow="1">
+                <a:tableStyleId>{5C22544A-7EE6-4342-B048-85BDC9FD1C3A}</a:tableStyleId>
+              </a:tblPr>
+              <a:tblGrid>
+                <a:gridCol w="1188720">
+                  <a:extLst>
+                    <a:ext uri="{9D8B030D-6E8A-4147-A177-3AD203B41FA5}">
+                      <a16:colId xmlns:a16="http://schemas.microsoft.com/office/drawing/2014/main" val="20000"/>
+                    </a:ext>
+                  </a:extLst>
+                </a:gridCol>
+                <a:gridCol w="4572000">
+                  <a:extLst>
+                    <a:ext uri="{9D8B030D-6E8A-4147-A177-3AD203B41FA5}">
+                      <a16:colId xmlns:a16="http://schemas.microsoft.com/office/drawing/2014/main" val="20001"/>
+                    </a:ext>
+                  </a:extLst>
+                </a:gridCol>
+                <a:gridCol w="5120640">
+                  <a:extLst>
+                    <a:ext uri="{9D8B030D-6E8A-4147-A177-3AD203B41FA5}">
+                      <a16:colId xmlns:a16="http://schemas.microsoft.com/office/drawing/2014/main" val="20002"/>
+                    </a:ext>
+                  </a:extLst>
+                </a:gridCol>
+              </a:tblGrid>
+              <a:tr h="594360">
+                <a:tc>
+                  <a:txBody>
+                    <a:bodyPr/>
+                    <a:lstStyle/>
+                    <a:p>
+                      <a:r>
+                        <a:rPr sz="1250" b="1">
+                          <a:solidFill>
+                            <a:srgbClr val="FFFFFF"/>
+                          </a:solidFill>
+                          <a:latin typeface="Calibri"/>
+                        </a:rPr>
+                        <a:t>Forma</a:t>
+                      </a:r>
+                    </a:p>
+                  </a:txBody>
+                  <a:tcPr marL="73152" marR="73152" marT="27432" marB="27432" anchor="ctr">
+                    <a:solidFill>
+                      <a:srgbClr val="16284A"/>
+                    </a:solidFill>
+                  </a:tcPr>
+                </a:tc>
+                <a:tc>
+                  <a:txBody>
+                    <a:bodyPr/>
+                    <a:lstStyle/>
+                    <a:p>
+                      <a:r>
+                        <a:rPr sz="1250" b="1">
+                          <a:solidFill>
+                            <a:srgbClr val="FFFFFF"/>
+                          </a:solidFill>
+                          <a:latin typeface="Calibri"/>
+                        </a:rPr>
+                        <a:t>Anomalía corregida</a:t>
+                      </a:r>
+                    </a:p>
+                  </a:txBody>
+                  <a:tcPr marL="73152" marR="73152" marT="27432" marB="27432" anchor="ctr">
+                    <a:solidFill>
+                      <a:srgbClr val="16284A"/>
+                    </a:solidFill>
+                  </a:tcPr>
+                </a:tc>
+                <a:tc>
+                  <a:txBody>
+                    <a:bodyPr/>
+                    <a:lstStyle/>
+                    <a:p>
+                      <a:r>
+                        <a:rPr sz="1250" b="1">
+                          <a:solidFill>
+                            <a:srgbClr val="FFFFFF"/>
+                          </a:solidFill>
+                          <a:latin typeface="Calibri"/>
+                        </a:rPr>
+                        <a:t>Decisión de diseño</a:t>
+                      </a:r>
+                    </a:p>
+                  </a:txBody>
+                  <a:tcPr marL="73152" marR="73152" marT="27432" marB="27432" anchor="ctr">
+                    <a:solidFill>
+                      <a:srgbClr val="16284A"/>
+                    </a:solidFill>
+                  </a:tcPr>
+                </a:tc>
+                <a:extLst>
+                  <a:ext uri="{0D108BD9-81ED-4DB2-BD59-A6C34878D82A}">
+                    <a16:rowId xmlns:a16="http://schemas.microsoft.com/office/drawing/2014/main" val="10000"/>
+                  </a:ext>
+                </a:extLst>
+              </a:tr>
+              <a:tr h="594360">
+                <a:tc>
+                  <a:txBody>
+                    <a:bodyPr/>
+                    <a:lstStyle/>
+                    <a:p>
+                      <a:r>
+                        <a:rPr sz="1200" b="0">
+                          <a:solidFill>
+                            <a:srgbClr val="222A38"/>
+                          </a:solidFill>
+                          <a:latin typeface="Calibri"/>
+                        </a:rPr>
+                        <a:t>1FN</a:t>
+                      </a:r>
+                    </a:p>
+                  </a:txBody>
+                  <a:tcPr marL="73152" marR="73152" marT="27432" marB="27432" anchor="ctr">
+                    <a:solidFill>
+                      <a:srgbClr val="FFFFFF"/>
+                    </a:solidFill>
+                  </a:tcPr>
+                </a:tc>
+                <a:tc>
+                  <a:txBody>
+                    <a:bodyPr/>
+                    <a:lstStyle/>
+                    <a:p>
+                      <a:r>
+                        <a:rPr sz="1200" b="0">
+                          <a:solidFill>
+                            <a:srgbClr val="222A38"/>
+                          </a:solidFill>
+                          <a:latin typeface="Calibri"/>
+                        </a:rPr>
+                        <a:t>Grupos repetitivos en el pedido</a:t>
+                      </a:r>
+                    </a:p>
+                  </a:txBody>
+                  <a:tcPr marL="73152" marR="73152" marT="27432" marB="27432" anchor="ctr">
+                    <a:solidFill>
+                      <a:srgbClr val="FFFFFF"/>
+                    </a:solidFill>
+                  </a:tcPr>
+                </a:tc>
+                <a:tc>
+                  <a:txBody>
+                    <a:bodyPr/>
+                    <a:lstStyle/>
+                    <a:p>
+                      <a:r>
+                        <a:rPr sz="1200" b="0">
+                          <a:solidFill>
+                            <a:srgbClr val="222A38"/>
+                          </a:solidFill>
+                          <a:latin typeface="Calibri"/>
+                        </a:rPr>
+                        <a:t>Order_Items y Order_Payments</a:t>
+                      </a:r>
+                    </a:p>
+                  </a:txBody>
+                  <a:tcPr marL="73152" marR="73152" marT="27432" marB="27432" anchor="ctr">
+                    <a:solidFill>
+                      <a:srgbClr val="FFFFFF"/>
+                    </a:solidFill>
+                  </a:tcPr>
+                </a:tc>
+                <a:extLst>
+                  <a:ext uri="{0D108BD9-81ED-4DB2-BD59-A6C34878D82A}">
+                    <a16:rowId xmlns:a16="http://schemas.microsoft.com/office/drawing/2014/main" val="10001"/>
+                  </a:ext>
+                </a:extLst>
+              </a:tr>
+              <a:tr h="594360">
+                <a:tc>
+                  <a:txBody>
+                    <a:bodyPr/>
+                    <a:lstStyle/>
+                    <a:p>
+                      <a:r>
+                        <a:rPr sz="1200" b="0">
+                          <a:solidFill>
+                            <a:srgbClr val="222A38"/>
+                          </a:solidFill>
+                          <a:latin typeface="Calibri"/>
+                        </a:rPr>
+                        <a:t>2FN</a:t>
+                      </a:r>
+                    </a:p>
+                  </a:txBody>
+                  <a:tcPr marL="73152" marR="73152" marT="27432" marB="27432" anchor="ctr">
+                    <a:solidFill>
+                      <a:srgbClr val="F4F6F9"/>
+                    </a:solidFill>
+                  </a:tcPr>
+                </a:tc>
+                <a:tc>
+                  <a:txBody>
+                    <a:bodyPr/>
+                    <a:lstStyle/>
+                    <a:p>
+                      <a:r>
+                        <a:rPr sz="1200" b="0">
+                          <a:solidFill>
+                            <a:srgbClr val="222A38"/>
+                          </a:solidFill>
+                          <a:latin typeface="Calibri"/>
+                        </a:rPr>
+                        <a:t>Atributos de producto en la línea de pedido</a:t>
+                      </a:r>
+                    </a:p>
+                  </a:txBody>
+                  <a:tcPr marL="73152" marR="73152" marT="27432" marB="27432" anchor="ctr">
+                    <a:solidFill>
+                      <a:srgbClr val="F4F6F9"/>
+                    </a:solidFill>
+                  </a:tcPr>
+                </a:tc>
+                <a:tc>
+                  <a:txBody>
+                    <a:bodyPr/>
+                    <a:lstStyle/>
+                    <a:p>
+                      <a:r>
+                        <a:rPr sz="1200" b="0">
+                          <a:solidFill>
+                            <a:srgbClr val="222A38"/>
+                          </a:solidFill>
+                          <a:latin typeface="Calibri"/>
+                        </a:rPr>
+                        <a:t>Movidos a Products (PK retiene lo dependiente de la clave completa)</a:t>
+                      </a:r>
+                    </a:p>
+                  </a:txBody>
+                  <a:tcPr marL="73152" marR="73152" marT="27432" marB="27432" anchor="ctr">
+                    <a:solidFill>
+                      <a:srgbClr val="F4F6F9"/>
+                    </a:solidFill>
+                  </a:tcPr>
+                </a:tc>
+                <a:extLst>
+                  <a:ext uri="{0D108BD9-81ED-4DB2-BD59-A6C34878D82A}">
+                    <a16:rowId xmlns:a16="http://schemas.microsoft.com/office/drawing/2014/main" val="10002"/>
+                  </a:ext>
+                </a:extLst>
+              </a:tr>
+              <a:tr h="594360">
+                <a:tc>
+                  <a:txBody>
+                    <a:bodyPr/>
+                    <a:lstStyle/>
+                    <a:p>
+                      <a:r>
+                        <a:rPr sz="1200" b="0">
+                          <a:solidFill>
+                            <a:srgbClr val="222A38"/>
+                          </a:solidFill>
+                          <a:latin typeface="Calibri"/>
+                        </a:rPr>
+                        <a:t>3FN</a:t>
+                      </a:r>
+                    </a:p>
+                  </a:txBody>
+                  <a:tcPr marL="73152" marR="73152" marT="27432" marB="27432" anchor="ctr">
+                    <a:solidFill>
+                      <a:srgbClr val="FFFFFF"/>
+                    </a:solidFill>
+                  </a:tcPr>
+                </a:tc>
+                <a:tc>
+                  <a:txBody>
+                    <a:bodyPr/>
+                    <a:lstStyle/>
+                    <a:p>
+                      <a:r>
+                        <a:rPr sz="1200" b="0">
+                          <a:solidFill>
+                            <a:srgbClr val="222A38"/>
+                          </a:solidFill>
+                          <a:latin typeface="Calibri"/>
+                        </a:rPr>
+                        <a:t>ciudad/estado según zip; traducción según categoría</a:t>
+                      </a:r>
+                    </a:p>
+                  </a:txBody>
+                  <a:tcPr marL="73152" marR="73152" marT="27432" marB="27432" anchor="ctr">
+                    <a:solidFill>
+                      <a:srgbClr val="FFFFFF"/>
+                    </a:solidFill>
+                  </a:tcPr>
+                </a:tc>
+                <a:tc>
+                  <a:txBody>
+                    <a:bodyPr/>
+                    <a:lstStyle/>
+                    <a:p>
+                      <a:r>
+                        <a:rPr sz="1200" b="0">
+                          <a:solidFill>
+                            <a:srgbClr val="222A38"/>
+                          </a:solidFill>
+                          <a:latin typeface="Calibri"/>
+                        </a:rPr>
+                        <a:t>Entidades Geolocation y Category_Translation</a:t>
+                      </a:r>
+                    </a:p>
+                  </a:txBody>
+                  <a:tcPr marL="73152" marR="73152" marT="27432" marB="27432" anchor="ctr">
+                    <a:solidFill>
+                      <a:srgbClr val="FFFFFF"/>
+                    </a:solidFill>
+                  </a:tcPr>
+                </a:tc>
+                <a:extLst>
+                  <a:ext uri="{0D108BD9-81ED-4DB2-BD59-A6C34878D82A}">
+                    <a16:rowId xmlns:a16="http://schemas.microsoft.com/office/drawing/2014/main" val="10003"/>
+                  </a:ext>
+                </a:extLst>
+              </a:tr>
+            </a:tbl>
+          </a:graphicData>
+        </a:graphic>
+      </p:graphicFrame>
+    </p:spTree>
+  </p:cSld>
+  <p:clrMapOvr>
+    <a:masterClrMapping/>
+  </p:clrMapOvr>
+</p:sld>
+</file>
+
 <file path=ppt/theme/theme1.xml><?xml version="1.0" encoding="utf-8"?>
 <a:theme xmlns:a="http://schemas.openxmlformats.org/drawingml/2006/main" name="Office Theme">
   <a:themeElements>
